--- a/skills/zia-mta-basemap/examples/twy-e-asbuilt-ducts/fieldsheet/TWY_E_AGL_Shop_Drawing_ZIA_P07.pptx
+++ b/skills/zia-mta-basemap/examples/twy-e-asbuilt-ducts/fieldsheet/TWY_E_AGL_Shop_Drawing_ZIA_P07.pptx
@@ -16092,7 +16092,7 @@
                 <a:ea typeface="Arial" pitchFamily="34" charset="-122"/>
                 <a:cs typeface="Arial" pitchFamily="34" charset="-120"/>
               </a:rPr>
-              <a:t>SHALLOW BASE COLUMN LEFT BLANK ON FIELD SHEET — READ AS NOT AFFECTED; NO ASSET LIES INSIDE THE MILLING POLYGON. CONFIRM AT CUT LINE</a:t>
+              <a:t>NO SHALLOW BASES AFFECTED — COLUMN BLANK ON FIELD SHEET, CONFIRMED ‘NO’ 30.07.2026; NO ASSET LIES INSIDE THE MILLING POLYGON</a:t>
             </a:r>
             <a:endParaRPr lang="en-US" sz="760" dirty="0"/>
           </a:p>
@@ -16303,7 +16303,7 @@
                 </a:solidFill>
                 <a:latin typeface="Arial"/>
               </a:rPr>
-              <a:t>6. Rev P07: every asset on this sheet re-marked directly from field sheet Second_milling_area rev _1 (2nd table) — outer ring from the Secondary-cable / Shallow-base columns, inner disc from Duct / Sawcut. Assets not listed on the field sheet are shown grey with no action assumed.</a:t>
+              <a:t>6. Rev P07: every asset on this sheet re-marked directly from field sheet Second_milling_area rev _1 (2nd table) — outer ring from the Secondary-cable / Shallow-base columns, inner disc from Duct / Sawcut. Assets not listed on the field sheet are shown grey with no action assumed. Shallow-base column blank on that sheet; confirmed ‘NO’ 30.07.2026.</a:t>
             </a:r>
           </a:p>
         </p:txBody>

--- a/skills/zia-mta-basemap/examples/twy-e-asbuilt-ducts/fieldsheet/TWY_E_AGL_Shop_Drawing_ZIA_P07.pptx
+++ b/skills/zia-mta-basemap/examples/twy-e-asbuilt-ducts/fieldsheet/TWY_E_AGL_Shop_Drawing_ZIA_P07.pptx
@@ -10835,6 +10835,17 @@
               <a:t>6. Rev P07: every asset on this sheet re-marked directly from field sheet Document_3 — outer ring from the Secondary-cable / Shallow-base columns, inner disc from Duct / Sawcut. Assets not listed on the field sheet are shown grey with no action assumed.</a:t>
             </a:r>
           </a:p>
+          <a:p>
+            <a:r>
+              <a:rPr sz="680">
+                <a:solidFill>
+                  <a:srgbClr val="5F6368"/>
+                </a:solidFill>
+                <a:latin typeface="Arial"/>
+              </a:rPr>
+              <a:t>7. Asset key: label prefix to as-built class, from the AGL asset survey checked against the AGL duct-layout CAD. Civil items (HH / MH / pits / RRM) plot about 2.1 m from the surveyed insertion point — set out from survey, not from this sheet. A pit prefix can cover more than one civil class (manhole, transformer handhole, earthing); confirm the individual pit before works.</a:t>
+            </a:r>
+          </a:p>
         </p:txBody>
       </p:sp>
       <p:sp>
@@ -10866,951 +10877,6 @@
           <a:lstStyle/>
           <a:p>
             <a:endParaRPr lang="en-US"/>
-          </a:p>
-        </p:txBody>
-      </p:sp>
-      <p:sp>
-        <p:nvSpPr>
-          <p:cNvPr id="317" name="Text 315"/>
-          <p:cNvSpPr/>
-          <p:nvPr/>
-        </p:nvSpPr>
-        <p:spPr>
-          <a:xfrm>
-            <a:off x="10241280" y="7120433"/>
-            <a:ext cx="4434840" cy="219456"/>
-          </a:xfrm>
-          <a:prstGeom prst="rect">
-            <a:avLst/>
-          </a:prstGeom>
-          <a:noFill/>
-          <a:ln>
-            <a:noFill/>
-          </a:ln>
-        </p:spPr>
-        <p:txBody>
-          <a:bodyPr wrap="square" lIns="0" tIns="0" rIns="0" bIns="0" rtlCol="0" anchor="ctr"/>
-          <a:lstStyle/>
-          <a:p>
-            <a:pPr marL="0" indent="0">
-              <a:buNone/>
-            </a:pPr>
-            <a:r>
-              <a:rPr lang="en-US" sz="950" b="1" dirty="0">
-                <a:solidFill>
-                  <a:srgbClr val="1E2761"/>
-                </a:solidFill>
-                <a:latin typeface="Arial" pitchFamily="34" charset="0"/>
-                <a:ea typeface="Arial" pitchFamily="34" charset="-122"/>
-                <a:cs typeface="Arial" pitchFamily="34" charset="-120"/>
-              </a:rPr>
-              <a:t>LEGEND — WORKS ACTIONS (THIS SHEET)</a:t>
-            </a:r>
-            <a:endParaRPr lang="en-US" sz="950" dirty="0"/>
-          </a:p>
-        </p:txBody>
-      </p:sp>
-      <p:sp>
-        <p:nvSpPr>
-          <p:cNvPr id="318" name="Shape 316"/>
-          <p:cNvSpPr/>
-          <p:nvPr/>
-        </p:nvSpPr>
-        <p:spPr>
-          <a:xfrm>
-            <a:off x="10305288" y="7445045"/>
-            <a:ext cx="192024" cy="192024"/>
-          </a:xfrm>
-          <a:prstGeom prst="ellipse">
-            <a:avLst/>
-          </a:prstGeom>
-          <a:ln w="28575">
-            <a:solidFill>
-              <a:srgbClr val="CC0000"/>
-            </a:solidFill>
-            <a:prstDash val="solid"/>
-          </a:ln>
-        </p:spPr>
-        <p:txBody>
-          <a:bodyPr/>
-          <a:lstStyle/>
-          <a:p>
-            <a:endParaRPr lang="en-US"/>
-          </a:p>
-        </p:txBody>
-      </p:sp>
-      <p:sp>
-        <p:nvSpPr>
-          <p:cNvPr id="319" name="Shape 317"/>
-          <p:cNvSpPr/>
-          <p:nvPr/>
-        </p:nvSpPr>
-        <p:spPr>
-          <a:xfrm>
-            <a:off x="10351008" y="7490765"/>
-            <a:ext cx="100584" cy="100584"/>
-          </a:xfrm>
-          <a:prstGeom prst="ellipse">
-            <a:avLst/>
-          </a:prstGeom>
-          <a:solidFill>
-            <a:srgbClr val="0055CC"/>
-          </a:solidFill>
-          <a:ln w="6350">
-            <a:solidFill>
-              <a:srgbClr val="0055CC"/>
-            </a:solidFill>
-            <a:prstDash val="solid"/>
-          </a:ln>
-        </p:spPr>
-        <p:txBody>
-          <a:bodyPr/>
-          <a:lstStyle/>
-          <a:p>
-            <a:endParaRPr lang="en-US"/>
-          </a:p>
-        </p:txBody>
-      </p:sp>
-      <p:sp>
-        <p:nvSpPr>
-          <p:cNvPr id="320" name="Text 318"/>
-          <p:cNvSpPr/>
-          <p:nvPr/>
-        </p:nvSpPr>
-        <p:spPr>
-          <a:xfrm>
-            <a:off x="10616184" y="7431329"/>
-            <a:ext cx="4050792" cy="237744"/>
-          </a:xfrm>
-          <a:prstGeom prst="rect">
-            <a:avLst/>
-          </a:prstGeom>
-          <a:noFill/>
-          <a:ln>
-            <a:noFill/>
-          </a:ln>
-        </p:spPr>
-        <p:txBody>
-          <a:bodyPr wrap="square" lIns="0" tIns="0" rIns="0" bIns="0" rtlCol="0" anchor="ctr"/>
-          <a:lstStyle/>
-          <a:p>
-            <a:pPr marL="0" indent="0">
-              <a:buNone/>
-            </a:pPr>
-            <a:r>
-              <a:rPr lang="en-US" sz="740" dirty="0">
-                <a:solidFill>
-                  <a:srgbClr val="1F2937"/>
-                </a:solidFill>
-                <a:latin typeface="Arial" pitchFamily="34" charset="0"/>
-                <a:ea typeface="Arial" pitchFamily="34" charset="-122"/>
-                <a:cs typeface="Arial" pitchFamily="34" charset="-120"/>
-              </a:rPr>
-              <a:t>CORE OUT + NEW CABLE (DUCT) — outer red / inner blue</a:t>
-            </a:r>
-            <a:endParaRPr lang="en-US" sz="740" dirty="0"/>
-          </a:p>
-        </p:txBody>
-      </p:sp>
-      <p:sp>
-        <p:nvSpPr>
-          <p:cNvPr id="321" name="Shape 319"/>
-          <p:cNvSpPr/>
-          <p:nvPr/>
-        </p:nvSpPr>
-        <p:spPr>
-          <a:xfrm>
-            <a:off x="10305288" y="7719365"/>
-            <a:ext cx="192024" cy="192024"/>
-          </a:xfrm>
-          <a:prstGeom prst="ellipse">
-            <a:avLst/>
-          </a:prstGeom>
-          <a:ln w="28575">
-            <a:solidFill>
-              <a:srgbClr val="CC0000"/>
-            </a:solidFill>
-            <a:prstDash val="solid"/>
-          </a:ln>
-        </p:spPr>
-        <p:txBody>
-          <a:bodyPr/>
-          <a:lstStyle/>
-          <a:p>
-            <a:endParaRPr lang="en-US"/>
-          </a:p>
-        </p:txBody>
-      </p:sp>
-      <p:sp>
-        <p:nvSpPr>
-          <p:cNvPr id="322" name="Shape 320"/>
-          <p:cNvSpPr/>
-          <p:nvPr/>
-        </p:nvSpPr>
-        <p:spPr>
-          <a:xfrm>
-            <a:off x="10351008" y="7765085"/>
-            <a:ext cx="100584" cy="100584"/>
-          </a:xfrm>
-          <a:prstGeom prst="ellipse">
-            <a:avLst/>
-          </a:prstGeom>
-          <a:solidFill>
-            <a:srgbClr val="E8710A"/>
-          </a:solidFill>
-          <a:ln w="6350">
-            <a:solidFill>
-              <a:srgbClr val="E8710A"/>
-            </a:solidFill>
-            <a:prstDash val="solid"/>
-          </a:ln>
-        </p:spPr>
-        <p:txBody>
-          <a:bodyPr/>
-          <a:lstStyle/>
-          <a:p>
-            <a:endParaRPr lang="en-US"/>
-          </a:p>
-        </p:txBody>
-      </p:sp>
-      <p:sp>
-        <p:nvSpPr>
-          <p:cNvPr id="323" name="Text 321"/>
-          <p:cNvSpPr/>
-          <p:nvPr/>
-        </p:nvSpPr>
-        <p:spPr>
-          <a:xfrm>
-            <a:off x="10616184" y="7705649"/>
-            <a:ext cx="4050792" cy="237744"/>
-          </a:xfrm>
-          <a:prstGeom prst="rect">
-            <a:avLst/>
-          </a:prstGeom>
-          <a:noFill/>
-          <a:ln>
-            <a:noFill/>
-          </a:ln>
-        </p:spPr>
-        <p:txBody>
-          <a:bodyPr wrap="square" lIns="0" tIns="0" rIns="0" bIns="0" rtlCol="0" anchor="ctr"/>
-          <a:lstStyle/>
-          <a:p>
-            <a:pPr marL="0" indent="0">
-              <a:buNone/>
-            </a:pPr>
-            <a:r>
-              <a:rPr lang="en-US" sz="740" dirty="0">
-                <a:solidFill>
-                  <a:srgbClr val="1F2937"/>
-                </a:solidFill>
-                <a:latin typeface="Arial" pitchFamily="34" charset="0"/>
-                <a:ea typeface="Arial" pitchFamily="34" charset="-122"/>
-                <a:cs typeface="Arial" pitchFamily="34" charset="-120"/>
-              </a:rPr>
-              <a:t>CORE OUT + NEW CABLE (SAWCUT) — outer red / inner orange</a:t>
-            </a:r>
-            <a:endParaRPr lang="en-US" sz="740" dirty="0"/>
-          </a:p>
-        </p:txBody>
-      </p:sp>
-      <p:sp>
-        <p:nvSpPr>
-          <p:cNvPr id="324" name="Shape 322"/>
-          <p:cNvSpPr/>
-          <p:nvPr/>
-        </p:nvSpPr>
-        <p:spPr>
-          <a:xfrm>
-            <a:off x="10305288" y="7993685"/>
-            <a:ext cx="192024" cy="192024"/>
-          </a:xfrm>
-          <a:prstGeom prst="ellipse">
-            <a:avLst/>
-          </a:prstGeom>
-          <a:ln w="28575">
-            <a:solidFill>
-              <a:srgbClr val="0055CC"/>
-            </a:solidFill>
-            <a:prstDash val="solid"/>
-          </a:ln>
-        </p:spPr>
-        <p:txBody>
-          <a:bodyPr/>
-          <a:lstStyle/>
-          <a:p>
-            <a:endParaRPr lang="en-US"/>
-          </a:p>
-        </p:txBody>
-      </p:sp>
-      <p:sp>
-        <p:nvSpPr>
-          <p:cNvPr id="325" name="Shape 323"/>
-          <p:cNvSpPr/>
-          <p:nvPr/>
-        </p:nvSpPr>
-        <p:spPr>
-          <a:xfrm>
-            <a:off x="10351008" y="8039405"/>
-            <a:ext cx="100584" cy="100584"/>
-          </a:xfrm>
-          <a:prstGeom prst="ellipse">
-            <a:avLst/>
-          </a:prstGeom>
-          <a:solidFill>
-            <a:srgbClr val="1E8E3E"/>
-          </a:solidFill>
-          <a:ln w="6350">
-            <a:solidFill>
-              <a:srgbClr val="1E8E3E"/>
-            </a:solidFill>
-            <a:prstDash val="solid"/>
-          </a:ln>
-        </p:spPr>
-        <p:txBody>
-          <a:bodyPr/>
-          <a:lstStyle/>
-          <a:p>
-            <a:endParaRPr lang="en-US"/>
-          </a:p>
-        </p:txBody>
-      </p:sp>
-      <p:sp>
-        <p:nvSpPr>
-          <p:cNvPr id="326" name="Text 324"/>
-          <p:cNvSpPr/>
-          <p:nvPr/>
-        </p:nvSpPr>
-        <p:spPr>
-          <a:xfrm>
-            <a:off x="10616184" y="7979969"/>
-            <a:ext cx="4050792" cy="237744"/>
-          </a:xfrm>
-          <a:prstGeom prst="rect">
-            <a:avLst/>
-          </a:prstGeom>
-          <a:noFill/>
-          <a:ln>
-            <a:noFill/>
-          </a:ln>
-        </p:spPr>
-        <p:txBody>
-          <a:bodyPr wrap="square" lIns="0" tIns="0" rIns="0" bIns="0" rtlCol="0" anchor="ctr"/>
-          <a:lstStyle/>
-          <a:p>
-            <a:pPr marL="0" indent="0">
-              <a:buNone/>
-            </a:pPr>
-            <a:r>
-              <a:rPr lang="en-US" sz="740" dirty="0">
-                <a:solidFill>
-                  <a:srgbClr val="1F2937"/>
-                </a:solidFill>
-                <a:latin typeface="Arial" pitchFamily="34" charset="0"/>
-                <a:ea typeface="Arial" pitchFamily="34" charset="-122"/>
-                <a:cs typeface="Arial" pitchFamily="34" charset="-120"/>
-              </a:rPr>
-              <a:t>NEW SEC. CABLE ONLY (DUCT) — outer blue / inner green</a:t>
-            </a:r>
-            <a:endParaRPr lang="en-US" sz="740" dirty="0"/>
-          </a:p>
-        </p:txBody>
-      </p:sp>
-      <p:sp>
-        <p:nvSpPr>
-          <p:cNvPr id="327" name="Shape 325"/>
-          <p:cNvSpPr/>
-          <p:nvPr/>
-        </p:nvSpPr>
-        <p:spPr>
-          <a:xfrm>
-            <a:off x="10305288" y="8268005"/>
-            <a:ext cx="192024" cy="192024"/>
-          </a:xfrm>
-          <a:prstGeom prst="ellipse">
-            <a:avLst/>
-          </a:prstGeom>
-          <a:ln w="28575">
-            <a:solidFill>
-              <a:srgbClr val="E8710A"/>
-            </a:solidFill>
-            <a:prstDash val="solid"/>
-          </a:ln>
-        </p:spPr>
-        <p:txBody>
-          <a:bodyPr/>
-          <a:lstStyle/>
-          <a:p>
-            <a:endParaRPr lang="en-US"/>
-          </a:p>
-        </p:txBody>
-      </p:sp>
-      <p:sp>
-        <p:nvSpPr>
-          <p:cNvPr id="328" name="Shape 326"/>
-          <p:cNvSpPr/>
-          <p:nvPr/>
-        </p:nvSpPr>
-        <p:spPr>
-          <a:xfrm>
-            <a:off x="10351008" y="8313725"/>
-            <a:ext cx="100584" cy="100584"/>
-          </a:xfrm>
-          <a:prstGeom prst="ellipse">
-            <a:avLst/>
-          </a:prstGeom>
-          <a:solidFill>
-            <a:srgbClr val="1E8E3E"/>
-          </a:solidFill>
-          <a:ln w="6350">
-            <a:solidFill>
-              <a:srgbClr val="1E8E3E"/>
-            </a:solidFill>
-            <a:prstDash val="solid"/>
-          </a:ln>
-        </p:spPr>
-        <p:txBody>
-          <a:bodyPr/>
-          <a:lstStyle/>
-          <a:p>
-            <a:endParaRPr lang="en-US"/>
-          </a:p>
-        </p:txBody>
-      </p:sp>
-      <p:sp>
-        <p:nvSpPr>
-          <p:cNvPr id="329" name="Text 327"/>
-          <p:cNvSpPr/>
-          <p:nvPr/>
-        </p:nvSpPr>
-        <p:spPr>
-          <a:xfrm>
-            <a:off x="10616184" y="8254289"/>
-            <a:ext cx="4050792" cy="237744"/>
-          </a:xfrm>
-          <a:prstGeom prst="rect">
-            <a:avLst/>
-          </a:prstGeom>
-          <a:noFill/>
-          <a:ln>
-            <a:noFill/>
-          </a:ln>
-        </p:spPr>
-        <p:txBody>
-          <a:bodyPr wrap="square" lIns="0" tIns="0" rIns="0" bIns="0" rtlCol="0" anchor="ctr"/>
-          <a:lstStyle/>
-          <a:p>
-            <a:pPr marL="0" indent="0">
-              <a:buNone/>
-            </a:pPr>
-            <a:r>
-              <a:rPr lang="en-US" sz="740" dirty="0">
-                <a:solidFill>
-                  <a:srgbClr val="1F2937"/>
-                </a:solidFill>
-                <a:latin typeface="Arial" pitchFamily="34" charset="0"/>
-                <a:ea typeface="Arial" pitchFamily="34" charset="-122"/>
-                <a:cs typeface="Arial" pitchFamily="34" charset="-120"/>
-              </a:rPr>
-              <a:t>NEW SEC. CABLE ONLY (SAWCUT) — outer orange / inner green</a:t>
-            </a:r>
-            <a:endParaRPr lang="en-US" sz="740" dirty="0"/>
-          </a:p>
-        </p:txBody>
-      </p:sp>
-      <p:sp>
-        <p:nvSpPr>
-          <p:cNvPr id="330" name="Shape 328"/>
-          <p:cNvSpPr/>
-          <p:nvPr/>
-        </p:nvSpPr>
-        <p:spPr>
-          <a:xfrm>
-            <a:off x="10305288" y="8542325"/>
-            <a:ext cx="192024" cy="192024"/>
-          </a:xfrm>
-          <a:prstGeom prst="ellipse">
-            <a:avLst/>
-          </a:prstGeom>
-          <a:ln w="28575">
-            <a:solidFill>
-              <a:srgbClr val="9AA0A6"/>
-            </a:solidFill>
-            <a:prstDash val="solid"/>
-          </a:ln>
-        </p:spPr>
-        <p:txBody>
-          <a:bodyPr/>
-          <a:lstStyle/>
-          <a:p>
-            <a:endParaRPr lang="en-US"/>
-          </a:p>
-        </p:txBody>
-      </p:sp>
-      <p:sp>
-        <p:nvSpPr>
-          <p:cNvPr id="331" name="Text 329"/>
-          <p:cNvSpPr/>
-          <p:nvPr/>
-        </p:nvSpPr>
-        <p:spPr>
-          <a:xfrm>
-            <a:off x="10616184" y="8528609"/>
-            <a:ext cx="4050792" cy="237744"/>
-          </a:xfrm>
-          <a:prstGeom prst="rect">
-            <a:avLst/>
-          </a:prstGeom>
-          <a:noFill/>
-          <a:ln>
-            <a:noFill/>
-          </a:ln>
-        </p:spPr>
-        <p:txBody>
-          <a:bodyPr wrap="square" lIns="0" tIns="0" rIns="0" bIns="0" rtlCol="0" anchor="ctr"/>
-          <a:lstStyle/>
-          <a:p>
-            <a:pPr marL="0" indent="0">
-              <a:buNone/>
-            </a:pPr>
-            <a:r>
-              <a:rPr lang="en-US" sz="740" dirty="0">
-                <a:solidFill>
-                  <a:srgbClr val="1F2937"/>
-                </a:solidFill>
-                <a:latin typeface="Arial" pitchFamily="34" charset="0"/>
-                <a:cs typeface="Arial" pitchFamily="34" charset="-120"/>
-              </a:rPr>
-              <a:t>FIELD VERIFIED NOT AFFECTED / NOT ON FIELD SHEET (grey ring)</a:t>
-            </a:r>
-          </a:p>
-        </p:txBody>
-      </p:sp>
-      <p:sp>
-        <p:nvSpPr>
-          <p:cNvPr id="332" name="Shape 330"/>
-          <p:cNvSpPr/>
-          <p:nvPr/>
-        </p:nvSpPr>
-        <p:spPr>
-          <a:xfrm>
-            <a:off x="10351008" y="8866937"/>
-            <a:ext cx="91440" cy="91440"/>
-          </a:xfrm>
-          <a:prstGeom prst="ellipse">
-            <a:avLst/>
-          </a:prstGeom>
-          <a:solidFill>
-            <a:srgbClr val="12A5B8"/>
-          </a:solidFill>
-          <a:ln w="6350">
-            <a:solidFill>
-              <a:srgbClr val="12A5B8"/>
-            </a:solidFill>
-            <a:prstDash val="solid"/>
-          </a:ln>
-        </p:spPr>
-        <p:txBody>
-          <a:bodyPr/>
-          <a:lstStyle/>
-          <a:p>
-            <a:endParaRPr lang="en-US"/>
-          </a:p>
-        </p:txBody>
-      </p:sp>
-      <p:sp>
-        <p:nvSpPr>
-          <p:cNvPr id="333" name="Text 331"/>
-          <p:cNvSpPr/>
-          <p:nvPr/>
-        </p:nvSpPr>
-        <p:spPr>
-          <a:xfrm>
-            <a:off x="10616184" y="8802929"/>
-            <a:ext cx="4050792" cy="237744"/>
-          </a:xfrm>
-          <a:prstGeom prst="rect">
-            <a:avLst/>
-          </a:prstGeom>
-          <a:noFill/>
-          <a:ln>
-            <a:noFill/>
-          </a:ln>
-        </p:spPr>
-        <p:txBody>
-          <a:bodyPr wrap="square" lIns="0" tIns="0" rIns="0" bIns="0" rtlCol="0" anchor="ctr"/>
-          <a:lstStyle/>
-          <a:p>
-            <a:pPr marL="0" indent="0">
-              <a:buNone/>
-            </a:pPr>
-            <a:r>
-              <a:rPr lang="en-US" sz="740" dirty="0">
-                <a:solidFill>
-                  <a:srgbClr val="1F2937"/>
-                </a:solidFill>
-                <a:latin typeface="Arial" pitchFamily="34" charset="0"/>
-                <a:ea typeface="Arial" pitchFamily="34" charset="-122"/>
-                <a:cs typeface="Arial" pitchFamily="34" charset="-120"/>
-              </a:rPr>
-              <a:t>EXISTING AGL ASSET (AS-BUILT)</a:t>
-            </a:r>
-            <a:endParaRPr lang="en-US" sz="740" dirty="0"/>
-          </a:p>
-        </p:txBody>
-      </p:sp>
-      <p:sp>
-        <p:nvSpPr>
-          <p:cNvPr id="334" name="Shape 332"/>
-          <p:cNvSpPr/>
-          <p:nvPr/>
-        </p:nvSpPr>
-        <p:spPr>
-          <a:xfrm>
-            <a:off x="10268712" y="9186977"/>
-            <a:ext cx="274320" cy="914"/>
-          </a:xfrm>
-          <a:prstGeom prst="line">
-            <a:avLst/>
-          </a:prstGeom>
-          <a:noFill/>
-          <a:ln w="19050">
-            <a:solidFill>
-              <a:srgbClr val="BB00BB"/>
-            </a:solidFill>
-            <a:prstDash val="dash"/>
-          </a:ln>
-        </p:spPr>
-        <p:txBody>
-          <a:bodyPr/>
-          <a:lstStyle/>
-          <a:p>
-            <a:endParaRPr lang="en-US"/>
-          </a:p>
-        </p:txBody>
-      </p:sp>
-      <p:sp>
-        <p:nvSpPr>
-          <p:cNvPr id="335" name="Text 333"/>
-          <p:cNvSpPr/>
-          <p:nvPr/>
-        </p:nvSpPr>
-        <p:spPr>
-          <a:xfrm>
-            <a:off x="10616184" y="9077249"/>
-            <a:ext cx="4050792" cy="237744"/>
-          </a:xfrm>
-          <a:prstGeom prst="rect">
-            <a:avLst/>
-          </a:prstGeom>
-          <a:noFill/>
-          <a:ln>
-            <a:noFill/>
-          </a:ln>
-        </p:spPr>
-        <p:txBody>
-          <a:bodyPr wrap="square" lIns="0" tIns="0" rIns="0" bIns="0" rtlCol="0" anchor="ctr"/>
-          <a:lstStyle/>
-          <a:p>
-            <a:pPr marL="0" indent="0">
-              <a:buNone/>
-            </a:pPr>
-            <a:r>
-              <a:rPr lang="en-US" sz="740" dirty="0">
-                <a:solidFill>
-                  <a:srgbClr val="1F2937"/>
-                </a:solidFill>
-                <a:latin typeface="Arial" pitchFamily="34" charset="0"/>
-                <a:ea typeface="Arial" pitchFamily="34" charset="-122"/>
-                <a:cs typeface="Arial" pitchFamily="34" charset="-120"/>
-              </a:rPr>
-              <a:t>SECONDARY DUCT RUN CROSSING CUT (INDICATIVE)</a:t>
-            </a:r>
-            <a:endParaRPr lang="en-US" sz="740" dirty="0"/>
-          </a:p>
-        </p:txBody>
-      </p:sp>
-      <p:sp>
-        <p:nvSpPr>
-          <p:cNvPr id="336" name="Shape 334"/>
-          <p:cNvSpPr/>
-          <p:nvPr/>
-        </p:nvSpPr>
-        <p:spPr>
-          <a:xfrm>
-            <a:off x="10268712" y="9461297"/>
-            <a:ext cx="274320" cy="914"/>
-          </a:xfrm>
-          <a:prstGeom prst="line">
-            <a:avLst/>
-          </a:prstGeom>
-          <a:noFill/>
-          <a:ln w="28575">
-            <a:solidFill>
-              <a:srgbClr val="CC0000"/>
-            </a:solidFill>
-            <a:prstDash val="solid"/>
-          </a:ln>
-        </p:spPr>
-        <p:txBody>
-          <a:bodyPr/>
-          <a:lstStyle/>
-          <a:p>
-            <a:endParaRPr lang="en-US"/>
-          </a:p>
-        </p:txBody>
-      </p:sp>
-      <p:sp>
-        <p:nvSpPr>
-          <p:cNvPr id="337" name="Text 335"/>
-          <p:cNvSpPr/>
-          <p:nvPr/>
-        </p:nvSpPr>
-        <p:spPr>
-          <a:xfrm>
-            <a:off x="10616184" y="9351569"/>
-            <a:ext cx="4050792" cy="237744"/>
-          </a:xfrm>
-          <a:prstGeom prst="rect">
-            <a:avLst/>
-          </a:prstGeom>
-          <a:noFill/>
-          <a:ln>
-            <a:noFill/>
-          </a:ln>
-        </p:spPr>
-        <p:txBody>
-          <a:bodyPr wrap="square" lIns="0" tIns="0" rIns="0" bIns="0" rtlCol="0" anchor="ctr"/>
-          <a:lstStyle/>
-          <a:p>
-            <a:pPr marL="0" indent="0">
-              <a:buNone/>
-            </a:pPr>
-            <a:r>
-              <a:rPr lang="en-US" sz="740" dirty="0">
-                <a:solidFill>
-                  <a:srgbClr val="1F2937"/>
-                </a:solidFill>
-                <a:latin typeface="Arial" pitchFamily="34" charset="0"/>
-                <a:ea typeface="Arial" pitchFamily="34" charset="-122"/>
-                <a:cs typeface="Arial" pitchFamily="34" charset="-120"/>
-              </a:rPr>
-              <a:t>AGL WORKS DEMARCATION (GOVERNING)</a:t>
-            </a:r>
-            <a:endParaRPr lang="en-US" sz="740" dirty="0"/>
-          </a:p>
-        </p:txBody>
-      </p:sp>
-      <p:sp>
-        <p:nvSpPr>
-          <p:cNvPr id="338" name="Shape 336"/>
-          <p:cNvSpPr/>
-          <p:nvPr/>
-        </p:nvSpPr>
-        <p:spPr>
-          <a:xfrm>
-            <a:off x="10268712" y="9735617"/>
-            <a:ext cx="274320" cy="914"/>
-          </a:xfrm>
-          <a:prstGeom prst="line">
-            <a:avLst/>
-          </a:prstGeom>
-          <a:noFill/>
-          <a:ln w="19050">
-            <a:solidFill>
-              <a:srgbClr val="C7A400"/>
-            </a:solidFill>
-            <a:prstDash val="dashDot"/>
-          </a:ln>
-        </p:spPr>
-        <p:txBody>
-          <a:bodyPr/>
-          <a:lstStyle/>
-          <a:p>
-            <a:endParaRPr lang="en-US"/>
-          </a:p>
-        </p:txBody>
-      </p:sp>
-      <p:sp>
-        <p:nvSpPr>
-          <p:cNvPr id="339" name="Text 337"/>
-          <p:cNvSpPr/>
-          <p:nvPr/>
-        </p:nvSpPr>
-        <p:spPr>
-          <a:xfrm>
-            <a:off x="10616184" y="9625889"/>
-            <a:ext cx="4050792" cy="237744"/>
-          </a:xfrm>
-          <a:prstGeom prst="rect">
-            <a:avLst/>
-          </a:prstGeom>
-          <a:noFill/>
-          <a:ln>
-            <a:noFill/>
-          </a:ln>
-        </p:spPr>
-        <p:txBody>
-          <a:bodyPr wrap="square" lIns="0" tIns="0" rIns="0" bIns="0" rtlCol="0" anchor="ctr"/>
-          <a:lstStyle/>
-          <a:p>
-            <a:pPr marL="0" indent="0">
-              <a:buNone/>
-            </a:pPr>
-            <a:r>
-              <a:rPr lang="en-US" sz="740" dirty="0">
-                <a:solidFill>
-                  <a:srgbClr val="1F2937"/>
-                </a:solidFill>
-                <a:latin typeface="Arial" pitchFamily="34" charset="0"/>
-                <a:ea typeface="Arial" pitchFamily="34" charset="-122"/>
-                <a:cs typeface="Arial" pitchFamily="34" charset="-120"/>
-              </a:rPr>
-              <a:t>TAXIWAY CENTERLINE (AS-BUILT, THROUGH TCC FITTINGS)</a:t>
-            </a:r>
-            <a:endParaRPr lang="en-US" sz="740" dirty="0"/>
-          </a:p>
-        </p:txBody>
-      </p:sp>
-      <p:sp>
-        <p:nvSpPr>
-          <p:cNvPr id="340" name="Shape 338"/>
-          <p:cNvSpPr/>
-          <p:nvPr/>
-        </p:nvSpPr>
-        <p:spPr>
-          <a:xfrm>
-            <a:off x="10268712" y="10009937"/>
-            <a:ext cx="274320" cy="914"/>
-          </a:xfrm>
-          <a:prstGeom prst="line">
-            <a:avLst/>
-          </a:prstGeom>
-          <a:noFill/>
-          <a:ln w="28575">
-            <a:solidFill>
-              <a:srgbClr val="8B0000"/>
-            </a:solidFill>
-            <a:prstDash val="solid"/>
-          </a:ln>
-        </p:spPr>
-        <p:txBody>
-          <a:bodyPr/>
-          <a:lstStyle/>
-          <a:p>
-            <a:endParaRPr lang="en-US"/>
-          </a:p>
-        </p:txBody>
-      </p:sp>
-      <p:sp>
-        <p:nvSpPr>
-          <p:cNvPr id="341" name="Text 339"/>
-          <p:cNvSpPr/>
-          <p:nvPr/>
-        </p:nvSpPr>
-        <p:spPr>
-          <a:xfrm>
-            <a:off x="10616184" y="9900209"/>
-            <a:ext cx="4050792" cy="237744"/>
-          </a:xfrm>
-          <a:prstGeom prst="rect">
-            <a:avLst/>
-          </a:prstGeom>
-          <a:noFill/>
-          <a:ln>
-            <a:noFill/>
-          </a:ln>
-        </p:spPr>
-        <p:txBody>
-          <a:bodyPr wrap="square" lIns="0" tIns="0" rIns="0" bIns="0" rtlCol="0" anchor="ctr"/>
-          <a:lstStyle/>
-          <a:p>
-            <a:pPr marL="0" indent="0">
-              <a:buNone/>
-            </a:pPr>
-            <a:r>
-              <a:rPr lang="en-US" sz="740" dirty="0">
-                <a:solidFill>
-                  <a:srgbClr val="1F2937"/>
-                </a:solidFill>
-                <a:latin typeface="Arial" pitchFamily="34" charset="0"/>
-                <a:ea typeface="Arial" pitchFamily="34" charset="-122"/>
-                <a:cs typeface="Arial" pitchFamily="34" charset="-120"/>
-              </a:rPr>
-              <a:t>STOP BAR (AS-BUILT, THROUGH SBC FITTINGS)</a:t>
-            </a:r>
-            <a:endParaRPr lang="en-US" sz="740" dirty="0"/>
-          </a:p>
-        </p:txBody>
-      </p:sp>
-      <p:sp>
-        <p:nvSpPr>
-          <p:cNvPr id="342" name="Shape 340"/>
-          <p:cNvSpPr/>
-          <p:nvPr/>
-        </p:nvSpPr>
-        <p:spPr>
-          <a:xfrm>
-            <a:off x="10268712" y="10284257"/>
-            <a:ext cx="274320" cy="914"/>
-          </a:xfrm>
-          <a:prstGeom prst="line">
-            <a:avLst/>
-          </a:prstGeom>
-          <a:noFill/>
-          <a:ln w="12700">
-            <a:solidFill>
-              <a:srgbClr val="7A8288"/>
-            </a:solidFill>
-            <a:prstDash val="solid"/>
-          </a:ln>
-        </p:spPr>
-        <p:txBody>
-          <a:bodyPr/>
-          <a:lstStyle/>
-          <a:p>
-            <a:endParaRPr lang="en-US"/>
-          </a:p>
-        </p:txBody>
-      </p:sp>
-      <p:sp>
-        <p:nvSpPr>
-          <p:cNvPr id="343" name="Text 341"/>
-          <p:cNvSpPr/>
-          <p:nvPr/>
-        </p:nvSpPr>
-        <p:spPr>
-          <a:xfrm>
-            <a:off x="10616184" y="10174529"/>
-            <a:ext cx="4050792" cy="237744"/>
-          </a:xfrm>
-          <a:prstGeom prst="rect">
-            <a:avLst/>
-          </a:prstGeom>
-          <a:noFill/>
-          <a:ln>
-            <a:noFill/>
-          </a:ln>
-        </p:spPr>
-        <p:txBody>
-          <a:bodyPr wrap="square" lIns="0" tIns="0" rIns="0" bIns="0" rtlCol="0" anchor="ctr"/>
-          <a:lstStyle/>
-          <a:p>
-            <a:pPr marL="0" indent="0">
-              <a:buNone/>
-            </a:pPr>
-            <a:r>
-              <a:rPr lang="en-US" sz="740" dirty="0">
-                <a:solidFill>
-                  <a:srgbClr val="1F2937"/>
-                </a:solidFill>
-                <a:latin typeface="Arial" pitchFamily="34" charset="0"/>
-                <a:ea typeface="Arial" pitchFamily="34" charset="-122"/>
-                <a:cs typeface="Arial" pitchFamily="34" charset="-120"/>
-              </a:rPr>
-              <a:t>TWY EDGE / PAVEMENT BOUNDARY (INDICATIVE 23 m — CONFIRM ON SITE)</a:t>
-            </a:r>
-            <a:endParaRPr lang="en-US" sz="740" dirty="0"/>
           </a:p>
         </p:txBody>
       </p:sp>
@@ -12525,7 +11591,7 @@
         <p:spPr>
           <a:xfrm>
             <a:off x="5786671" y="5858817"/>
-            <a:ext cx="991406" cy="200055"/>
+            <a:ext cx="1143000" cy="200055"/>
           </a:xfrm>
           <a:prstGeom prst="rect">
             <a:avLst/>
@@ -12540,9 +11606,9 @@
           <a:p>
             <a:pPr algn="l"/>
             <a:r>
-              <a:rPr lang="en-US" sz="700" b="1" dirty="0">
+              <a:rPr lang="en-US" sz="650" b="1" dirty="0">
                 <a:solidFill>
-                  <a:srgbClr val="1E2761"/>
+                  <a:srgbClr val="1F2937"/>
                 </a:solidFill>
                 <a:latin typeface="Arial"/>
                 <a:cs typeface="Arial"/>
@@ -12567,7 +11633,7 @@
         <p:spPr>
           <a:xfrm>
             <a:off x="6366286" y="6340617"/>
-            <a:ext cx="937765" cy="200055"/>
+            <a:ext cx="1143000" cy="200055"/>
           </a:xfrm>
           <a:prstGeom prst="rect">
             <a:avLst/>
@@ -12581,9 +11647,9 @@
           <a:lstStyle/>
           <a:p>
             <a:r>
-              <a:rPr lang="en-US" sz="700" b="1" dirty="0">
+              <a:rPr lang="en-US" sz="650" b="1" dirty="0">
                 <a:solidFill>
-                  <a:srgbClr val="1E2761"/>
+                  <a:srgbClr val="1F2937"/>
                 </a:solidFill>
                 <a:latin typeface="Arial"/>
                 <a:cs typeface="Arial"/>
@@ -12608,7 +11674,7 @@
         <p:spPr>
           <a:xfrm>
             <a:off x="6892547" y="6636083"/>
-            <a:ext cx="1104675" cy="200055"/>
+            <a:ext cx="1143000" cy="200055"/>
           </a:xfrm>
           <a:prstGeom prst="rect">
             <a:avLst/>
@@ -12622,9 +11688,9 @@
           <a:lstStyle/>
           <a:p>
             <a:r>
-              <a:rPr lang="en-US" sz="700" b="1" dirty="0">
+              <a:rPr lang="en-US" sz="650" b="1" dirty="0">
                 <a:solidFill>
-                  <a:srgbClr val="1E2761"/>
+                  <a:srgbClr val="1F2937"/>
                 </a:solidFill>
                 <a:latin typeface="Arial"/>
                 <a:cs typeface="Arial"/>
@@ -12663,9 +11729,9 @@
           <a:lstStyle/>
           <a:p>
             <a:r>
-              <a:rPr lang="en-US" sz="700" b="1" dirty="0">
+              <a:rPr lang="en-US" sz="650" b="1" dirty="0">
                 <a:solidFill>
-                  <a:srgbClr val="1E2761"/>
+                  <a:srgbClr val="1F2937"/>
                 </a:solidFill>
                 <a:latin typeface="Arial"/>
                 <a:cs typeface="Arial"/>
@@ -12745,6 +11811,1648 @@
           <a:lstStyle/>
           <a:p>
             <a:endParaRPr lang="en-US"/>
+          </a:p>
+        </p:txBody>
+      </p:sp>
+      <p:sp>
+        <p:nvSpPr>
+          <p:cNvPr id="382" name="Legend 382"/>
+          <p:cNvSpPr/>
+          <p:nvPr/>
+        </p:nvSpPr>
+        <p:spPr>
+          <a:xfrm>
+            <a:off x="10305288" y="7339888"/>
+            <a:ext cx="2103119" cy="237744"/>
+          </a:xfrm>
+          <a:prstGeom prst="rect">
+            <a:avLst/>
+          </a:prstGeom>
+          <a:noFill/>
+          <a:ln>
+            <a:noFill/>
+          </a:ln>
+        </p:spPr>
+        <p:txBody>
+          <a:bodyPr wrap="square" lIns="0" tIns="0" rIns="0" bIns="0" rtlCol="0" anchor="ctr"/>
+          <a:lstStyle/>
+          <a:p>
+            <a:pPr marL="0" indent="0">
+              <a:buNone/>
+            </a:pPr>
+            <a:r>
+              <a:rPr sz="660" b="1">
+                <a:solidFill>
+                  <a:srgbClr val="1E2761"/>
+                </a:solidFill>
+                <a:latin typeface="Arial"/>
+              </a:rPr>
+              <a:t>WORKS ACTIONS</a:t>
+            </a:r>
+            <a:endParaRPr lang="en-US" sz="740" dirty="0"/>
+          </a:p>
+        </p:txBody>
+      </p:sp>
+      <p:sp>
+        <p:nvSpPr>
+          <p:cNvPr id="383" name="Legend 383"/>
+          <p:cNvSpPr/>
+          <p:nvPr/>
+        </p:nvSpPr>
+        <p:spPr>
+          <a:xfrm>
+            <a:off x="10305288" y="7511338"/>
+            <a:ext cx="192024" cy="192024"/>
+          </a:xfrm>
+          <a:prstGeom prst="ellipse">
+            <a:avLst/>
+          </a:prstGeom>
+          <a:noFill/>
+          <a:ln w="19050">
+            <a:solidFill>
+              <a:srgbClr val="CC0000"/>
+            </a:solidFill>
+            <a:prstDash val="solid"/>
+          </a:ln>
+        </p:spPr>
+        <p:txBody>
+          <a:bodyPr/>
+          <a:lstStyle/>
+          <a:p>
+            <a:endParaRPr lang="en-US"/>
+          </a:p>
+        </p:txBody>
+      </p:sp>
+      <p:sp>
+        <p:nvSpPr>
+          <p:cNvPr id="384" name="Legend 384"/>
+          <p:cNvSpPr/>
+          <p:nvPr/>
+        </p:nvSpPr>
+        <p:spPr>
+          <a:xfrm>
+            <a:off x="10351008" y="7557058"/>
+            <a:ext cx="100584" cy="100584"/>
+          </a:xfrm>
+          <a:prstGeom prst="ellipse">
+            <a:avLst/>
+          </a:prstGeom>
+          <a:solidFill>
+            <a:srgbClr val="0055CC"/>
+          </a:solidFill>
+          <a:ln w="6350">
+            <a:solidFill>
+              <a:srgbClr val="0055CC"/>
+            </a:solidFill>
+            <a:prstDash val="solid"/>
+          </a:ln>
+        </p:spPr>
+        <p:txBody>
+          <a:bodyPr/>
+          <a:lstStyle/>
+          <a:p>
+            <a:endParaRPr lang="en-US"/>
+          </a:p>
+        </p:txBody>
+      </p:sp>
+      <p:sp>
+        <p:nvSpPr>
+          <p:cNvPr id="385" name="Legend 385"/>
+          <p:cNvSpPr/>
+          <p:nvPr/>
+        </p:nvSpPr>
+        <p:spPr>
+          <a:xfrm>
+            <a:off x="10533888" y="7518196"/>
+            <a:ext cx="1874519" cy="118872"/>
+          </a:xfrm>
+          <a:prstGeom prst="rect">
+            <a:avLst/>
+          </a:prstGeom>
+          <a:noFill/>
+          <a:ln>
+            <a:noFill/>
+          </a:ln>
+        </p:spPr>
+        <p:txBody>
+          <a:bodyPr wrap="square" lIns="0" tIns="0" rIns="0" bIns="0" rtlCol="0" anchor="ctr"/>
+          <a:lstStyle/>
+          <a:p>
+            <a:pPr marL="0" indent="0">
+              <a:buNone/>
+            </a:pPr>
+            <a:r>
+              <a:rPr sz="640">
+                <a:solidFill>
+                  <a:srgbClr val="1F2937"/>
+                </a:solidFill>
+                <a:latin typeface="Arial"/>
+              </a:rPr>
+              <a:t>CORE OUT + NEW CABLE (DUCT)</a:t>
+            </a:r>
+            <a:endParaRPr lang="en-US" sz="740" dirty="0"/>
+          </a:p>
+        </p:txBody>
+      </p:sp>
+      <p:sp>
+        <p:nvSpPr>
+          <p:cNvPr id="386" name="Legend 386"/>
+          <p:cNvSpPr/>
+          <p:nvPr/>
+        </p:nvSpPr>
+        <p:spPr>
+          <a:xfrm>
+            <a:off x="10305288" y="7689646"/>
+            <a:ext cx="192024" cy="192024"/>
+          </a:xfrm>
+          <a:prstGeom prst="ellipse">
+            <a:avLst/>
+          </a:prstGeom>
+          <a:noFill/>
+          <a:ln w="19050">
+            <a:solidFill>
+              <a:srgbClr val="CC0000"/>
+            </a:solidFill>
+            <a:prstDash val="solid"/>
+          </a:ln>
+        </p:spPr>
+        <p:txBody>
+          <a:bodyPr/>
+          <a:lstStyle/>
+          <a:p>
+            <a:endParaRPr lang="en-US"/>
+          </a:p>
+        </p:txBody>
+      </p:sp>
+      <p:sp>
+        <p:nvSpPr>
+          <p:cNvPr id="387" name="Legend 387"/>
+          <p:cNvSpPr/>
+          <p:nvPr/>
+        </p:nvSpPr>
+        <p:spPr>
+          <a:xfrm>
+            <a:off x="10351008" y="7735366"/>
+            <a:ext cx="100584" cy="100584"/>
+          </a:xfrm>
+          <a:prstGeom prst="ellipse">
+            <a:avLst/>
+          </a:prstGeom>
+          <a:solidFill>
+            <a:srgbClr val="E8710A"/>
+          </a:solidFill>
+          <a:ln w="6350">
+            <a:solidFill>
+              <a:srgbClr val="E8710A"/>
+            </a:solidFill>
+            <a:prstDash val="solid"/>
+          </a:ln>
+        </p:spPr>
+        <p:txBody>
+          <a:bodyPr/>
+          <a:lstStyle/>
+          <a:p>
+            <a:endParaRPr lang="en-US"/>
+          </a:p>
+        </p:txBody>
+      </p:sp>
+      <p:sp>
+        <p:nvSpPr>
+          <p:cNvPr id="388" name="Legend 388"/>
+          <p:cNvSpPr/>
+          <p:nvPr/>
+        </p:nvSpPr>
+        <p:spPr>
+          <a:xfrm>
+            <a:off x="10533888" y="7696504"/>
+            <a:ext cx="1874519" cy="118872"/>
+          </a:xfrm>
+          <a:prstGeom prst="rect">
+            <a:avLst/>
+          </a:prstGeom>
+          <a:noFill/>
+          <a:ln>
+            <a:noFill/>
+          </a:ln>
+        </p:spPr>
+        <p:txBody>
+          <a:bodyPr wrap="square" lIns="0" tIns="0" rIns="0" bIns="0" rtlCol="0" anchor="ctr"/>
+          <a:lstStyle/>
+          <a:p>
+            <a:pPr marL="0" indent="0">
+              <a:buNone/>
+            </a:pPr>
+            <a:r>
+              <a:rPr sz="640">
+                <a:solidFill>
+                  <a:srgbClr val="1F2937"/>
+                </a:solidFill>
+                <a:latin typeface="Arial"/>
+              </a:rPr>
+              <a:t>CORE OUT + NEW CABLE (SAWCUT)</a:t>
+            </a:r>
+            <a:endParaRPr lang="en-US" sz="740" dirty="0"/>
+          </a:p>
+        </p:txBody>
+      </p:sp>
+      <p:sp>
+        <p:nvSpPr>
+          <p:cNvPr id="389" name="Legend 389"/>
+          <p:cNvSpPr/>
+          <p:nvPr/>
+        </p:nvSpPr>
+        <p:spPr>
+          <a:xfrm>
+            <a:off x="10305288" y="7867954"/>
+            <a:ext cx="192024" cy="192024"/>
+          </a:xfrm>
+          <a:prstGeom prst="ellipse">
+            <a:avLst/>
+          </a:prstGeom>
+          <a:noFill/>
+          <a:ln w="19050">
+            <a:solidFill>
+              <a:srgbClr val="0055CC"/>
+            </a:solidFill>
+            <a:prstDash val="solid"/>
+          </a:ln>
+        </p:spPr>
+        <p:txBody>
+          <a:bodyPr/>
+          <a:lstStyle/>
+          <a:p>
+            <a:endParaRPr lang="en-US"/>
+          </a:p>
+        </p:txBody>
+      </p:sp>
+      <p:sp>
+        <p:nvSpPr>
+          <p:cNvPr id="390" name="Legend 390"/>
+          <p:cNvSpPr/>
+          <p:nvPr/>
+        </p:nvSpPr>
+        <p:spPr>
+          <a:xfrm>
+            <a:off x="10351008" y="7913674"/>
+            <a:ext cx="100584" cy="100584"/>
+          </a:xfrm>
+          <a:prstGeom prst="ellipse">
+            <a:avLst/>
+          </a:prstGeom>
+          <a:solidFill>
+            <a:srgbClr val="1E8E3E"/>
+          </a:solidFill>
+          <a:ln w="6350">
+            <a:solidFill>
+              <a:srgbClr val="1E8E3E"/>
+            </a:solidFill>
+            <a:prstDash val="solid"/>
+          </a:ln>
+        </p:spPr>
+        <p:txBody>
+          <a:bodyPr/>
+          <a:lstStyle/>
+          <a:p>
+            <a:endParaRPr lang="en-US"/>
+          </a:p>
+        </p:txBody>
+      </p:sp>
+      <p:sp>
+        <p:nvSpPr>
+          <p:cNvPr id="391" name="Legend 391"/>
+          <p:cNvSpPr/>
+          <p:nvPr/>
+        </p:nvSpPr>
+        <p:spPr>
+          <a:xfrm>
+            <a:off x="10533888" y="7874812"/>
+            <a:ext cx="1874519" cy="118872"/>
+          </a:xfrm>
+          <a:prstGeom prst="rect">
+            <a:avLst/>
+          </a:prstGeom>
+          <a:noFill/>
+          <a:ln>
+            <a:noFill/>
+          </a:ln>
+        </p:spPr>
+        <p:txBody>
+          <a:bodyPr wrap="square" lIns="0" tIns="0" rIns="0" bIns="0" rtlCol="0" anchor="ctr"/>
+          <a:lstStyle/>
+          <a:p>
+            <a:pPr marL="0" indent="0">
+              <a:buNone/>
+            </a:pPr>
+            <a:r>
+              <a:rPr sz="640">
+                <a:solidFill>
+                  <a:srgbClr val="1F2937"/>
+                </a:solidFill>
+                <a:latin typeface="Arial"/>
+              </a:rPr>
+              <a:t>NEW SEC. CABLE ONLY (DUCT)</a:t>
+            </a:r>
+            <a:endParaRPr lang="en-US" sz="740" dirty="0"/>
+          </a:p>
+        </p:txBody>
+      </p:sp>
+      <p:sp>
+        <p:nvSpPr>
+          <p:cNvPr id="392" name="Legend 392"/>
+          <p:cNvSpPr/>
+          <p:nvPr/>
+        </p:nvSpPr>
+        <p:spPr>
+          <a:xfrm>
+            <a:off x="10305288" y="8046262"/>
+            <a:ext cx="192024" cy="192024"/>
+          </a:xfrm>
+          <a:prstGeom prst="ellipse">
+            <a:avLst/>
+          </a:prstGeom>
+          <a:noFill/>
+          <a:ln w="19050">
+            <a:solidFill>
+              <a:srgbClr val="E8710A"/>
+            </a:solidFill>
+            <a:prstDash val="solid"/>
+          </a:ln>
+        </p:spPr>
+        <p:txBody>
+          <a:bodyPr/>
+          <a:lstStyle/>
+          <a:p>
+            <a:endParaRPr lang="en-US"/>
+          </a:p>
+        </p:txBody>
+      </p:sp>
+      <p:sp>
+        <p:nvSpPr>
+          <p:cNvPr id="393" name="Legend 393"/>
+          <p:cNvSpPr/>
+          <p:nvPr/>
+        </p:nvSpPr>
+        <p:spPr>
+          <a:xfrm>
+            <a:off x="10351008" y="8091982"/>
+            <a:ext cx="100584" cy="100584"/>
+          </a:xfrm>
+          <a:prstGeom prst="ellipse">
+            <a:avLst/>
+          </a:prstGeom>
+          <a:solidFill>
+            <a:srgbClr val="1E8E3E"/>
+          </a:solidFill>
+          <a:ln w="6350">
+            <a:solidFill>
+              <a:srgbClr val="1E8E3E"/>
+            </a:solidFill>
+            <a:prstDash val="solid"/>
+          </a:ln>
+        </p:spPr>
+        <p:txBody>
+          <a:bodyPr/>
+          <a:lstStyle/>
+          <a:p>
+            <a:endParaRPr lang="en-US"/>
+          </a:p>
+        </p:txBody>
+      </p:sp>
+      <p:sp>
+        <p:nvSpPr>
+          <p:cNvPr id="394" name="Legend 394"/>
+          <p:cNvSpPr/>
+          <p:nvPr/>
+        </p:nvSpPr>
+        <p:spPr>
+          <a:xfrm>
+            <a:off x="10533888" y="8053120"/>
+            <a:ext cx="1874519" cy="118872"/>
+          </a:xfrm>
+          <a:prstGeom prst="rect">
+            <a:avLst/>
+          </a:prstGeom>
+          <a:noFill/>
+          <a:ln>
+            <a:noFill/>
+          </a:ln>
+        </p:spPr>
+        <p:txBody>
+          <a:bodyPr wrap="square" lIns="0" tIns="0" rIns="0" bIns="0" rtlCol="0" anchor="ctr"/>
+          <a:lstStyle/>
+          <a:p>
+            <a:pPr marL="0" indent="0">
+              <a:buNone/>
+            </a:pPr>
+            <a:r>
+              <a:rPr sz="640">
+                <a:solidFill>
+                  <a:srgbClr val="1F2937"/>
+                </a:solidFill>
+                <a:latin typeface="Arial"/>
+              </a:rPr>
+              <a:t>NEW SEC. CABLE ONLY (SAWCUT)</a:t>
+            </a:r>
+            <a:endParaRPr lang="en-US" sz="740" dirty="0"/>
+          </a:p>
+        </p:txBody>
+      </p:sp>
+      <p:sp>
+        <p:nvSpPr>
+          <p:cNvPr id="395" name="Legend 395"/>
+          <p:cNvSpPr/>
+          <p:nvPr/>
+        </p:nvSpPr>
+        <p:spPr>
+          <a:xfrm>
+            <a:off x="10305288" y="8224570"/>
+            <a:ext cx="192024" cy="192024"/>
+          </a:xfrm>
+          <a:prstGeom prst="ellipse">
+            <a:avLst/>
+          </a:prstGeom>
+          <a:noFill/>
+          <a:ln w="19050">
+            <a:solidFill>
+              <a:srgbClr val="9AA0A6"/>
+            </a:solidFill>
+            <a:prstDash val="solid"/>
+          </a:ln>
+        </p:spPr>
+        <p:txBody>
+          <a:bodyPr/>
+          <a:lstStyle/>
+          <a:p>
+            <a:endParaRPr lang="en-US"/>
+          </a:p>
+        </p:txBody>
+      </p:sp>
+      <p:sp>
+        <p:nvSpPr>
+          <p:cNvPr id="396" name="Legend 396"/>
+          <p:cNvSpPr/>
+          <p:nvPr/>
+        </p:nvSpPr>
+        <p:spPr>
+          <a:xfrm>
+            <a:off x="10533888" y="8231428"/>
+            <a:ext cx="1874519" cy="118872"/>
+          </a:xfrm>
+          <a:prstGeom prst="rect">
+            <a:avLst/>
+          </a:prstGeom>
+          <a:noFill/>
+          <a:ln>
+            <a:noFill/>
+          </a:ln>
+        </p:spPr>
+        <p:txBody>
+          <a:bodyPr wrap="square" lIns="0" tIns="0" rIns="0" bIns="0" rtlCol="0" anchor="ctr"/>
+          <a:lstStyle/>
+          <a:p>
+            <a:pPr marL="0" indent="0">
+              <a:buNone/>
+            </a:pPr>
+            <a:r>
+              <a:rPr sz="640">
+                <a:solidFill>
+                  <a:srgbClr val="1F2937"/>
+                </a:solidFill>
+                <a:latin typeface="Arial"/>
+              </a:rPr>
+              <a:t>NOT AFFECTED / NOT ON FIELD SHEET</a:t>
+            </a:r>
+            <a:endParaRPr lang="en-US" sz="740" dirty="0"/>
+          </a:p>
+        </p:txBody>
+      </p:sp>
+      <p:sp>
+        <p:nvSpPr>
+          <p:cNvPr id="397" name="Legend 397"/>
+          <p:cNvSpPr/>
+          <p:nvPr/>
+        </p:nvSpPr>
+        <p:spPr>
+          <a:xfrm>
+            <a:off x="10305288" y="8409736"/>
+            <a:ext cx="2103119" cy="237744"/>
+          </a:xfrm>
+          <a:prstGeom prst="rect">
+            <a:avLst/>
+          </a:prstGeom>
+          <a:noFill/>
+          <a:ln>
+            <a:noFill/>
+          </a:ln>
+        </p:spPr>
+        <p:txBody>
+          <a:bodyPr wrap="square" lIns="0" tIns="0" rIns="0" bIns="0" rtlCol="0" anchor="ctr"/>
+          <a:lstStyle/>
+          <a:p>
+            <a:pPr marL="0" indent="0">
+              <a:buNone/>
+            </a:pPr>
+            <a:r>
+              <a:rPr sz="660" b="1">
+                <a:solidFill>
+                  <a:srgbClr val="1E2761"/>
+                </a:solidFill>
+                <a:latin typeface="Arial"/>
+              </a:rPr>
+              <a:t>EXISTING ASSETS (AS-BUILT)</a:t>
+            </a:r>
+            <a:endParaRPr lang="en-US" sz="740" dirty="0"/>
+          </a:p>
+        </p:txBody>
+      </p:sp>
+      <p:sp>
+        <p:nvSpPr>
+          <p:cNvPr id="398" name="Legend 398"/>
+          <p:cNvSpPr/>
+          <p:nvPr/>
+        </p:nvSpPr>
+        <p:spPr>
+          <a:xfrm>
+            <a:off x="10355580" y="8631478"/>
+            <a:ext cx="91440" cy="91440"/>
+          </a:xfrm>
+          <a:prstGeom prst="ellipse">
+            <a:avLst/>
+          </a:prstGeom>
+          <a:solidFill>
+            <a:srgbClr val="12A5B8"/>
+          </a:solidFill>
+          <a:ln w="6350">
+            <a:solidFill>
+              <a:srgbClr val="12A5B8"/>
+            </a:solidFill>
+            <a:prstDash val="solid"/>
+          </a:ln>
+        </p:spPr>
+        <p:txBody>
+          <a:bodyPr/>
+          <a:lstStyle/>
+          <a:p>
+            <a:endParaRPr lang="en-US"/>
+          </a:p>
+        </p:txBody>
+      </p:sp>
+      <p:sp>
+        <p:nvSpPr>
+          <p:cNvPr id="399" name="Legend 399"/>
+          <p:cNvSpPr/>
+          <p:nvPr/>
+        </p:nvSpPr>
+        <p:spPr>
+          <a:xfrm>
+            <a:off x="10533888" y="8588044"/>
+            <a:ext cx="1874519" cy="118872"/>
+          </a:xfrm>
+          <a:prstGeom prst="rect">
+            <a:avLst/>
+          </a:prstGeom>
+          <a:noFill/>
+          <a:ln>
+            <a:noFill/>
+          </a:ln>
+        </p:spPr>
+        <p:txBody>
+          <a:bodyPr wrap="square" lIns="0" tIns="0" rIns="0" bIns="0" rtlCol="0" anchor="ctr"/>
+          <a:lstStyle/>
+          <a:p>
+            <a:pPr marL="0" indent="0">
+              <a:buNone/>
+            </a:pPr>
+            <a:r>
+              <a:rPr sz="640">
+                <a:solidFill>
+                  <a:srgbClr val="1F2937"/>
+                </a:solidFill>
+                <a:latin typeface="Arial"/>
+              </a:rPr>
+              <a:t>EXISTING AGL ASSET — see asset key</a:t>
+            </a:r>
+            <a:endParaRPr lang="en-US" sz="740" dirty="0"/>
+          </a:p>
+        </p:txBody>
+      </p:sp>
+      <p:sp>
+        <p:nvSpPr>
+          <p:cNvPr id="400" name="Legend 400"/>
+          <p:cNvSpPr/>
+          <p:nvPr/>
+        </p:nvSpPr>
+        <p:spPr>
+          <a:xfrm>
+            <a:off x="10323576" y="8777782"/>
+            <a:ext cx="155448" cy="155448"/>
+          </a:xfrm>
+          <a:prstGeom prst="rect">
+            <a:avLst/>
+          </a:prstGeom>
+          <a:noFill/>
+          <a:ln w="19050">
+            <a:solidFill>
+              <a:srgbClr val="BB00BB"/>
+            </a:solidFill>
+          </a:ln>
+        </p:spPr>
+        <p:txBody>
+          <a:bodyPr/>
+          <a:lstStyle/>
+          <a:p>
+            <a:endParaRPr lang="en-US"/>
+          </a:p>
+        </p:txBody>
+      </p:sp>
+      <p:sp>
+        <p:nvSpPr>
+          <p:cNvPr id="401" name="Legend 401"/>
+          <p:cNvSpPr/>
+          <p:nvPr/>
+        </p:nvSpPr>
+        <p:spPr>
+          <a:xfrm>
+            <a:off x="10533888" y="8766352"/>
+            <a:ext cx="1874519" cy="118872"/>
+          </a:xfrm>
+          <a:prstGeom prst="rect">
+            <a:avLst/>
+          </a:prstGeom>
+          <a:noFill/>
+          <a:ln>
+            <a:noFill/>
+          </a:ln>
+        </p:spPr>
+        <p:txBody>
+          <a:bodyPr wrap="square" lIns="0" tIns="0" rIns="0" bIns="0" rtlCol="0" anchor="ctr"/>
+          <a:lstStyle/>
+          <a:p>
+            <a:pPr marL="0" indent="0">
+              <a:buNone/>
+            </a:pPr>
+            <a:r>
+              <a:rPr sz="640">
+                <a:solidFill>
+                  <a:srgbClr val="1F2937"/>
+                </a:solidFill>
+                <a:latin typeface="Arial"/>
+              </a:rPr>
+              <a:t>AGL FEED MANHOLE / HANDHOLE</a:t>
+            </a:r>
+            <a:endParaRPr lang="en-US" sz="740" dirty="0"/>
+          </a:p>
+        </p:txBody>
+      </p:sp>
+      <p:sp>
+        <p:nvSpPr>
+          <p:cNvPr id="402" name="Legend 402"/>
+          <p:cNvSpPr/>
+          <p:nvPr/>
+        </p:nvSpPr>
+        <p:spPr>
+          <a:xfrm>
+            <a:off x="10305288" y="8944660"/>
+            <a:ext cx="2103119" cy="237744"/>
+          </a:xfrm>
+          <a:prstGeom prst="rect">
+            <a:avLst/>
+          </a:prstGeom>
+          <a:noFill/>
+          <a:ln>
+            <a:noFill/>
+          </a:ln>
+        </p:spPr>
+        <p:txBody>
+          <a:bodyPr wrap="square" lIns="0" tIns="0" rIns="0" bIns="0" rtlCol="0" anchor="ctr"/>
+          <a:lstStyle/>
+          <a:p>
+            <a:pPr marL="0" indent="0">
+              <a:buNone/>
+            </a:pPr>
+            <a:r>
+              <a:rPr sz="660" b="1">
+                <a:solidFill>
+                  <a:srgbClr val="1E2761"/>
+                </a:solidFill>
+                <a:latin typeface="Arial"/>
+              </a:rPr>
+              <a:t>AREAS &amp; LINEWORK</a:t>
+            </a:r>
+            <a:endParaRPr lang="en-US" sz="740" dirty="0"/>
+          </a:p>
+        </p:txBody>
+      </p:sp>
+      <p:sp>
+        <p:nvSpPr>
+          <p:cNvPr id="403" name="Legend 403"/>
+          <p:cNvSpPr/>
+          <p:nvPr/>
+        </p:nvSpPr>
+        <p:spPr>
+          <a:xfrm>
+            <a:off x="10305288" y="9152686"/>
+            <a:ext cx="201168" cy="118872"/>
+          </a:xfrm>
+          <a:prstGeom prst="rect">
+            <a:avLst/>
+          </a:prstGeom>
+          <a:solidFill>
+            <a:srgbClr val="BFBFBF"/>
+          </a:solidFill>
+          <a:ln w="6350">
+            <a:solidFill>
+              <a:srgbClr val="7A8288"/>
+            </a:solidFill>
+          </a:ln>
+        </p:spPr>
+        <p:txBody>
+          <a:bodyPr/>
+          <a:lstStyle/>
+          <a:p>
+            <a:endParaRPr lang="en-US"/>
+          </a:p>
+        </p:txBody>
+      </p:sp>
+      <p:sp>
+        <p:nvSpPr>
+          <p:cNvPr id="404" name="Legend 404"/>
+          <p:cNvSpPr/>
+          <p:nvPr/>
+        </p:nvSpPr>
+        <p:spPr>
+          <a:xfrm>
+            <a:off x="10533888" y="9122968"/>
+            <a:ext cx="1874519" cy="118872"/>
+          </a:xfrm>
+          <a:prstGeom prst="rect">
+            <a:avLst/>
+          </a:prstGeom>
+          <a:noFill/>
+          <a:ln>
+            <a:noFill/>
+          </a:ln>
+        </p:spPr>
+        <p:txBody>
+          <a:bodyPr wrap="square" lIns="0" tIns="0" rIns="0" bIns="0" rtlCol="0" anchor="ctr"/>
+          <a:lstStyle/>
+          <a:p>
+            <a:pPr marL="0" indent="0">
+              <a:buNone/>
+            </a:pPr>
+            <a:r>
+              <a:rPr sz="640">
+                <a:solidFill>
+                  <a:srgbClr val="1F2937"/>
+                </a:solidFill>
+                <a:latin typeface="Arial"/>
+              </a:rPr>
+              <a:t>MILLING / CUT AREA</a:t>
+            </a:r>
+            <a:endParaRPr lang="en-US" sz="740" dirty="0"/>
+          </a:p>
+        </p:txBody>
+      </p:sp>
+      <p:sp>
+        <p:nvSpPr>
+          <p:cNvPr id="405" name="Legend 405"/>
+          <p:cNvSpPr/>
+          <p:nvPr/>
+        </p:nvSpPr>
+        <p:spPr>
+          <a:xfrm>
+            <a:off x="10287000" y="9390430"/>
+            <a:ext cx="237744" cy="914"/>
+          </a:xfrm>
+          <a:prstGeom prst="line">
+            <a:avLst/>
+          </a:prstGeom>
+          <a:noFill/>
+          <a:ln w="19050">
+            <a:solidFill>
+              <a:srgbClr val="CC0000"/>
+            </a:solidFill>
+            <a:prstDash val="solid"/>
+          </a:ln>
+        </p:spPr>
+        <p:txBody>
+          <a:bodyPr/>
+          <a:lstStyle/>
+          <a:p>
+            <a:endParaRPr lang="en-US"/>
+          </a:p>
+        </p:txBody>
+      </p:sp>
+      <p:sp>
+        <p:nvSpPr>
+          <p:cNvPr id="406" name="Legend 406"/>
+          <p:cNvSpPr/>
+          <p:nvPr/>
+        </p:nvSpPr>
+        <p:spPr>
+          <a:xfrm>
+            <a:off x="10533888" y="9301276"/>
+            <a:ext cx="1874519" cy="118872"/>
+          </a:xfrm>
+          <a:prstGeom prst="rect">
+            <a:avLst/>
+          </a:prstGeom>
+          <a:noFill/>
+          <a:ln>
+            <a:noFill/>
+          </a:ln>
+        </p:spPr>
+        <p:txBody>
+          <a:bodyPr wrap="square" lIns="0" tIns="0" rIns="0" bIns="0" rtlCol="0" anchor="ctr"/>
+          <a:lstStyle/>
+          <a:p>
+            <a:pPr marL="0" indent="0">
+              <a:buNone/>
+            </a:pPr>
+            <a:r>
+              <a:rPr sz="640">
+                <a:solidFill>
+                  <a:srgbClr val="1F2937"/>
+                </a:solidFill>
+                <a:latin typeface="Arial"/>
+              </a:rPr>
+              <a:t>AGL WORKS DEMARCATION (GOVERNING)</a:t>
+            </a:r>
+            <a:endParaRPr lang="en-US" sz="740" dirty="0"/>
+          </a:p>
+        </p:txBody>
+      </p:sp>
+      <p:sp>
+        <p:nvSpPr>
+          <p:cNvPr id="407" name="Legend 407"/>
+          <p:cNvSpPr/>
+          <p:nvPr/>
+        </p:nvSpPr>
+        <p:spPr>
+          <a:xfrm>
+            <a:off x="10287000" y="9568738"/>
+            <a:ext cx="237744" cy="914"/>
+          </a:xfrm>
+          <a:prstGeom prst="line">
+            <a:avLst/>
+          </a:prstGeom>
+          <a:noFill/>
+          <a:ln w="19050">
+            <a:solidFill>
+              <a:srgbClr val="BB00BB"/>
+            </a:solidFill>
+            <a:prstDash val="dash"/>
+          </a:ln>
+        </p:spPr>
+        <p:txBody>
+          <a:bodyPr/>
+          <a:lstStyle/>
+          <a:p>
+            <a:endParaRPr lang="en-US"/>
+          </a:p>
+        </p:txBody>
+      </p:sp>
+      <p:sp>
+        <p:nvSpPr>
+          <p:cNvPr id="408" name="Legend 408"/>
+          <p:cNvSpPr/>
+          <p:nvPr/>
+        </p:nvSpPr>
+        <p:spPr>
+          <a:xfrm>
+            <a:off x="10533888" y="9479584"/>
+            <a:ext cx="1874519" cy="118872"/>
+          </a:xfrm>
+          <a:prstGeom prst="rect">
+            <a:avLst/>
+          </a:prstGeom>
+          <a:noFill/>
+          <a:ln>
+            <a:noFill/>
+          </a:ln>
+        </p:spPr>
+        <p:txBody>
+          <a:bodyPr wrap="square" lIns="0" tIns="0" rIns="0" bIns="0" rtlCol="0" anchor="ctr"/>
+          <a:lstStyle/>
+          <a:p>
+            <a:pPr marL="0" indent="0">
+              <a:buNone/>
+            </a:pPr>
+            <a:r>
+              <a:rPr sz="640">
+                <a:solidFill>
+                  <a:srgbClr val="1F2937"/>
+                </a:solidFill>
+                <a:latin typeface="Arial"/>
+              </a:rPr>
+              <a:t>SECONDARY DUCT CROSSING CUT (INDIC.)</a:t>
+            </a:r>
+            <a:endParaRPr lang="en-US" sz="740" dirty="0"/>
+          </a:p>
+        </p:txBody>
+      </p:sp>
+      <p:sp>
+        <p:nvSpPr>
+          <p:cNvPr id="409" name="Legend 409"/>
+          <p:cNvSpPr/>
+          <p:nvPr/>
+        </p:nvSpPr>
+        <p:spPr>
+          <a:xfrm>
+            <a:off x="10287000" y="9747046"/>
+            <a:ext cx="237744" cy="914"/>
+          </a:xfrm>
+          <a:prstGeom prst="line">
+            <a:avLst/>
+          </a:prstGeom>
+          <a:noFill/>
+          <a:ln w="19050">
+            <a:solidFill>
+              <a:srgbClr val="C9CDD2"/>
+            </a:solidFill>
+            <a:prstDash val="dash"/>
+          </a:ln>
+        </p:spPr>
+        <p:txBody>
+          <a:bodyPr/>
+          <a:lstStyle/>
+          <a:p>
+            <a:endParaRPr lang="en-US"/>
+          </a:p>
+        </p:txBody>
+      </p:sp>
+      <p:sp>
+        <p:nvSpPr>
+          <p:cNvPr id="410" name="Legend 410"/>
+          <p:cNvSpPr/>
+          <p:nvPr/>
+        </p:nvSpPr>
+        <p:spPr>
+          <a:xfrm>
+            <a:off x="10533888" y="9657892"/>
+            <a:ext cx="1874519" cy="118872"/>
+          </a:xfrm>
+          <a:prstGeom prst="rect">
+            <a:avLst/>
+          </a:prstGeom>
+          <a:noFill/>
+          <a:ln>
+            <a:noFill/>
+          </a:ln>
+        </p:spPr>
+        <p:txBody>
+          <a:bodyPr wrap="square" lIns="0" tIns="0" rIns="0" bIns="0" rtlCol="0" anchor="ctr"/>
+          <a:lstStyle/>
+          <a:p>
+            <a:pPr marL="0" indent="0">
+              <a:buNone/>
+            </a:pPr>
+            <a:r>
+              <a:rPr sz="640">
+                <a:solidFill>
+                  <a:srgbClr val="1F2937"/>
+                </a:solidFill>
+                <a:latin typeface="Arial"/>
+              </a:rPr>
+              <a:t>INDICATIVE DUCT — LIGHT TO MH / HH</a:t>
+            </a:r>
+            <a:endParaRPr lang="en-US" sz="740" dirty="0"/>
+          </a:p>
+        </p:txBody>
+      </p:sp>
+      <p:sp>
+        <p:nvSpPr>
+          <p:cNvPr id="411" name="Legend 411"/>
+          <p:cNvSpPr/>
+          <p:nvPr/>
+        </p:nvSpPr>
+        <p:spPr>
+          <a:xfrm>
+            <a:off x="10287000" y="9925354"/>
+            <a:ext cx="237744" cy="914"/>
+          </a:xfrm>
+          <a:prstGeom prst="line">
+            <a:avLst/>
+          </a:prstGeom>
+          <a:noFill/>
+          <a:ln w="19050">
+            <a:solidFill>
+              <a:srgbClr val="C7A400"/>
+            </a:solidFill>
+            <a:prstDash val="dashDot"/>
+          </a:ln>
+        </p:spPr>
+        <p:txBody>
+          <a:bodyPr/>
+          <a:lstStyle/>
+          <a:p>
+            <a:endParaRPr lang="en-US"/>
+          </a:p>
+        </p:txBody>
+      </p:sp>
+      <p:sp>
+        <p:nvSpPr>
+          <p:cNvPr id="412" name="Legend 412"/>
+          <p:cNvSpPr/>
+          <p:nvPr/>
+        </p:nvSpPr>
+        <p:spPr>
+          <a:xfrm>
+            <a:off x="10533888" y="9836200"/>
+            <a:ext cx="1874519" cy="118872"/>
+          </a:xfrm>
+          <a:prstGeom prst="rect">
+            <a:avLst/>
+          </a:prstGeom>
+          <a:noFill/>
+          <a:ln>
+            <a:noFill/>
+          </a:ln>
+        </p:spPr>
+        <p:txBody>
+          <a:bodyPr wrap="square" lIns="0" tIns="0" rIns="0" bIns="0" rtlCol="0" anchor="ctr"/>
+          <a:lstStyle/>
+          <a:p>
+            <a:pPr marL="0" indent="0">
+              <a:buNone/>
+            </a:pPr>
+            <a:r>
+              <a:rPr sz="640">
+                <a:solidFill>
+                  <a:srgbClr val="1F2937"/>
+                </a:solidFill>
+                <a:latin typeface="Arial"/>
+              </a:rPr>
+              <a:t>TAXIWAY CENTRELINE (THROUGH TCC)</a:t>
+            </a:r>
+            <a:endParaRPr lang="en-US" sz="740" dirty="0"/>
+          </a:p>
+        </p:txBody>
+      </p:sp>
+      <p:sp>
+        <p:nvSpPr>
+          <p:cNvPr id="413" name="Legend 413"/>
+          <p:cNvSpPr/>
+          <p:nvPr/>
+        </p:nvSpPr>
+        <p:spPr>
+          <a:xfrm>
+            <a:off x="10287000" y="10103662"/>
+            <a:ext cx="237744" cy="914"/>
+          </a:xfrm>
+          <a:prstGeom prst="line">
+            <a:avLst/>
+          </a:prstGeom>
+          <a:noFill/>
+          <a:ln w="19050">
+            <a:solidFill>
+              <a:srgbClr val="8B0000"/>
+            </a:solidFill>
+            <a:prstDash val="solid"/>
+          </a:ln>
+        </p:spPr>
+        <p:txBody>
+          <a:bodyPr/>
+          <a:lstStyle/>
+          <a:p>
+            <a:endParaRPr lang="en-US"/>
+          </a:p>
+        </p:txBody>
+      </p:sp>
+      <p:sp>
+        <p:nvSpPr>
+          <p:cNvPr id="414" name="Legend 414"/>
+          <p:cNvSpPr/>
+          <p:nvPr/>
+        </p:nvSpPr>
+        <p:spPr>
+          <a:xfrm>
+            <a:off x="10533888" y="10014508"/>
+            <a:ext cx="1874519" cy="118872"/>
+          </a:xfrm>
+          <a:prstGeom prst="rect">
+            <a:avLst/>
+          </a:prstGeom>
+          <a:noFill/>
+          <a:ln>
+            <a:noFill/>
+          </a:ln>
+        </p:spPr>
+        <p:txBody>
+          <a:bodyPr wrap="square" lIns="0" tIns="0" rIns="0" bIns="0" rtlCol="0" anchor="ctr"/>
+          <a:lstStyle/>
+          <a:p>
+            <a:pPr marL="0" indent="0">
+              <a:buNone/>
+            </a:pPr>
+            <a:r>
+              <a:rPr sz="640">
+                <a:solidFill>
+                  <a:srgbClr val="1F2937"/>
+                </a:solidFill>
+                <a:latin typeface="Arial"/>
+              </a:rPr>
+              <a:t>STOP BAR (THROUGH SBC)</a:t>
+            </a:r>
+            <a:endParaRPr lang="en-US" sz="740" dirty="0"/>
+          </a:p>
+        </p:txBody>
+      </p:sp>
+      <p:sp>
+        <p:nvSpPr>
+          <p:cNvPr id="415" name="Legend 415"/>
+          <p:cNvSpPr/>
+          <p:nvPr/>
+        </p:nvSpPr>
+        <p:spPr>
+          <a:xfrm>
+            <a:off x="10287000" y="10281970"/>
+            <a:ext cx="237744" cy="914"/>
+          </a:xfrm>
+          <a:prstGeom prst="line">
+            <a:avLst/>
+          </a:prstGeom>
+          <a:noFill/>
+          <a:ln w="19050">
+            <a:solidFill>
+              <a:srgbClr val="7A8288"/>
+            </a:solidFill>
+            <a:prstDash val="solid"/>
+          </a:ln>
+        </p:spPr>
+        <p:txBody>
+          <a:bodyPr/>
+          <a:lstStyle/>
+          <a:p>
+            <a:endParaRPr lang="en-US"/>
+          </a:p>
+        </p:txBody>
+      </p:sp>
+      <p:sp>
+        <p:nvSpPr>
+          <p:cNvPr id="416" name="Legend 416"/>
+          <p:cNvSpPr/>
+          <p:nvPr/>
+        </p:nvSpPr>
+        <p:spPr>
+          <a:xfrm>
+            <a:off x="10533888" y="10192816"/>
+            <a:ext cx="1874519" cy="118872"/>
+          </a:xfrm>
+          <a:prstGeom prst="rect">
+            <a:avLst/>
+          </a:prstGeom>
+          <a:noFill/>
+          <a:ln>
+            <a:noFill/>
+          </a:ln>
+        </p:spPr>
+        <p:txBody>
+          <a:bodyPr wrap="square" lIns="0" tIns="0" rIns="0" bIns="0" rtlCol="0" anchor="ctr"/>
+          <a:lstStyle/>
+          <a:p>
+            <a:pPr marL="0" indent="0">
+              <a:buNone/>
+            </a:pPr>
+            <a:r>
+              <a:rPr sz="640">
+                <a:solidFill>
+                  <a:srgbClr val="1F2937"/>
+                </a:solidFill>
+                <a:latin typeface="Arial"/>
+              </a:rPr>
+              <a:t>TWY EDGE / PAVEMENT (INDIC. 23 m)</a:t>
+            </a:r>
+            <a:endParaRPr lang="en-US" sz="740" dirty="0"/>
+          </a:p>
+        </p:txBody>
+      </p:sp>
+      <p:sp>
+        <p:nvSpPr>
+          <p:cNvPr id="417" name="Legend 417"/>
+          <p:cNvSpPr/>
+          <p:nvPr/>
+        </p:nvSpPr>
+        <p:spPr>
+          <a:xfrm>
+            <a:off x="12454128" y="7339888"/>
+            <a:ext cx="2313431" cy="237744"/>
+          </a:xfrm>
+          <a:prstGeom prst="rect">
+            <a:avLst/>
+          </a:prstGeom>
+          <a:noFill/>
+          <a:ln>
+            <a:noFill/>
+          </a:ln>
+        </p:spPr>
+        <p:txBody>
+          <a:bodyPr wrap="square" lIns="0" tIns="0" rIns="0" bIns="0" rtlCol="0" anchor="ctr"/>
+          <a:lstStyle/>
+          <a:p>
+            <a:pPr marL="0" indent="0">
+              <a:buNone/>
+            </a:pPr>
+            <a:r>
+              <a:rPr sz="660" b="1">
+                <a:solidFill>
+                  <a:srgbClr val="1E2761"/>
+                </a:solidFill>
+                <a:latin typeface="Arial"/>
+              </a:rPr>
+              <a:t>ASSET KEY (AS-BUILT LABEL PREFIX)</a:t>
+            </a:r>
+            <a:endParaRPr lang="en-US" sz="740" dirty="0"/>
+          </a:p>
+        </p:txBody>
+      </p:sp>
+      <p:sp>
+        <p:nvSpPr>
+          <p:cNvPr id="418" name="Legend 418"/>
+          <p:cNvSpPr/>
+          <p:nvPr/>
+        </p:nvSpPr>
+        <p:spPr>
+          <a:xfrm>
+            <a:off x="12682728" y="7518196"/>
+            <a:ext cx="2084831" cy="118872"/>
+          </a:xfrm>
+          <a:prstGeom prst="rect">
+            <a:avLst/>
+          </a:prstGeom>
+          <a:noFill/>
+          <a:ln>
+            <a:noFill/>
+          </a:ln>
+        </p:spPr>
+        <p:txBody>
+          <a:bodyPr wrap="square" lIns="0" tIns="0" rIns="0" bIns="0" rtlCol="0" anchor="ctr"/>
+          <a:lstStyle/>
+          <a:p>
+            <a:pPr marL="0" indent="0">
+              <a:buNone/>
+            </a:pPr>
+            <a:r>
+              <a:rPr sz="600">
+                <a:solidFill>
+                  <a:srgbClr val="1F2937"/>
+                </a:solidFill>
+                <a:latin typeface="Arial"/>
+              </a:rPr>
+              <a:t>SBC102  —  Stop bar light  ×8</a:t>
+            </a:r>
+            <a:endParaRPr lang="en-US" sz="740" dirty="0"/>
+          </a:p>
+        </p:txBody>
+      </p:sp>
+      <p:sp>
+        <p:nvSpPr>
+          <p:cNvPr id="419" name="Legend 419"/>
+          <p:cNvSpPr/>
+          <p:nvPr/>
+        </p:nvSpPr>
+        <p:spPr>
+          <a:xfrm>
+            <a:off x="12682728" y="7696504"/>
+            <a:ext cx="2084831" cy="118872"/>
+          </a:xfrm>
+          <a:prstGeom prst="rect">
+            <a:avLst/>
+          </a:prstGeom>
+          <a:noFill/>
+          <a:ln>
+            <a:noFill/>
+          </a:ln>
+        </p:spPr>
+        <p:txBody>
+          <a:bodyPr wrap="square" lIns="0" tIns="0" rIns="0" bIns="0" rtlCol="0" anchor="ctr"/>
+          <a:lstStyle/>
+          <a:p>
+            <a:pPr marL="0" indent="0">
+              <a:buNone/>
+            </a:pPr>
+            <a:r>
+              <a:rPr sz="600">
+                <a:solidFill>
+                  <a:srgbClr val="1F2937"/>
+                </a:solidFill>
+                <a:latin typeface="Arial"/>
+              </a:rPr>
+              <a:t>SGC102  —  Sign foundation  ×2</a:t>
+            </a:r>
+            <a:endParaRPr lang="en-US" sz="740" dirty="0"/>
+          </a:p>
+        </p:txBody>
+      </p:sp>
+      <p:sp>
+        <p:nvSpPr>
+          <p:cNvPr id="420" name="Legend 420"/>
+          <p:cNvSpPr/>
+          <p:nvPr/>
+        </p:nvSpPr>
+        <p:spPr>
+          <a:xfrm>
+            <a:off x="12682728" y="7874812"/>
+            <a:ext cx="2084831" cy="118872"/>
+          </a:xfrm>
+          <a:prstGeom prst="rect">
+            <a:avLst/>
+          </a:prstGeom>
+          <a:noFill/>
+          <a:ln>
+            <a:noFill/>
+          </a:ln>
+        </p:spPr>
+        <p:txBody>
+          <a:bodyPr wrap="square" lIns="0" tIns="0" rIns="0" bIns="0" rtlCol="0" anchor="ctr"/>
+          <a:lstStyle/>
+          <a:p>
+            <a:pPr marL="0" indent="0">
+              <a:buNone/>
+            </a:pPr>
+            <a:r>
+              <a:rPr sz="600">
+                <a:solidFill>
+                  <a:srgbClr val="1F2937"/>
+                </a:solidFill>
+                <a:latin typeface="Arial"/>
+              </a:rPr>
+              <a:t>TCC103  —  Taxiway centreline light  ×8</a:t>
+            </a:r>
+            <a:endParaRPr lang="en-US" sz="740" dirty="0"/>
+          </a:p>
+        </p:txBody>
+      </p:sp>
+      <p:sp>
+        <p:nvSpPr>
+          <p:cNvPr id="421" name="Legend 421"/>
+          <p:cNvSpPr/>
+          <p:nvPr/>
+        </p:nvSpPr>
+        <p:spPr>
+          <a:xfrm>
+            <a:off x="12682728" y="8053120"/>
+            <a:ext cx="2084831" cy="118872"/>
+          </a:xfrm>
+          <a:prstGeom prst="rect">
+            <a:avLst/>
+          </a:prstGeom>
+          <a:noFill/>
+          <a:ln>
+            <a:noFill/>
+          </a:ln>
+        </p:spPr>
+        <p:txBody>
+          <a:bodyPr wrap="square" lIns="0" tIns="0" rIns="0" bIns="0" rtlCol="0" anchor="ctr"/>
+          <a:lstStyle/>
+          <a:p>
+            <a:pPr marL="0" indent="0">
+              <a:buNone/>
+            </a:pPr>
+            <a:r>
+              <a:rPr sz="600">
+                <a:solidFill>
+                  <a:srgbClr val="1F2937"/>
+                </a:solidFill>
+                <a:latin typeface="Arial"/>
+              </a:rPr>
+              <a:t>TCCECH  —  Taxiway centreline light  ×17</a:t>
+            </a:r>
+            <a:endParaRPr lang="en-US" sz="740" dirty="0"/>
+          </a:p>
+        </p:txBody>
+      </p:sp>
+      <p:sp>
+        <p:nvSpPr>
+          <p:cNvPr id="422" name="Legend 422"/>
+          <p:cNvSpPr/>
+          <p:nvPr/>
+        </p:nvSpPr>
+        <p:spPr>
+          <a:xfrm>
+            <a:off x="12682728" y="8231428"/>
+            <a:ext cx="2084831" cy="118872"/>
+          </a:xfrm>
+          <a:prstGeom prst="rect">
+            <a:avLst/>
+          </a:prstGeom>
+          <a:noFill/>
+          <a:ln>
+            <a:noFill/>
+          </a:ln>
+        </p:spPr>
+        <p:txBody>
+          <a:bodyPr wrap="square" lIns="0" tIns="0" rIns="0" bIns="0" rtlCol="0" anchor="ctr"/>
+          <a:lstStyle/>
+          <a:p>
+            <a:pPr marL="0" indent="0">
+              <a:buNone/>
+            </a:pPr>
+            <a:r>
+              <a:rPr sz="600">
+                <a:solidFill>
+                  <a:srgbClr val="1F2937"/>
+                </a:solidFill>
+                <a:latin typeface="Arial"/>
+              </a:rPr>
+              <a:t>TEC102  —  Taxiway edge light  ×4</a:t>
+            </a:r>
+            <a:endParaRPr lang="en-US" sz="740" dirty="0"/>
+          </a:p>
+        </p:txBody>
+      </p:sp>
+      <p:sp>
+        <p:nvSpPr>
+          <p:cNvPr id="423" name="Legend 423"/>
+          <p:cNvSpPr/>
+          <p:nvPr/>
+        </p:nvSpPr>
+        <p:spPr>
+          <a:xfrm>
+            <a:off x="12682728" y="8409736"/>
+            <a:ext cx="2084831" cy="118872"/>
+          </a:xfrm>
+          <a:prstGeom prst="rect">
+            <a:avLst/>
+          </a:prstGeom>
+          <a:noFill/>
+          <a:ln>
+            <a:noFill/>
+          </a:ln>
+        </p:spPr>
+        <p:txBody>
+          <a:bodyPr wrap="square" lIns="0" tIns="0" rIns="0" bIns="0" rtlCol="0" anchor="ctr"/>
+          <a:lstStyle/>
+          <a:p>
+            <a:pPr marL="0" indent="0">
+              <a:buNone/>
+            </a:pPr>
+            <a:r>
+              <a:rPr sz="600">
+                <a:solidFill>
+                  <a:srgbClr val="1F2937"/>
+                </a:solidFill>
+                <a:latin typeface="Arial"/>
+              </a:rPr>
+              <a:t>HH  —  Handhole  ×10</a:t>
+            </a:r>
+            <a:endParaRPr lang="en-US" sz="740" dirty="0"/>
+          </a:p>
+        </p:txBody>
+      </p:sp>
+      <p:sp>
+        <p:nvSpPr>
+          <p:cNvPr id="424" name="Legend 424"/>
+          <p:cNvSpPr/>
+          <p:nvPr/>
+        </p:nvSpPr>
+        <p:spPr>
+          <a:xfrm>
+            <a:off x="12682728" y="8588044"/>
+            <a:ext cx="2084831" cy="118872"/>
+          </a:xfrm>
+          <a:prstGeom prst="rect">
+            <a:avLst/>
+          </a:prstGeom>
+          <a:noFill/>
+          <a:ln>
+            <a:noFill/>
+          </a:ln>
+        </p:spPr>
+        <p:txBody>
+          <a:bodyPr wrap="square" lIns="0" tIns="0" rIns="0" bIns="0" rtlCol="0" anchor="ctr"/>
+          <a:lstStyle/>
+          <a:p>
+            <a:pPr marL="0" indent="0">
+              <a:buNone/>
+            </a:pPr>
+            <a:r>
+              <a:rPr sz="600">
+                <a:solidFill>
+                  <a:srgbClr val="1F2937"/>
+                </a:solidFill>
+                <a:latin typeface="Arial"/>
+              </a:rPr>
+              <a:t>MH  —  Manhole  ×2</a:t>
+            </a:r>
+            <a:endParaRPr lang="en-US" sz="740" dirty="0"/>
+          </a:p>
+        </p:txBody>
+      </p:sp>
+      <p:sp>
+        <p:nvSpPr>
+          <p:cNvPr id="425" name="Legend 425"/>
+          <p:cNvSpPr/>
+          <p:nvPr/>
+        </p:nvSpPr>
+        <p:spPr>
+          <a:xfrm>
+            <a:off x="12682728" y="8766352"/>
+            <a:ext cx="2084831" cy="118872"/>
+          </a:xfrm>
+          <a:prstGeom prst="rect">
+            <a:avLst/>
+          </a:prstGeom>
+          <a:noFill/>
+          <a:ln>
+            <a:noFill/>
+          </a:ln>
+        </p:spPr>
+        <p:txBody>
+          <a:bodyPr wrap="square" lIns="0" tIns="0" rIns="0" bIns="0" rtlCol="0" anchor="ctr"/>
+          <a:lstStyle/>
+          <a:p>
+            <a:pPr marL="0" indent="0">
+              <a:buNone/>
+            </a:pPr>
+            <a:r>
+              <a:rPr sz="600">
+                <a:solidFill>
+                  <a:srgbClr val="1F2937"/>
+                </a:solidFill>
+                <a:latin typeface="Arial"/>
+              </a:rPr>
+              <a:t>P6  —  Civil pit (manhole / earthing point)  ×2</a:t>
+            </a:r>
+            <a:endParaRPr lang="en-US" sz="740" dirty="0"/>
+          </a:p>
+        </p:txBody>
+      </p:sp>
+      <p:sp>
+        <p:nvSpPr>
+          <p:cNvPr id="426" name="Legend 426"/>
+          <p:cNvSpPr/>
+          <p:nvPr/>
+        </p:nvSpPr>
+        <p:spPr>
+          <a:xfrm>
+            <a:off x="12682728" y="8944660"/>
+            <a:ext cx="2084831" cy="118872"/>
+          </a:xfrm>
+          <a:prstGeom prst="rect">
+            <a:avLst/>
+          </a:prstGeom>
+          <a:noFill/>
+          <a:ln>
+            <a:noFill/>
+          </a:ln>
+        </p:spPr>
+        <p:txBody>
+          <a:bodyPr wrap="square" lIns="0" tIns="0" rIns="0" bIns="0" rtlCol="0" anchor="ctr"/>
+          <a:lstStyle/>
+          <a:p>
+            <a:pPr marL="0" indent="0">
+              <a:buNone/>
+            </a:pPr>
+            <a:r>
+              <a:rPr sz="600">
+                <a:solidFill>
+                  <a:srgbClr val="1F2937"/>
+                </a:solidFill>
+                <a:latin typeface="Arial"/>
+              </a:rPr>
+              <a:t>RRM  —  Runway guard light / RRM  ×4</a:t>
+            </a:r>
+            <a:endParaRPr lang="en-US" sz="740" dirty="0"/>
+          </a:p>
+        </p:txBody>
+      </p:sp>
+      <p:sp>
+        <p:nvSpPr>
+          <p:cNvPr id="427" name="Legend 427"/>
+          <p:cNvSpPr/>
+          <p:nvPr/>
+        </p:nvSpPr>
+        <p:spPr>
+          <a:xfrm>
+            <a:off x="12682728" y="9122968"/>
+            <a:ext cx="2084831" cy="118872"/>
+          </a:xfrm>
+          <a:prstGeom prst="rect">
+            <a:avLst/>
+          </a:prstGeom>
+          <a:noFill/>
+          <a:ln>
+            <a:noFill/>
+          </a:ln>
+        </p:spPr>
+        <p:txBody>
+          <a:bodyPr wrap="square" lIns="0" tIns="0" rIns="0" bIns="0" rtlCol="0" anchor="ctr"/>
+          <a:lstStyle/>
+          <a:p>
+            <a:pPr marL="0" indent="0">
+              <a:buNone/>
+            </a:pPr>
+            <a:r>
+              <a:rPr sz="600">
+                <a:solidFill>
+                  <a:srgbClr val="1F2937"/>
+                </a:solidFill>
+                <a:latin typeface="Arial"/>
+              </a:rPr>
+              <a:t>X_CV_STH_PITS  —  Civil pit / transformer HH  ×5</a:t>
+            </a:r>
+            <a:endParaRPr lang="en-US" sz="740" dirty="0"/>
           </a:p>
         </p:txBody>
       </p:sp>
@@ -16306,6 +17014,17 @@
               <a:t>6. Rev P07: every asset on this sheet re-marked directly from field sheet Second_milling_area rev _1 (2nd table) — outer ring from the Secondary-cable / Shallow-base columns, inner disc from Duct / Sawcut. Assets not listed on the field sheet are shown grey with no action assumed. Shallow-base column blank on that sheet; confirmed ‘NO’ 30.07.2026.</a:t>
             </a:r>
           </a:p>
+          <a:p>
+            <a:r>
+              <a:rPr sz="680">
+                <a:solidFill>
+                  <a:srgbClr val="5F6368"/>
+                </a:solidFill>
+                <a:latin typeface="Arial"/>
+              </a:rPr>
+              <a:t>7. Asset key: label prefix to as-built class, from the AGL asset survey checked against the AGL duct-layout CAD. Civil items (HH / MH / pits / RRM) plot about 2.1 m from the surveyed insertion point — set out from survey, not from this sheet. A pit prefix can cover more than one civil class (manhole, transformer handhole, earthing); confirm the individual pit before works.</a:t>
+            </a:r>
+          </a:p>
         </p:txBody>
       </p:sp>
       <p:sp>
@@ -16317,7 +17036,7 @@
         <p:spPr>
           <a:xfrm>
             <a:off x="10104120" y="6121908"/>
-            <a:ext cx="4709160" cy="2596896"/>
+            <a:ext cx="4709160" cy="2702052"/>
           </a:xfrm>
           <a:prstGeom prst="rect">
             <a:avLst/>
@@ -16337,679 +17056,6 @@
           <a:lstStyle/>
           <a:p>
             <a:endParaRPr lang="en-US"/>
-          </a:p>
-        </p:txBody>
-      </p:sp>
-      <p:sp>
-        <p:nvSpPr>
-          <p:cNvPr id="118" name="Text 116"/>
-          <p:cNvSpPr/>
-          <p:nvPr/>
-        </p:nvSpPr>
-        <p:spPr>
-          <a:xfrm>
-            <a:off x="10241280" y="6195060"/>
-            <a:ext cx="4434840" cy="219456"/>
-          </a:xfrm>
-          <a:prstGeom prst="rect">
-            <a:avLst/>
-          </a:prstGeom>
-          <a:noFill/>
-          <a:ln>
-            <a:noFill/>
-          </a:ln>
-        </p:spPr>
-        <p:txBody>
-          <a:bodyPr wrap="square" lIns="0" tIns="0" rIns="0" bIns="0" rtlCol="0" anchor="ctr"/>
-          <a:lstStyle/>
-          <a:p>
-            <a:pPr marL="0" indent="0">
-              <a:buNone/>
-            </a:pPr>
-            <a:r>
-              <a:rPr lang="en-US" sz="950" b="1" dirty="0">
-                <a:solidFill>
-                  <a:srgbClr val="1E2761"/>
-                </a:solidFill>
-                <a:latin typeface="Arial" pitchFamily="34" charset="0"/>
-                <a:ea typeface="Arial" pitchFamily="34" charset="-122"/>
-                <a:cs typeface="Arial" pitchFamily="34" charset="-120"/>
-              </a:rPr>
-              <a:t>LEGEND — WORKS ACTIONS (THIS SHEET)</a:t>
-            </a:r>
-            <a:endParaRPr lang="en-US" sz="950" dirty="0"/>
-          </a:p>
-        </p:txBody>
-      </p:sp>
-      <p:sp>
-        <p:nvSpPr>
-          <p:cNvPr id="119" name="Shape 117"/>
-          <p:cNvSpPr/>
-          <p:nvPr/>
-        </p:nvSpPr>
-        <p:spPr>
-          <a:xfrm>
-            <a:off x="10305288" y="6519672"/>
-            <a:ext cx="192024" cy="192024"/>
-          </a:xfrm>
-          <a:prstGeom prst="ellipse">
-            <a:avLst/>
-          </a:prstGeom>
-          <a:ln w="28575">
-            <a:solidFill>
-              <a:srgbClr val="0055CC"/>
-            </a:solidFill>
-            <a:prstDash val="solid"/>
-          </a:ln>
-        </p:spPr>
-        <p:txBody>
-          <a:bodyPr/>
-          <a:lstStyle/>
-          <a:p>
-            <a:endParaRPr lang="en-US"/>
-          </a:p>
-        </p:txBody>
-      </p:sp>
-      <p:sp>
-        <p:nvSpPr>
-          <p:cNvPr id="120" name="Shape 118"/>
-          <p:cNvSpPr/>
-          <p:nvPr/>
-        </p:nvSpPr>
-        <p:spPr>
-          <a:xfrm>
-            <a:off x="10351008" y="6565392"/>
-            <a:ext cx="100584" cy="100584"/>
-          </a:xfrm>
-          <a:prstGeom prst="ellipse">
-            <a:avLst/>
-          </a:prstGeom>
-          <a:solidFill>
-            <a:srgbClr val="1E8E3E"/>
-          </a:solidFill>
-          <a:ln w="6350">
-            <a:solidFill>
-              <a:srgbClr val="1E8E3E"/>
-            </a:solidFill>
-            <a:prstDash val="solid"/>
-          </a:ln>
-        </p:spPr>
-        <p:txBody>
-          <a:bodyPr/>
-          <a:lstStyle/>
-          <a:p>
-            <a:endParaRPr lang="en-US"/>
-          </a:p>
-        </p:txBody>
-      </p:sp>
-      <p:sp>
-        <p:nvSpPr>
-          <p:cNvPr id="121" name="Text 119"/>
-          <p:cNvSpPr/>
-          <p:nvPr/>
-        </p:nvSpPr>
-        <p:spPr>
-          <a:xfrm>
-            <a:off x="10616184" y="6505956"/>
-            <a:ext cx="4050792" cy="237744"/>
-          </a:xfrm>
-          <a:prstGeom prst="rect">
-            <a:avLst/>
-          </a:prstGeom>
-          <a:noFill/>
-          <a:ln>
-            <a:noFill/>
-          </a:ln>
-        </p:spPr>
-        <p:txBody>
-          <a:bodyPr wrap="square" lIns="0" tIns="0" rIns="0" bIns="0" rtlCol="0" anchor="ctr"/>
-          <a:lstStyle/>
-          <a:p>
-            <a:pPr marL="0" indent="0">
-              <a:buNone/>
-            </a:pPr>
-            <a:r>
-              <a:rPr lang="en-US" sz="740" dirty="0">
-                <a:solidFill>
-                  <a:srgbClr val="1F2937"/>
-                </a:solidFill>
-                <a:latin typeface="Arial" pitchFamily="34" charset="0"/>
-                <a:ea typeface="Arial" pitchFamily="34" charset="-122"/>
-                <a:cs typeface="Arial" pitchFamily="34" charset="-120"/>
-              </a:rPr>
-              <a:t>NEW SEC. CABLE ONLY (DUCT) — outer blue / inner green</a:t>
-            </a:r>
-            <a:endParaRPr lang="en-US" sz="740" dirty="0"/>
-          </a:p>
-        </p:txBody>
-      </p:sp>
-      <p:sp>
-        <p:nvSpPr>
-          <p:cNvPr id="122" name="Shape 120"/>
-          <p:cNvSpPr/>
-          <p:nvPr/>
-        </p:nvSpPr>
-        <p:spPr>
-          <a:xfrm>
-            <a:off x="10305288" y="6793992"/>
-            <a:ext cx="192024" cy="192024"/>
-          </a:xfrm>
-          <a:prstGeom prst="ellipse">
-            <a:avLst/>
-          </a:prstGeom>
-          <a:ln w="28575">
-            <a:solidFill>
-              <a:srgbClr val="BB00BB"/>
-            </a:solidFill>
-            <a:prstDash val="solid"/>
-          </a:ln>
-        </p:spPr>
-        <p:txBody>
-          <a:bodyPr/>
-          <a:lstStyle/>
-          <a:p>
-            <a:endParaRPr lang="en-US"/>
-          </a:p>
-        </p:txBody>
-      </p:sp>
-      <p:sp>
-        <p:nvSpPr>
-          <p:cNvPr id="123" name="Shape 121"/>
-          <p:cNvSpPr/>
-          <p:nvPr/>
-        </p:nvSpPr>
-        <p:spPr>
-          <a:xfrm>
-            <a:off x="10351008" y="6839712"/>
-            <a:ext cx="100584" cy="100584"/>
-          </a:xfrm>
-          <a:prstGeom prst="ellipse">
-            <a:avLst/>
-          </a:prstGeom>
-          <a:solidFill>
-            <a:srgbClr val="FFFFFF"/>
-          </a:solidFill>
-          <a:ln w="6350">
-            <a:solidFill>
-              <a:srgbClr val="FFFFFF"/>
-            </a:solidFill>
-            <a:prstDash val="solid"/>
-          </a:ln>
-        </p:spPr>
-        <p:txBody>
-          <a:bodyPr/>
-          <a:lstStyle/>
-          <a:p>
-            <a:endParaRPr lang="en-US"/>
-          </a:p>
-        </p:txBody>
-      </p:sp>
-      <p:sp>
-        <p:nvSpPr>
-          <p:cNvPr id="124" name="Text 122"/>
-          <p:cNvSpPr/>
-          <p:nvPr/>
-        </p:nvSpPr>
-        <p:spPr>
-          <a:xfrm>
-            <a:off x="10616184" y="6780276"/>
-            <a:ext cx="4050792" cy="237744"/>
-          </a:xfrm>
-          <a:prstGeom prst="rect">
-            <a:avLst/>
-          </a:prstGeom>
-          <a:noFill/>
-          <a:ln>
-            <a:noFill/>
-          </a:ln>
-        </p:spPr>
-        <p:txBody>
-          <a:bodyPr wrap="square" lIns="0" tIns="0" rIns="0" bIns="0" rtlCol="0" anchor="ctr"/>
-          <a:lstStyle/>
-          <a:p>
-            <a:pPr marL="0" indent="0">
-              <a:buNone/>
-            </a:pPr>
-            <a:r>
-              <a:rPr lang="en-US" sz="740" dirty="0">
-                <a:solidFill>
-                  <a:srgbClr val="1F2937"/>
-                </a:solidFill>
-                <a:latin typeface="Arial" pitchFamily="34" charset="0"/>
-                <a:ea typeface="Arial" pitchFamily="34" charset="-122"/>
-                <a:cs typeface="Arial" pitchFamily="34" charset="-120"/>
-              </a:rPr>
-              <a:t>RRM — REMOVE / PROTECT / RE-FIX (magenta / white)</a:t>
-            </a:r>
-            <a:endParaRPr lang="en-US" sz="740" dirty="0"/>
-          </a:p>
-        </p:txBody>
-      </p:sp>
-      <p:sp>
-        <p:nvSpPr>
-          <p:cNvPr id="125" name="Shape 123"/>
-          <p:cNvSpPr/>
-          <p:nvPr/>
-        </p:nvSpPr>
-        <p:spPr>
-          <a:xfrm>
-            <a:off x="10351008" y="7118604"/>
-            <a:ext cx="91440" cy="91440"/>
-          </a:xfrm>
-          <a:prstGeom prst="ellipse">
-            <a:avLst/>
-          </a:prstGeom>
-          <a:solidFill>
-            <a:srgbClr val="12A5B8"/>
-          </a:solidFill>
-          <a:ln w="6350">
-            <a:solidFill>
-              <a:srgbClr val="12A5B8"/>
-            </a:solidFill>
-            <a:prstDash val="solid"/>
-          </a:ln>
-        </p:spPr>
-        <p:txBody>
-          <a:bodyPr/>
-          <a:lstStyle/>
-          <a:p>
-            <a:endParaRPr lang="en-US"/>
-          </a:p>
-        </p:txBody>
-      </p:sp>
-      <p:sp>
-        <p:nvSpPr>
-          <p:cNvPr id="126" name="Text 124"/>
-          <p:cNvSpPr/>
-          <p:nvPr/>
-        </p:nvSpPr>
-        <p:spPr>
-          <a:xfrm>
-            <a:off x="10616184" y="7054596"/>
-            <a:ext cx="4050792" cy="237744"/>
-          </a:xfrm>
-          <a:prstGeom prst="rect">
-            <a:avLst/>
-          </a:prstGeom>
-          <a:noFill/>
-          <a:ln>
-            <a:noFill/>
-          </a:ln>
-        </p:spPr>
-        <p:txBody>
-          <a:bodyPr wrap="square" lIns="0" tIns="0" rIns="0" bIns="0" rtlCol="0" anchor="ctr"/>
-          <a:lstStyle/>
-          <a:p>
-            <a:pPr marL="0" indent="0">
-              <a:buNone/>
-            </a:pPr>
-            <a:r>
-              <a:rPr lang="en-US" sz="740" dirty="0">
-                <a:solidFill>
-                  <a:srgbClr val="1F2937"/>
-                </a:solidFill>
-                <a:latin typeface="Arial" pitchFamily="34" charset="0"/>
-                <a:ea typeface="Arial" pitchFamily="34" charset="-122"/>
-                <a:cs typeface="Arial" pitchFamily="34" charset="-120"/>
-              </a:rPr>
-              <a:t>EXISTING AGL ASSET (AS-BUILT)</a:t>
-            </a:r>
-            <a:endParaRPr lang="en-US" sz="740" dirty="0"/>
-          </a:p>
-        </p:txBody>
-      </p:sp>
-      <p:sp>
-        <p:nvSpPr>
-          <p:cNvPr id="127" name="Shape 125"/>
-          <p:cNvSpPr/>
-          <p:nvPr/>
-        </p:nvSpPr>
-        <p:spPr>
-          <a:xfrm>
-            <a:off x="10268712" y="7438644"/>
-            <a:ext cx="274320" cy="914"/>
-          </a:xfrm>
-          <a:prstGeom prst="line">
-            <a:avLst/>
-          </a:prstGeom>
-          <a:noFill/>
-          <a:ln w="19050">
-            <a:solidFill>
-              <a:srgbClr val="BB00BB"/>
-            </a:solidFill>
-            <a:prstDash val="dash"/>
-          </a:ln>
-        </p:spPr>
-        <p:txBody>
-          <a:bodyPr/>
-          <a:lstStyle/>
-          <a:p>
-            <a:endParaRPr lang="en-US"/>
-          </a:p>
-        </p:txBody>
-      </p:sp>
-      <p:sp>
-        <p:nvSpPr>
-          <p:cNvPr id="128" name="Text 126"/>
-          <p:cNvSpPr/>
-          <p:nvPr/>
-        </p:nvSpPr>
-        <p:spPr>
-          <a:xfrm>
-            <a:off x="10616184" y="7328916"/>
-            <a:ext cx="4050792" cy="237744"/>
-          </a:xfrm>
-          <a:prstGeom prst="rect">
-            <a:avLst/>
-          </a:prstGeom>
-          <a:noFill/>
-          <a:ln>
-            <a:noFill/>
-          </a:ln>
-        </p:spPr>
-        <p:txBody>
-          <a:bodyPr wrap="square" lIns="0" tIns="0" rIns="0" bIns="0" rtlCol="0" anchor="ctr"/>
-          <a:lstStyle/>
-          <a:p>
-            <a:pPr marL="0" indent="0">
-              <a:buNone/>
-            </a:pPr>
-            <a:r>
-              <a:rPr lang="en-US" sz="740" dirty="0">
-                <a:solidFill>
-                  <a:srgbClr val="1F2937"/>
-                </a:solidFill>
-                <a:latin typeface="Arial" pitchFamily="34" charset="0"/>
-                <a:ea typeface="Arial" pitchFamily="34" charset="-122"/>
-                <a:cs typeface="Arial" pitchFamily="34" charset="-120"/>
-              </a:rPr>
-              <a:t>SECONDARY DUCT RUN CROSSING CUT (INDICATIVE)</a:t>
-            </a:r>
-            <a:endParaRPr lang="en-US" sz="740" dirty="0"/>
-          </a:p>
-        </p:txBody>
-      </p:sp>
-      <p:sp>
-        <p:nvSpPr>
-          <p:cNvPr id="129" name="Shape 127"/>
-          <p:cNvSpPr/>
-          <p:nvPr/>
-        </p:nvSpPr>
-        <p:spPr>
-          <a:xfrm>
-            <a:off x="10268712" y="7712964"/>
-            <a:ext cx="274320" cy="914"/>
-          </a:xfrm>
-          <a:prstGeom prst="line">
-            <a:avLst/>
-          </a:prstGeom>
-          <a:noFill/>
-          <a:ln w="28575">
-            <a:solidFill>
-              <a:srgbClr val="CC0000"/>
-            </a:solidFill>
-            <a:prstDash val="solid"/>
-          </a:ln>
-        </p:spPr>
-        <p:txBody>
-          <a:bodyPr/>
-          <a:lstStyle/>
-          <a:p>
-            <a:endParaRPr lang="en-US"/>
-          </a:p>
-        </p:txBody>
-      </p:sp>
-      <p:sp>
-        <p:nvSpPr>
-          <p:cNvPr id="130" name="Text 128"/>
-          <p:cNvSpPr/>
-          <p:nvPr/>
-        </p:nvSpPr>
-        <p:spPr>
-          <a:xfrm>
-            <a:off x="10616184" y="7603236"/>
-            <a:ext cx="4050792" cy="237744"/>
-          </a:xfrm>
-          <a:prstGeom prst="rect">
-            <a:avLst/>
-          </a:prstGeom>
-          <a:noFill/>
-          <a:ln>
-            <a:noFill/>
-          </a:ln>
-        </p:spPr>
-        <p:txBody>
-          <a:bodyPr wrap="square" lIns="0" tIns="0" rIns="0" bIns="0" rtlCol="0" anchor="ctr"/>
-          <a:lstStyle/>
-          <a:p>
-            <a:pPr marL="0" indent="0">
-              <a:buNone/>
-            </a:pPr>
-            <a:r>
-              <a:rPr lang="en-US" sz="740" dirty="0">
-                <a:solidFill>
-                  <a:srgbClr val="1F2937"/>
-                </a:solidFill>
-                <a:latin typeface="Arial" pitchFamily="34" charset="0"/>
-                <a:ea typeface="Arial" pitchFamily="34" charset="-122"/>
-                <a:cs typeface="Arial" pitchFamily="34" charset="-120"/>
-              </a:rPr>
-              <a:t>AGL WORKS DEMARCATION (GOVERNING)</a:t>
-            </a:r>
-            <a:endParaRPr lang="en-US" sz="740" dirty="0"/>
-          </a:p>
-        </p:txBody>
-      </p:sp>
-      <p:sp>
-        <p:nvSpPr>
-          <p:cNvPr id="131" name="Shape 129"/>
-          <p:cNvSpPr/>
-          <p:nvPr/>
-        </p:nvSpPr>
-        <p:spPr>
-          <a:xfrm>
-            <a:off x="10268712" y="7987284"/>
-            <a:ext cx="274320" cy="914"/>
-          </a:xfrm>
-          <a:prstGeom prst="line">
-            <a:avLst/>
-          </a:prstGeom>
-          <a:noFill/>
-          <a:ln w="19050">
-            <a:solidFill>
-              <a:srgbClr val="C7A400"/>
-            </a:solidFill>
-            <a:prstDash val="dashDot"/>
-          </a:ln>
-        </p:spPr>
-        <p:txBody>
-          <a:bodyPr/>
-          <a:lstStyle/>
-          <a:p>
-            <a:endParaRPr lang="en-US"/>
-          </a:p>
-        </p:txBody>
-      </p:sp>
-      <p:sp>
-        <p:nvSpPr>
-          <p:cNvPr id="132" name="Text 130"/>
-          <p:cNvSpPr/>
-          <p:nvPr/>
-        </p:nvSpPr>
-        <p:spPr>
-          <a:xfrm>
-            <a:off x="10616184" y="7877556"/>
-            <a:ext cx="4050792" cy="237744"/>
-          </a:xfrm>
-          <a:prstGeom prst="rect">
-            <a:avLst/>
-          </a:prstGeom>
-          <a:noFill/>
-          <a:ln>
-            <a:noFill/>
-          </a:ln>
-        </p:spPr>
-        <p:txBody>
-          <a:bodyPr wrap="square" lIns="0" tIns="0" rIns="0" bIns="0" rtlCol="0" anchor="ctr"/>
-          <a:lstStyle/>
-          <a:p>
-            <a:pPr marL="0" indent="0">
-              <a:buNone/>
-            </a:pPr>
-            <a:r>
-              <a:rPr lang="en-US" sz="740" dirty="0">
-                <a:solidFill>
-                  <a:srgbClr val="1F2937"/>
-                </a:solidFill>
-                <a:latin typeface="Arial" pitchFamily="34" charset="0"/>
-                <a:ea typeface="Arial" pitchFamily="34" charset="-122"/>
-                <a:cs typeface="Arial" pitchFamily="34" charset="-120"/>
-              </a:rPr>
-              <a:t>TAXIWAY CENTERLINE (AS-BUILT, THROUGH TCC FITTINGS)</a:t>
-            </a:r>
-            <a:endParaRPr lang="en-US" sz="740" dirty="0"/>
-          </a:p>
-        </p:txBody>
-      </p:sp>
-      <p:sp>
-        <p:nvSpPr>
-          <p:cNvPr id="133" name="Shape 131"/>
-          <p:cNvSpPr/>
-          <p:nvPr/>
-        </p:nvSpPr>
-        <p:spPr>
-          <a:xfrm>
-            <a:off x="10268712" y="8261604"/>
-            <a:ext cx="274320" cy="914"/>
-          </a:xfrm>
-          <a:prstGeom prst="line">
-            <a:avLst/>
-          </a:prstGeom>
-          <a:noFill/>
-          <a:ln w="28575">
-            <a:solidFill>
-              <a:srgbClr val="8B0000"/>
-            </a:solidFill>
-            <a:prstDash val="solid"/>
-          </a:ln>
-        </p:spPr>
-        <p:txBody>
-          <a:bodyPr/>
-          <a:lstStyle/>
-          <a:p>
-            <a:endParaRPr lang="en-US"/>
-          </a:p>
-        </p:txBody>
-      </p:sp>
-      <p:sp>
-        <p:nvSpPr>
-          <p:cNvPr id="134" name="Text 132"/>
-          <p:cNvSpPr/>
-          <p:nvPr/>
-        </p:nvSpPr>
-        <p:spPr>
-          <a:xfrm>
-            <a:off x="10616184" y="8151876"/>
-            <a:ext cx="4050792" cy="237744"/>
-          </a:xfrm>
-          <a:prstGeom prst="rect">
-            <a:avLst/>
-          </a:prstGeom>
-          <a:noFill/>
-          <a:ln>
-            <a:noFill/>
-          </a:ln>
-        </p:spPr>
-        <p:txBody>
-          <a:bodyPr wrap="square" lIns="0" tIns="0" rIns="0" bIns="0" rtlCol="0" anchor="ctr"/>
-          <a:lstStyle/>
-          <a:p>
-            <a:pPr marL="0" indent="0">
-              <a:buNone/>
-            </a:pPr>
-            <a:r>
-              <a:rPr lang="en-US" sz="740" dirty="0">
-                <a:solidFill>
-                  <a:srgbClr val="1F2937"/>
-                </a:solidFill>
-                <a:latin typeface="Arial" pitchFamily="34" charset="0"/>
-                <a:ea typeface="Arial" pitchFamily="34" charset="-122"/>
-                <a:cs typeface="Arial" pitchFamily="34" charset="-120"/>
-              </a:rPr>
-              <a:t>STOP BAR (AS-BUILT, THROUGH SBC FITTINGS)</a:t>
-            </a:r>
-            <a:endParaRPr lang="en-US" sz="740" dirty="0"/>
-          </a:p>
-        </p:txBody>
-      </p:sp>
-      <p:sp>
-        <p:nvSpPr>
-          <p:cNvPr id="135" name="Shape 133"/>
-          <p:cNvSpPr/>
-          <p:nvPr/>
-        </p:nvSpPr>
-        <p:spPr>
-          <a:xfrm>
-            <a:off x="10268712" y="8535924"/>
-            <a:ext cx="274320" cy="914"/>
-          </a:xfrm>
-          <a:prstGeom prst="line">
-            <a:avLst/>
-          </a:prstGeom>
-          <a:noFill/>
-          <a:ln w="12700">
-            <a:solidFill>
-              <a:srgbClr val="7A8288"/>
-            </a:solidFill>
-            <a:prstDash val="solid"/>
-          </a:ln>
-        </p:spPr>
-        <p:txBody>
-          <a:bodyPr/>
-          <a:lstStyle/>
-          <a:p>
-            <a:endParaRPr lang="en-US"/>
-          </a:p>
-        </p:txBody>
-      </p:sp>
-      <p:sp>
-        <p:nvSpPr>
-          <p:cNvPr id="136" name="Text 134"/>
-          <p:cNvSpPr/>
-          <p:nvPr/>
-        </p:nvSpPr>
-        <p:spPr>
-          <a:xfrm>
-            <a:off x="10616184" y="8426196"/>
-            <a:ext cx="4050792" cy="237744"/>
-          </a:xfrm>
-          <a:prstGeom prst="rect">
-            <a:avLst/>
-          </a:prstGeom>
-          <a:noFill/>
-          <a:ln>
-            <a:noFill/>
-          </a:ln>
-        </p:spPr>
-        <p:txBody>
-          <a:bodyPr wrap="square" lIns="0" tIns="0" rIns="0" bIns="0" rtlCol="0" anchor="ctr"/>
-          <a:lstStyle/>
-          <a:p>
-            <a:pPr marL="0" indent="0">
-              <a:buNone/>
-            </a:pPr>
-            <a:r>
-              <a:rPr lang="en-US" sz="740" dirty="0">
-                <a:solidFill>
-                  <a:srgbClr val="1F2937"/>
-                </a:solidFill>
-                <a:latin typeface="Arial" pitchFamily="34" charset="0"/>
-                <a:ea typeface="Arial" pitchFamily="34" charset="-122"/>
-                <a:cs typeface="Arial" pitchFamily="34" charset="-120"/>
-              </a:rPr>
-              <a:t>TWY EDGE / PAVEMENT BOUNDARY (INDICATIVE 23 m — CONFIRM ON SITE)</a:t>
-            </a:r>
-            <a:endParaRPr lang="en-US" sz="740" dirty="0"/>
           </a:p>
         </p:txBody>
       </p:sp>
@@ -17170,6 +17216,1113 @@
           </a:ln>
         </p:spPr>
       </p:pic>
+      <p:sp>
+        <p:nvSpPr>
+          <p:cNvPr id="144" name="Legend 144"/>
+          <p:cNvSpPr/>
+          <p:nvPr/>
+        </p:nvSpPr>
+        <p:spPr>
+          <a:xfrm>
+            <a:off x="10305288" y="6414516"/>
+            <a:ext cx="2103119" cy="237744"/>
+          </a:xfrm>
+          <a:prstGeom prst="rect">
+            <a:avLst/>
+          </a:prstGeom>
+          <a:noFill/>
+          <a:ln>
+            <a:noFill/>
+          </a:ln>
+        </p:spPr>
+        <p:txBody>
+          <a:bodyPr wrap="square" lIns="0" tIns="0" rIns="0" bIns="0" rtlCol="0" anchor="ctr"/>
+          <a:lstStyle/>
+          <a:p>
+            <a:pPr marL="0" indent="0">
+              <a:buNone/>
+            </a:pPr>
+            <a:r>
+              <a:rPr sz="660" b="1">
+                <a:solidFill>
+                  <a:srgbClr val="1E2761"/>
+                </a:solidFill>
+                <a:latin typeface="Arial"/>
+              </a:rPr>
+              <a:t>WORKS ACTIONS</a:t>
+            </a:r>
+            <a:endParaRPr lang="en-US" sz="740" dirty="0"/>
+          </a:p>
+        </p:txBody>
+      </p:sp>
+      <p:sp>
+        <p:nvSpPr>
+          <p:cNvPr id="145" name="Legend 145"/>
+          <p:cNvSpPr/>
+          <p:nvPr/>
+        </p:nvSpPr>
+        <p:spPr>
+          <a:xfrm>
+            <a:off x="10305288" y="6585966"/>
+            <a:ext cx="192024" cy="192024"/>
+          </a:xfrm>
+          <a:prstGeom prst="ellipse">
+            <a:avLst/>
+          </a:prstGeom>
+          <a:noFill/>
+          <a:ln w="19050">
+            <a:solidFill>
+              <a:srgbClr val="0055CC"/>
+            </a:solidFill>
+            <a:prstDash val="solid"/>
+          </a:ln>
+        </p:spPr>
+        <p:txBody>
+          <a:bodyPr/>
+          <a:lstStyle/>
+          <a:p>
+            <a:endParaRPr lang="en-US"/>
+          </a:p>
+        </p:txBody>
+      </p:sp>
+      <p:sp>
+        <p:nvSpPr>
+          <p:cNvPr id="146" name="Legend 146"/>
+          <p:cNvSpPr/>
+          <p:nvPr/>
+        </p:nvSpPr>
+        <p:spPr>
+          <a:xfrm>
+            <a:off x="10351008" y="6631686"/>
+            <a:ext cx="100584" cy="100584"/>
+          </a:xfrm>
+          <a:prstGeom prst="ellipse">
+            <a:avLst/>
+          </a:prstGeom>
+          <a:solidFill>
+            <a:srgbClr val="1E8E3E"/>
+          </a:solidFill>
+          <a:ln w="6350">
+            <a:solidFill>
+              <a:srgbClr val="1E8E3E"/>
+            </a:solidFill>
+            <a:prstDash val="solid"/>
+          </a:ln>
+        </p:spPr>
+        <p:txBody>
+          <a:bodyPr/>
+          <a:lstStyle/>
+          <a:p>
+            <a:endParaRPr lang="en-US"/>
+          </a:p>
+        </p:txBody>
+      </p:sp>
+      <p:sp>
+        <p:nvSpPr>
+          <p:cNvPr id="147" name="Legend 147"/>
+          <p:cNvSpPr/>
+          <p:nvPr/>
+        </p:nvSpPr>
+        <p:spPr>
+          <a:xfrm>
+            <a:off x="10533888" y="6592824"/>
+            <a:ext cx="1874519" cy="118872"/>
+          </a:xfrm>
+          <a:prstGeom prst="rect">
+            <a:avLst/>
+          </a:prstGeom>
+          <a:noFill/>
+          <a:ln>
+            <a:noFill/>
+          </a:ln>
+        </p:spPr>
+        <p:txBody>
+          <a:bodyPr wrap="square" lIns="0" tIns="0" rIns="0" bIns="0" rtlCol="0" anchor="ctr"/>
+          <a:lstStyle/>
+          <a:p>
+            <a:pPr marL="0" indent="0">
+              <a:buNone/>
+            </a:pPr>
+            <a:r>
+              <a:rPr sz="640">
+                <a:solidFill>
+                  <a:srgbClr val="1F2937"/>
+                </a:solidFill>
+                <a:latin typeface="Arial"/>
+              </a:rPr>
+              <a:t>NEW SEC. CABLE ONLY (DUCT)</a:t>
+            </a:r>
+            <a:endParaRPr lang="en-US" sz="740" dirty="0"/>
+          </a:p>
+        </p:txBody>
+      </p:sp>
+      <p:sp>
+        <p:nvSpPr>
+          <p:cNvPr id="148" name="Legend 148"/>
+          <p:cNvSpPr/>
+          <p:nvPr/>
+        </p:nvSpPr>
+        <p:spPr>
+          <a:xfrm>
+            <a:off x="10305288" y="6764274"/>
+            <a:ext cx="192024" cy="192024"/>
+          </a:xfrm>
+          <a:prstGeom prst="ellipse">
+            <a:avLst/>
+          </a:prstGeom>
+          <a:noFill/>
+          <a:ln w="19050">
+            <a:solidFill>
+              <a:srgbClr val="BB00BB"/>
+            </a:solidFill>
+            <a:prstDash val="solid"/>
+          </a:ln>
+        </p:spPr>
+        <p:txBody>
+          <a:bodyPr/>
+          <a:lstStyle/>
+          <a:p>
+            <a:endParaRPr lang="en-US"/>
+          </a:p>
+        </p:txBody>
+      </p:sp>
+      <p:sp>
+        <p:nvSpPr>
+          <p:cNvPr id="149" name="Legend 149"/>
+          <p:cNvSpPr/>
+          <p:nvPr/>
+        </p:nvSpPr>
+        <p:spPr>
+          <a:xfrm>
+            <a:off x="10351008" y="6809994"/>
+            <a:ext cx="100584" cy="100584"/>
+          </a:xfrm>
+          <a:prstGeom prst="ellipse">
+            <a:avLst/>
+          </a:prstGeom>
+          <a:solidFill>
+            <a:srgbClr val="FFFFFF"/>
+          </a:solidFill>
+          <a:ln w="6350">
+            <a:solidFill>
+              <a:srgbClr val="FFFFFF"/>
+            </a:solidFill>
+            <a:prstDash val="solid"/>
+          </a:ln>
+        </p:spPr>
+        <p:txBody>
+          <a:bodyPr/>
+          <a:lstStyle/>
+          <a:p>
+            <a:endParaRPr lang="en-US"/>
+          </a:p>
+        </p:txBody>
+      </p:sp>
+      <p:sp>
+        <p:nvSpPr>
+          <p:cNvPr id="150" name="Legend 150"/>
+          <p:cNvSpPr/>
+          <p:nvPr/>
+        </p:nvSpPr>
+        <p:spPr>
+          <a:xfrm>
+            <a:off x="10533888" y="6771132"/>
+            <a:ext cx="1874519" cy="118872"/>
+          </a:xfrm>
+          <a:prstGeom prst="rect">
+            <a:avLst/>
+          </a:prstGeom>
+          <a:noFill/>
+          <a:ln>
+            <a:noFill/>
+          </a:ln>
+        </p:spPr>
+        <p:txBody>
+          <a:bodyPr wrap="square" lIns="0" tIns="0" rIns="0" bIns="0" rtlCol="0" anchor="ctr"/>
+          <a:lstStyle/>
+          <a:p>
+            <a:pPr marL="0" indent="0">
+              <a:buNone/>
+            </a:pPr>
+            <a:r>
+              <a:rPr sz="640">
+                <a:solidFill>
+                  <a:srgbClr val="1F2937"/>
+                </a:solidFill>
+                <a:latin typeface="Arial"/>
+              </a:rPr>
+              <a:t>RRM — REMOVE / PROTECT / RE-FIX</a:t>
+            </a:r>
+            <a:endParaRPr lang="en-US" sz="740" dirty="0"/>
+          </a:p>
+        </p:txBody>
+      </p:sp>
+      <p:sp>
+        <p:nvSpPr>
+          <p:cNvPr id="151" name="Legend 151"/>
+          <p:cNvSpPr/>
+          <p:nvPr/>
+        </p:nvSpPr>
+        <p:spPr>
+          <a:xfrm>
+            <a:off x="10305288" y="6949440"/>
+            <a:ext cx="2103119" cy="237744"/>
+          </a:xfrm>
+          <a:prstGeom prst="rect">
+            <a:avLst/>
+          </a:prstGeom>
+          <a:noFill/>
+          <a:ln>
+            <a:noFill/>
+          </a:ln>
+        </p:spPr>
+        <p:txBody>
+          <a:bodyPr wrap="square" lIns="0" tIns="0" rIns="0" bIns="0" rtlCol="0" anchor="ctr"/>
+          <a:lstStyle/>
+          <a:p>
+            <a:pPr marL="0" indent="0">
+              <a:buNone/>
+            </a:pPr>
+            <a:r>
+              <a:rPr sz="660" b="1">
+                <a:solidFill>
+                  <a:srgbClr val="1E2761"/>
+                </a:solidFill>
+                <a:latin typeface="Arial"/>
+              </a:rPr>
+              <a:t>EXISTING ASSETS (AS-BUILT)</a:t>
+            </a:r>
+            <a:endParaRPr lang="en-US" sz="740" dirty="0"/>
+          </a:p>
+        </p:txBody>
+      </p:sp>
+      <p:sp>
+        <p:nvSpPr>
+          <p:cNvPr id="152" name="Legend 152"/>
+          <p:cNvSpPr/>
+          <p:nvPr/>
+        </p:nvSpPr>
+        <p:spPr>
+          <a:xfrm>
+            <a:off x="10355580" y="7171182"/>
+            <a:ext cx="91440" cy="91440"/>
+          </a:xfrm>
+          <a:prstGeom prst="ellipse">
+            <a:avLst/>
+          </a:prstGeom>
+          <a:solidFill>
+            <a:srgbClr val="12A5B8"/>
+          </a:solidFill>
+          <a:ln w="6350">
+            <a:solidFill>
+              <a:srgbClr val="12A5B8"/>
+            </a:solidFill>
+            <a:prstDash val="solid"/>
+          </a:ln>
+        </p:spPr>
+        <p:txBody>
+          <a:bodyPr/>
+          <a:lstStyle/>
+          <a:p>
+            <a:endParaRPr lang="en-US"/>
+          </a:p>
+        </p:txBody>
+      </p:sp>
+      <p:sp>
+        <p:nvSpPr>
+          <p:cNvPr id="153" name="Legend 153"/>
+          <p:cNvSpPr/>
+          <p:nvPr/>
+        </p:nvSpPr>
+        <p:spPr>
+          <a:xfrm>
+            <a:off x="10533888" y="7127748"/>
+            <a:ext cx="1874519" cy="118872"/>
+          </a:xfrm>
+          <a:prstGeom prst="rect">
+            <a:avLst/>
+          </a:prstGeom>
+          <a:noFill/>
+          <a:ln>
+            <a:noFill/>
+          </a:ln>
+        </p:spPr>
+        <p:txBody>
+          <a:bodyPr wrap="square" lIns="0" tIns="0" rIns="0" bIns="0" rtlCol="0" anchor="ctr"/>
+          <a:lstStyle/>
+          <a:p>
+            <a:pPr marL="0" indent="0">
+              <a:buNone/>
+            </a:pPr>
+            <a:r>
+              <a:rPr sz="640">
+                <a:solidFill>
+                  <a:srgbClr val="1F2937"/>
+                </a:solidFill>
+                <a:latin typeface="Arial"/>
+              </a:rPr>
+              <a:t>EXISTING AGL ASSET — see asset key</a:t>
+            </a:r>
+            <a:endParaRPr lang="en-US" sz="740" dirty="0"/>
+          </a:p>
+        </p:txBody>
+      </p:sp>
+      <p:sp>
+        <p:nvSpPr>
+          <p:cNvPr id="154" name="Legend 154"/>
+          <p:cNvSpPr/>
+          <p:nvPr/>
+        </p:nvSpPr>
+        <p:spPr>
+          <a:xfrm>
+            <a:off x="10323576" y="7317486"/>
+            <a:ext cx="155448" cy="155448"/>
+          </a:xfrm>
+          <a:prstGeom prst="rect">
+            <a:avLst/>
+          </a:prstGeom>
+          <a:noFill/>
+          <a:ln w="19050">
+            <a:solidFill>
+              <a:srgbClr val="BB00BB"/>
+            </a:solidFill>
+          </a:ln>
+        </p:spPr>
+        <p:txBody>
+          <a:bodyPr/>
+          <a:lstStyle/>
+          <a:p>
+            <a:endParaRPr lang="en-US"/>
+          </a:p>
+        </p:txBody>
+      </p:sp>
+      <p:sp>
+        <p:nvSpPr>
+          <p:cNvPr id="155" name="Legend 155"/>
+          <p:cNvSpPr/>
+          <p:nvPr/>
+        </p:nvSpPr>
+        <p:spPr>
+          <a:xfrm>
+            <a:off x="10533888" y="7306056"/>
+            <a:ext cx="1874519" cy="118872"/>
+          </a:xfrm>
+          <a:prstGeom prst="rect">
+            <a:avLst/>
+          </a:prstGeom>
+          <a:noFill/>
+          <a:ln>
+            <a:noFill/>
+          </a:ln>
+        </p:spPr>
+        <p:txBody>
+          <a:bodyPr wrap="square" lIns="0" tIns="0" rIns="0" bIns="0" rtlCol="0" anchor="ctr"/>
+          <a:lstStyle/>
+          <a:p>
+            <a:pPr marL="0" indent="0">
+              <a:buNone/>
+            </a:pPr>
+            <a:r>
+              <a:rPr sz="640">
+                <a:solidFill>
+                  <a:srgbClr val="1F2937"/>
+                </a:solidFill>
+                <a:latin typeface="Arial"/>
+              </a:rPr>
+              <a:t>AGL FEED MANHOLE / HANDHOLE</a:t>
+            </a:r>
+            <a:endParaRPr lang="en-US" sz="740" dirty="0"/>
+          </a:p>
+        </p:txBody>
+      </p:sp>
+      <p:sp>
+        <p:nvSpPr>
+          <p:cNvPr id="156" name="Legend 156"/>
+          <p:cNvSpPr/>
+          <p:nvPr/>
+        </p:nvSpPr>
+        <p:spPr>
+          <a:xfrm>
+            <a:off x="10305288" y="7484364"/>
+            <a:ext cx="2103119" cy="237744"/>
+          </a:xfrm>
+          <a:prstGeom prst="rect">
+            <a:avLst/>
+          </a:prstGeom>
+          <a:noFill/>
+          <a:ln>
+            <a:noFill/>
+          </a:ln>
+        </p:spPr>
+        <p:txBody>
+          <a:bodyPr wrap="square" lIns="0" tIns="0" rIns="0" bIns="0" rtlCol="0" anchor="ctr"/>
+          <a:lstStyle/>
+          <a:p>
+            <a:pPr marL="0" indent="0">
+              <a:buNone/>
+            </a:pPr>
+            <a:r>
+              <a:rPr sz="660" b="1">
+                <a:solidFill>
+                  <a:srgbClr val="1E2761"/>
+                </a:solidFill>
+                <a:latin typeface="Arial"/>
+              </a:rPr>
+              <a:t>AREAS &amp; LINEWORK</a:t>
+            </a:r>
+            <a:endParaRPr lang="en-US" sz="740" dirty="0"/>
+          </a:p>
+        </p:txBody>
+      </p:sp>
+      <p:sp>
+        <p:nvSpPr>
+          <p:cNvPr id="157" name="Legend 157"/>
+          <p:cNvSpPr/>
+          <p:nvPr/>
+        </p:nvSpPr>
+        <p:spPr>
+          <a:xfrm>
+            <a:off x="10305288" y="7692390"/>
+            <a:ext cx="201168" cy="118872"/>
+          </a:xfrm>
+          <a:prstGeom prst="rect">
+            <a:avLst/>
+          </a:prstGeom>
+          <a:solidFill>
+            <a:srgbClr val="BFBFBF"/>
+          </a:solidFill>
+          <a:ln w="6350">
+            <a:solidFill>
+              <a:srgbClr val="7A8288"/>
+            </a:solidFill>
+          </a:ln>
+        </p:spPr>
+        <p:txBody>
+          <a:bodyPr/>
+          <a:lstStyle/>
+          <a:p>
+            <a:endParaRPr lang="en-US"/>
+          </a:p>
+        </p:txBody>
+      </p:sp>
+      <p:sp>
+        <p:nvSpPr>
+          <p:cNvPr id="158" name="Legend 158"/>
+          <p:cNvSpPr/>
+          <p:nvPr/>
+        </p:nvSpPr>
+        <p:spPr>
+          <a:xfrm>
+            <a:off x="10533888" y="7662672"/>
+            <a:ext cx="1874519" cy="118872"/>
+          </a:xfrm>
+          <a:prstGeom prst="rect">
+            <a:avLst/>
+          </a:prstGeom>
+          <a:noFill/>
+          <a:ln>
+            <a:noFill/>
+          </a:ln>
+        </p:spPr>
+        <p:txBody>
+          <a:bodyPr wrap="square" lIns="0" tIns="0" rIns="0" bIns="0" rtlCol="0" anchor="ctr"/>
+          <a:lstStyle/>
+          <a:p>
+            <a:pPr marL="0" indent="0">
+              <a:buNone/>
+            </a:pPr>
+            <a:r>
+              <a:rPr sz="640">
+                <a:solidFill>
+                  <a:srgbClr val="1F2937"/>
+                </a:solidFill>
+                <a:latin typeface="Arial"/>
+              </a:rPr>
+              <a:t>MILLING / CUT AREA</a:t>
+            </a:r>
+            <a:endParaRPr lang="en-US" sz="740" dirty="0"/>
+          </a:p>
+        </p:txBody>
+      </p:sp>
+      <p:sp>
+        <p:nvSpPr>
+          <p:cNvPr id="159" name="Legend 159"/>
+          <p:cNvSpPr/>
+          <p:nvPr/>
+        </p:nvSpPr>
+        <p:spPr>
+          <a:xfrm>
+            <a:off x="10287000" y="7930134"/>
+            <a:ext cx="237744" cy="914"/>
+          </a:xfrm>
+          <a:prstGeom prst="line">
+            <a:avLst/>
+          </a:prstGeom>
+          <a:noFill/>
+          <a:ln w="19050">
+            <a:solidFill>
+              <a:srgbClr val="CC0000"/>
+            </a:solidFill>
+            <a:prstDash val="solid"/>
+          </a:ln>
+        </p:spPr>
+        <p:txBody>
+          <a:bodyPr/>
+          <a:lstStyle/>
+          <a:p>
+            <a:endParaRPr lang="en-US"/>
+          </a:p>
+        </p:txBody>
+      </p:sp>
+      <p:sp>
+        <p:nvSpPr>
+          <p:cNvPr id="160" name="Legend 160"/>
+          <p:cNvSpPr/>
+          <p:nvPr/>
+        </p:nvSpPr>
+        <p:spPr>
+          <a:xfrm>
+            <a:off x="10533888" y="7840980"/>
+            <a:ext cx="1874519" cy="118872"/>
+          </a:xfrm>
+          <a:prstGeom prst="rect">
+            <a:avLst/>
+          </a:prstGeom>
+          <a:noFill/>
+          <a:ln>
+            <a:noFill/>
+          </a:ln>
+        </p:spPr>
+        <p:txBody>
+          <a:bodyPr wrap="square" lIns="0" tIns="0" rIns="0" bIns="0" rtlCol="0" anchor="ctr"/>
+          <a:lstStyle/>
+          <a:p>
+            <a:pPr marL="0" indent="0">
+              <a:buNone/>
+            </a:pPr>
+            <a:r>
+              <a:rPr sz="640">
+                <a:solidFill>
+                  <a:srgbClr val="1F2937"/>
+                </a:solidFill>
+                <a:latin typeface="Arial"/>
+              </a:rPr>
+              <a:t>AGL WORKS DEMARCATION (GOVERNING)</a:t>
+            </a:r>
+            <a:endParaRPr lang="en-US" sz="740" dirty="0"/>
+          </a:p>
+        </p:txBody>
+      </p:sp>
+      <p:sp>
+        <p:nvSpPr>
+          <p:cNvPr id="161" name="Legend 161"/>
+          <p:cNvSpPr/>
+          <p:nvPr/>
+        </p:nvSpPr>
+        <p:spPr>
+          <a:xfrm>
+            <a:off x="10287000" y="8108442"/>
+            <a:ext cx="237744" cy="914"/>
+          </a:xfrm>
+          <a:prstGeom prst="line">
+            <a:avLst/>
+          </a:prstGeom>
+          <a:noFill/>
+          <a:ln w="19050">
+            <a:solidFill>
+              <a:srgbClr val="BB00BB"/>
+            </a:solidFill>
+            <a:prstDash val="dash"/>
+          </a:ln>
+        </p:spPr>
+        <p:txBody>
+          <a:bodyPr/>
+          <a:lstStyle/>
+          <a:p>
+            <a:endParaRPr lang="en-US"/>
+          </a:p>
+        </p:txBody>
+      </p:sp>
+      <p:sp>
+        <p:nvSpPr>
+          <p:cNvPr id="162" name="Legend 162"/>
+          <p:cNvSpPr/>
+          <p:nvPr/>
+        </p:nvSpPr>
+        <p:spPr>
+          <a:xfrm>
+            <a:off x="10533888" y="8019288"/>
+            <a:ext cx="1874519" cy="118872"/>
+          </a:xfrm>
+          <a:prstGeom prst="rect">
+            <a:avLst/>
+          </a:prstGeom>
+          <a:noFill/>
+          <a:ln>
+            <a:noFill/>
+          </a:ln>
+        </p:spPr>
+        <p:txBody>
+          <a:bodyPr wrap="square" lIns="0" tIns="0" rIns="0" bIns="0" rtlCol="0" anchor="ctr"/>
+          <a:lstStyle/>
+          <a:p>
+            <a:pPr marL="0" indent="0">
+              <a:buNone/>
+            </a:pPr>
+            <a:r>
+              <a:rPr sz="640">
+                <a:solidFill>
+                  <a:srgbClr val="1F2937"/>
+                </a:solidFill>
+                <a:latin typeface="Arial"/>
+              </a:rPr>
+              <a:t>SECONDARY DUCT CROSSING CUT (INDIC.)</a:t>
+            </a:r>
+            <a:endParaRPr lang="en-US" sz="740" dirty="0"/>
+          </a:p>
+        </p:txBody>
+      </p:sp>
+      <p:sp>
+        <p:nvSpPr>
+          <p:cNvPr id="163" name="Legend 163"/>
+          <p:cNvSpPr/>
+          <p:nvPr/>
+        </p:nvSpPr>
+        <p:spPr>
+          <a:xfrm>
+            <a:off x="10287000" y="8286750"/>
+            <a:ext cx="237744" cy="914"/>
+          </a:xfrm>
+          <a:prstGeom prst="line">
+            <a:avLst/>
+          </a:prstGeom>
+          <a:noFill/>
+          <a:ln w="19050">
+            <a:solidFill>
+              <a:srgbClr val="C9CDD2"/>
+            </a:solidFill>
+            <a:prstDash val="dash"/>
+          </a:ln>
+        </p:spPr>
+        <p:txBody>
+          <a:bodyPr/>
+          <a:lstStyle/>
+          <a:p>
+            <a:endParaRPr lang="en-US"/>
+          </a:p>
+        </p:txBody>
+      </p:sp>
+      <p:sp>
+        <p:nvSpPr>
+          <p:cNvPr id="164" name="Legend 164"/>
+          <p:cNvSpPr/>
+          <p:nvPr/>
+        </p:nvSpPr>
+        <p:spPr>
+          <a:xfrm>
+            <a:off x="10533888" y="8197596"/>
+            <a:ext cx="1874519" cy="118872"/>
+          </a:xfrm>
+          <a:prstGeom prst="rect">
+            <a:avLst/>
+          </a:prstGeom>
+          <a:noFill/>
+          <a:ln>
+            <a:noFill/>
+          </a:ln>
+        </p:spPr>
+        <p:txBody>
+          <a:bodyPr wrap="square" lIns="0" tIns="0" rIns="0" bIns="0" rtlCol="0" anchor="ctr"/>
+          <a:lstStyle/>
+          <a:p>
+            <a:pPr marL="0" indent="0">
+              <a:buNone/>
+            </a:pPr>
+            <a:r>
+              <a:rPr sz="640">
+                <a:solidFill>
+                  <a:srgbClr val="1F2937"/>
+                </a:solidFill>
+                <a:latin typeface="Arial"/>
+              </a:rPr>
+              <a:t>INDICATIVE DUCT — LIGHT TO MH / HH</a:t>
+            </a:r>
+            <a:endParaRPr lang="en-US" sz="740" dirty="0"/>
+          </a:p>
+        </p:txBody>
+      </p:sp>
+      <p:sp>
+        <p:nvSpPr>
+          <p:cNvPr id="165" name="Legend 165"/>
+          <p:cNvSpPr/>
+          <p:nvPr/>
+        </p:nvSpPr>
+        <p:spPr>
+          <a:xfrm>
+            <a:off x="10287000" y="8465058"/>
+            <a:ext cx="237744" cy="914"/>
+          </a:xfrm>
+          <a:prstGeom prst="line">
+            <a:avLst/>
+          </a:prstGeom>
+          <a:noFill/>
+          <a:ln w="19050">
+            <a:solidFill>
+              <a:srgbClr val="C7A400"/>
+            </a:solidFill>
+            <a:prstDash val="dashDot"/>
+          </a:ln>
+        </p:spPr>
+        <p:txBody>
+          <a:bodyPr/>
+          <a:lstStyle/>
+          <a:p>
+            <a:endParaRPr lang="en-US"/>
+          </a:p>
+        </p:txBody>
+      </p:sp>
+      <p:sp>
+        <p:nvSpPr>
+          <p:cNvPr id="166" name="Legend 166"/>
+          <p:cNvSpPr/>
+          <p:nvPr/>
+        </p:nvSpPr>
+        <p:spPr>
+          <a:xfrm>
+            <a:off x="10533888" y="8375904"/>
+            <a:ext cx="1874519" cy="118872"/>
+          </a:xfrm>
+          <a:prstGeom prst="rect">
+            <a:avLst/>
+          </a:prstGeom>
+          <a:noFill/>
+          <a:ln>
+            <a:noFill/>
+          </a:ln>
+        </p:spPr>
+        <p:txBody>
+          <a:bodyPr wrap="square" lIns="0" tIns="0" rIns="0" bIns="0" rtlCol="0" anchor="ctr"/>
+          <a:lstStyle/>
+          <a:p>
+            <a:pPr marL="0" indent="0">
+              <a:buNone/>
+            </a:pPr>
+            <a:r>
+              <a:rPr sz="640">
+                <a:solidFill>
+                  <a:srgbClr val="1F2937"/>
+                </a:solidFill>
+                <a:latin typeface="Arial"/>
+              </a:rPr>
+              <a:t>TAXIWAY CENTRELINE (THROUGH TCC)</a:t>
+            </a:r>
+            <a:endParaRPr lang="en-US" sz="740" dirty="0"/>
+          </a:p>
+        </p:txBody>
+      </p:sp>
+      <p:sp>
+        <p:nvSpPr>
+          <p:cNvPr id="167" name="Legend 167"/>
+          <p:cNvSpPr/>
+          <p:nvPr/>
+        </p:nvSpPr>
+        <p:spPr>
+          <a:xfrm>
+            <a:off x="10287000" y="8643366"/>
+            <a:ext cx="237744" cy="914"/>
+          </a:xfrm>
+          <a:prstGeom prst="line">
+            <a:avLst/>
+          </a:prstGeom>
+          <a:noFill/>
+          <a:ln w="19050">
+            <a:solidFill>
+              <a:srgbClr val="7A8288"/>
+            </a:solidFill>
+            <a:prstDash val="solid"/>
+          </a:ln>
+        </p:spPr>
+        <p:txBody>
+          <a:bodyPr/>
+          <a:lstStyle/>
+          <a:p>
+            <a:endParaRPr lang="en-US"/>
+          </a:p>
+        </p:txBody>
+      </p:sp>
+      <p:sp>
+        <p:nvSpPr>
+          <p:cNvPr id="168" name="Legend 168"/>
+          <p:cNvSpPr/>
+          <p:nvPr/>
+        </p:nvSpPr>
+        <p:spPr>
+          <a:xfrm>
+            <a:off x="10533888" y="8554212"/>
+            <a:ext cx="1874519" cy="118872"/>
+          </a:xfrm>
+          <a:prstGeom prst="rect">
+            <a:avLst/>
+          </a:prstGeom>
+          <a:noFill/>
+          <a:ln>
+            <a:noFill/>
+          </a:ln>
+        </p:spPr>
+        <p:txBody>
+          <a:bodyPr wrap="square" lIns="0" tIns="0" rIns="0" bIns="0" rtlCol="0" anchor="ctr"/>
+          <a:lstStyle/>
+          <a:p>
+            <a:pPr marL="0" indent="0">
+              <a:buNone/>
+            </a:pPr>
+            <a:r>
+              <a:rPr sz="640">
+                <a:solidFill>
+                  <a:srgbClr val="1F2937"/>
+                </a:solidFill>
+                <a:latin typeface="Arial"/>
+              </a:rPr>
+              <a:t>TWY EDGE / PAVEMENT (INDIC. 23 m)</a:t>
+            </a:r>
+            <a:endParaRPr lang="en-US" sz="740" dirty="0"/>
+          </a:p>
+        </p:txBody>
+      </p:sp>
+      <p:sp>
+        <p:nvSpPr>
+          <p:cNvPr id="169" name="Legend 169"/>
+          <p:cNvSpPr/>
+          <p:nvPr/>
+        </p:nvSpPr>
+        <p:spPr>
+          <a:xfrm>
+            <a:off x="12454128" y="6414516"/>
+            <a:ext cx="2313431" cy="237744"/>
+          </a:xfrm>
+          <a:prstGeom prst="rect">
+            <a:avLst/>
+          </a:prstGeom>
+          <a:noFill/>
+          <a:ln>
+            <a:noFill/>
+          </a:ln>
+        </p:spPr>
+        <p:txBody>
+          <a:bodyPr wrap="square" lIns="0" tIns="0" rIns="0" bIns="0" rtlCol="0" anchor="ctr"/>
+          <a:lstStyle/>
+          <a:p>
+            <a:pPr marL="0" indent="0">
+              <a:buNone/>
+            </a:pPr>
+            <a:r>
+              <a:rPr sz="660" b="1">
+                <a:solidFill>
+                  <a:srgbClr val="1E2761"/>
+                </a:solidFill>
+                <a:latin typeface="Arial"/>
+              </a:rPr>
+              <a:t>ASSET KEY (AS-BUILT LABEL PREFIX)</a:t>
+            </a:r>
+            <a:endParaRPr lang="en-US" sz="740" dirty="0"/>
+          </a:p>
+        </p:txBody>
+      </p:sp>
+      <p:sp>
+        <p:nvSpPr>
+          <p:cNvPr id="170" name="Legend 170"/>
+          <p:cNvSpPr/>
+          <p:nvPr/>
+        </p:nvSpPr>
+        <p:spPr>
+          <a:xfrm>
+            <a:off x="12682728" y="6592824"/>
+            <a:ext cx="2084831" cy="118872"/>
+          </a:xfrm>
+          <a:prstGeom prst="rect">
+            <a:avLst/>
+          </a:prstGeom>
+          <a:noFill/>
+          <a:ln>
+            <a:noFill/>
+          </a:ln>
+        </p:spPr>
+        <p:txBody>
+          <a:bodyPr wrap="square" lIns="0" tIns="0" rIns="0" bIns="0" rtlCol="0" anchor="ctr"/>
+          <a:lstStyle/>
+          <a:p>
+            <a:pPr marL="0" indent="0">
+              <a:buNone/>
+            </a:pPr>
+            <a:r>
+              <a:rPr sz="600">
+                <a:solidFill>
+                  <a:srgbClr val="1F2937"/>
+                </a:solidFill>
+                <a:latin typeface="Arial"/>
+              </a:rPr>
+              <a:t>TCCECH  —  Taxiway centreline light  ×9</a:t>
+            </a:r>
+            <a:endParaRPr lang="en-US" sz="740" dirty="0"/>
+          </a:p>
+        </p:txBody>
+      </p:sp>
+      <p:sp>
+        <p:nvSpPr>
+          <p:cNvPr id="171" name="Legend 171"/>
+          <p:cNvSpPr/>
+          <p:nvPr/>
+        </p:nvSpPr>
+        <p:spPr>
+          <a:xfrm>
+            <a:off x="12682728" y="6771132"/>
+            <a:ext cx="2084831" cy="118872"/>
+          </a:xfrm>
+          <a:prstGeom prst="rect">
+            <a:avLst/>
+          </a:prstGeom>
+          <a:noFill/>
+          <a:ln>
+            <a:noFill/>
+          </a:ln>
+        </p:spPr>
+        <p:txBody>
+          <a:bodyPr wrap="square" lIns="0" tIns="0" rIns="0" bIns="0" rtlCol="0" anchor="ctr"/>
+          <a:lstStyle/>
+          <a:p>
+            <a:pPr marL="0" indent="0">
+              <a:buNone/>
+            </a:pPr>
+            <a:r>
+              <a:rPr sz="600">
+                <a:solidFill>
+                  <a:srgbClr val="1F2937"/>
+                </a:solidFill>
+                <a:latin typeface="Arial"/>
+              </a:rPr>
+              <a:t>HH  —  Handhole  ×2</a:t>
+            </a:r>
+            <a:endParaRPr lang="en-US" sz="740" dirty="0"/>
+          </a:p>
+        </p:txBody>
+      </p:sp>
+      <p:sp>
+        <p:nvSpPr>
+          <p:cNvPr id="172" name="Legend 172"/>
+          <p:cNvSpPr/>
+          <p:nvPr/>
+        </p:nvSpPr>
+        <p:spPr>
+          <a:xfrm>
+            <a:off x="12682728" y="6949440"/>
+            <a:ext cx="2084831" cy="118872"/>
+          </a:xfrm>
+          <a:prstGeom prst="rect">
+            <a:avLst/>
+          </a:prstGeom>
+          <a:noFill/>
+          <a:ln>
+            <a:noFill/>
+          </a:ln>
+        </p:spPr>
+        <p:txBody>
+          <a:bodyPr wrap="square" lIns="0" tIns="0" rIns="0" bIns="0" rtlCol="0" anchor="ctr"/>
+          <a:lstStyle/>
+          <a:p>
+            <a:pPr marL="0" indent="0">
+              <a:buNone/>
+            </a:pPr>
+            <a:r>
+              <a:rPr sz="600">
+                <a:solidFill>
+                  <a:srgbClr val="1F2937"/>
+                </a:solidFill>
+                <a:latin typeface="Arial"/>
+              </a:rPr>
+              <a:t>P2  —  Civil pit (transformer handhole)  ×1</a:t>
+            </a:r>
+            <a:endParaRPr lang="en-US" sz="740" dirty="0"/>
+          </a:p>
+        </p:txBody>
+      </p:sp>
+      <p:sp>
+        <p:nvSpPr>
+          <p:cNvPr id="173" name="Legend 173"/>
+          <p:cNvSpPr/>
+          <p:nvPr/>
+        </p:nvSpPr>
+        <p:spPr>
+          <a:xfrm>
+            <a:off x="12682728" y="7127748"/>
+            <a:ext cx="2084831" cy="118872"/>
+          </a:xfrm>
+          <a:prstGeom prst="rect">
+            <a:avLst/>
+          </a:prstGeom>
+          <a:noFill/>
+          <a:ln>
+            <a:noFill/>
+          </a:ln>
+        </p:spPr>
+        <p:txBody>
+          <a:bodyPr wrap="square" lIns="0" tIns="0" rIns="0" bIns="0" rtlCol="0" anchor="ctr"/>
+          <a:lstStyle/>
+          <a:p>
+            <a:pPr marL="0" indent="0">
+              <a:buNone/>
+            </a:pPr>
+            <a:r>
+              <a:rPr sz="600">
+                <a:solidFill>
+                  <a:srgbClr val="1F2937"/>
+                </a:solidFill>
+                <a:latin typeface="Arial"/>
+              </a:rPr>
+              <a:t>RRM  —  Runway guard light / RRM  ×5</a:t>
+            </a:r>
+            <a:endParaRPr lang="en-US" sz="740" dirty="0"/>
+          </a:p>
+        </p:txBody>
+      </p:sp>
+      <p:sp>
+        <p:nvSpPr>
+          <p:cNvPr id="174" name="Legend 174"/>
+          <p:cNvSpPr/>
+          <p:nvPr/>
+        </p:nvSpPr>
+        <p:spPr>
+          <a:xfrm>
+            <a:off x="12682728" y="7306056"/>
+            <a:ext cx="2084831" cy="118872"/>
+          </a:xfrm>
+          <a:prstGeom prst="rect">
+            <a:avLst/>
+          </a:prstGeom>
+          <a:noFill/>
+          <a:ln>
+            <a:noFill/>
+          </a:ln>
+        </p:spPr>
+        <p:txBody>
+          <a:bodyPr wrap="square" lIns="0" tIns="0" rIns="0" bIns="0" rtlCol="0" anchor="ctr"/>
+          <a:lstStyle/>
+          <a:p>
+            <a:pPr marL="0" indent="0">
+              <a:buNone/>
+            </a:pPr>
+            <a:r>
+              <a:rPr sz="600">
+                <a:solidFill>
+                  <a:srgbClr val="1F2937"/>
+                </a:solidFill>
+                <a:latin typeface="Arial"/>
+              </a:rPr>
+              <a:t>X_CV_STH_PITS  —  Civil pit / transformer HH  ×1</a:t>
+            </a:r>
+            <a:endParaRPr lang="en-US" sz="740" dirty="0"/>
+          </a:p>
+        </p:txBody>
+      </p:sp>
     </p:spTree>
     <p:extLst>
       <p:ext uri="{BB962C8B-B14F-4D97-AF65-F5344CB8AC3E}">
@@ -27105,6 +28258,17 @@
               <a:t>6. Rev P07: every asset on this sheet re-marked directly from field sheet Second_milling_area rev _1 (1st table) — outer ring from the Secondary-cable / Shallow-base columns, inner disc from Duct / Sawcut. Assets not listed on the field sheet are shown grey with no action assumed.</a:t>
             </a:r>
           </a:p>
+          <a:p>
+            <a:r>
+              <a:rPr sz="680">
+                <a:solidFill>
+                  <a:srgbClr val="5F6368"/>
+                </a:solidFill>
+                <a:latin typeface="Arial"/>
+              </a:rPr>
+              <a:t>7. Asset key: label prefix to as-built class, from the AGL asset survey checked against the AGL duct-layout CAD. Civil items (HH / MH / pits / RRM) plot about 2.1 m from the surveyed insertion point — set out from survey, not from this sheet. A pit prefix can cover more than one civil class (manhole, transformer handhole, earthing); confirm the individual pit before works.</a:t>
+            </a:r>
+          </a:p>
         </p:txBody>
       </p:sp>
       <p:sp>
@@ -27116,7 +28280,7 @@
         <p:spPr>
           <a:xfrm>
             <a:off x="10104120" y="6353251"/>
-            <a:ext cx="4709160" cy="3145536"/>
+            <a:ext cx="4709160" cy="3236976"/>
           </a:xfrm>
           <a:prstGeom prst="rect">
             <a:avLst/>
@@ -27136,781 +28300,6 @@
           <a:lstStyle/>
           <a:p>
             <a:endParaRPr lang="en-US"/>
-          </a:p>
-        </p:txBody>
-      </p:sp>
-      <p:sp>
-        <p:nvSpPr>
-          <p:cNvPr id="316" name="Text 314"/>
-          <p:cNvSpPr/>
-          <p:nvPr/>
-        </p:nvSpPr>
-        <p:spPr>
-          <a:xfrm>
-            <a:off x="10241280" y="6426403"/>
-            <a:ext cx="4434840" cy="219456"/>
-          </a:xfrm>
-          <a:prstGeom prst="rect">
-            <a:avLst/>
-          </a:prstGeom>
-          <a:noFill/>
-          <a:ln>
-            <a:noFill/>
-          </a:ln>
-        </p:spPr>
-        <p:txBody>
-          <a:bodyPr wrap="square" lIns="0" tIns="0" rIns="0" bIns="0" rtlCol="0" anchor="ctr"/>
-          <a:lstStyle/>
-          <a:p>
-            <a:pPr marL="0" indent="0">
-              <a:buNone/>
-            </a:pPr>
-            <a:r>
-              <a:rPr lang="en-US" sz="950" b="1" dirty="0">
-                <a:solidFill>
-                  <a:srgbClr val="1E2761"/>
-                </a:solidFill>
-                <a:latin typeface="Arial" pitchFamily="34" charset="0"/>
-                <a:ea typeface="Arial" pitchFamily="34" charset="-122"/>
-                <a:cs typeface="Arial" pitchFamily="34" charset="-120"/>
-              </a:rPr>
-              <a:t>LEGEND — WORKS ACTIONS (THIS SHEET)</a:t>
-            </a:r>
-            <a:endParaRPr lang="en-US" sz="950" dirty="0"/>
-          </a:p>
-        </p:txBody>
-      </p:sp>
-      <p:sp>
-        <p:nvSpPr>
-          <p:cNvPr id="317" name="Shape 315"/>
-          <p:cNvSpPr/>
-          <p:nvPr/>
-        </p:nvSpPr>
-        <p:spPr>
-          <a:xfrm>
-            <a:off x="10305288" y="6751015"/>
-            <a:ext cx="192024" cy="192024"/>
-          </a:xfrm>
-          <a:prstGeom prst="ellipse">
-            <a:avLst/>
-          </a:prstGeom>
-          <a:ln w="28575">
-            <a:solidFill>
-              <a:srgbClr val="F9AB00"/>
-            </a:solidFill>
-            <a:prstDash val="solid"/>
-          </a:ln>
-        </p:spPr>
-        <p:txBody>
-          <a:bodyPr/>
-          <a:lstStyle/>
-          <a:p>
-            <a:endParaRPr lang="en-US"/>
-          </a:p>
-        </p:txBody>
-      </p:sp>
-      <p:sp>
-        <p:nvSpPr>
-          <p:cNvPr id="318" name="Shape 316"/>
-          <p:cNvSpPr/>
-          <p:nvPr/>
-        </p:nvSpPr>
-        <p:spPr>
-          <a:xfrm>
-            <a:off x="10351008" y="6796735"/>
-            <a:ext cx="100584" cy="100584"/>
-          </a:xfrm>
-          <a:prstGeom prst="ellipse">
-            <a:avLst/>
-          </a:prstGeom>
-          <a:solidFill>
-            <a:srgbClr val="E8710A"/>
-          </a:solidFill>
-          <a:ln w="6350">
-            <a:solidFill>
-              <a:srgbClr val="E8710A"/>
-            </a:solidFill>
-            <a:prstDash val="solid"/>
-          </a:ln>
-        </p:spPr>
-        <p:txBody>
-          <a:bodyPr/>
-          <a:lstStyle/>
-          <a:p>
-            <a:endParaRPr lang="en-US"/>
-          </a:p>
-        </p:txBody>
-      </p:sp>
-      <p:sp>
-        <p:nvSpPr>
-          <p:cNvPr id="319" name="Text 317"/>
-          <p:cNvSpPr/>
-          <p:nvPr/>
-        </p:nvSpPr>
-        <p:spPr>
-          <a:xfrm>
-            <a:off x="10616184" y="6737299"/>
-            <a:ext cx="4050792" cy="237744"/>
-          </a:xfrm>
-          <a:prstGeom prst="rect">
-            <a:avLst/>
-          </a:prstGeom>
-          <a:noFill/>
-          <a:ln>
-            <a:noFill/>
-          </a:ln>
-        </p:spPr>
-        <p:txBody>
-          <a:bodyPr wrap="square" lIns="0" tIns="0" rIns="0" bIns="0" rtlCol="0" anchor="ctr"/>
-          <a:lstStyle/>
-          <a:p>
-            <a:pPr marL="0" indent="0">
-              <a:buNone/>
-            </a:pPr>
-            <a:r>
-              <a:rPr lang="en-US" sz="740" dirty="0">
-                <a:solidFill>
-                  <a:srgbClr val="1F2937"/>
-                </a:solidFill>
-                <a:latin typeface="Arial" pitchFamily="34" charset="0"/>
-                <a:ea typeface="Arial" pitchFamily="34" charset="-122"/>
-                <a:cs typeface="Arial" pitchFamily="34" charset="-120"/>
-              </a:rPr>
-              <a:t>BASE RETAINED + DUMMY PLATE + NEW CABLE (SAWCUT) — outer amber / inner orange</a:t>
-            </a:r>
-            <a:endParaRPr lang="en-US" sz="740" dirty="0"/>
-          </a:p>
-        </p:txBody>
-      </p:sp>
-      <p:sp>
-        <p:nvSpPr>
-          <p:cNvPr id="320" name="Shape 318"/>
-          <p:cNvSpPr/>
-          <p:nvPr/>
-        </p:nvSpPr>
-        <p:spPr>
-          <a:xfrm>
-            <a:off x="10305288" y="7025335"/>
-            <a:ext cx="192024" cy="192024"/>
-          </a:xfrm>
-          <a:prstGeom prst="ellipse">
-            <a:avLst/>
-          </a:prstGeom>
-          <a:ln w="28575">
-            <a:solidFill>
-              <a:srgbClr val="0055CC"/>
-            </a:solidFill>
-            <a:prstDash val="solid"/>
-          </a:ln>
-        </p:spPr>
-        <p:txBody>
-          <a:bodyPr/>
-          <a:lstStyle/>
-          <a:p>
-            <a:endParaRPr lang="en-US"/>
-          </a:p>
-        </p:txBody>
-      </p:sp>
-      <p:sp>
-        <p:nvSpPr>
-          <p:cNvPr id="321" name="Shape 319"/>
-          <p:cNvSpPr/>
-          <p:nvPr/>
-        </p:nvSpPr>
-        <p:spPr>
-          <a:xfrm>
-            <a:off x="10351008" y="7071055"/>
-            <a:ext cx="100584" cy="100584"/>
-          </a:xfrm>
-          <a:prstGeom prst="ellipse">
-            <a:avLst/>
-          </a:prstGeom>
-          <a:solidFill>
-            <a:srgbClr val="1E8E3E"/>
-          </a:solidFill>
-          <a:ln w="6350">
-            <a:solidFill>
-              <a:srgbClr val="1E8E3E"/>
-            </a:solidFill>
-            <a:prstDash val="solid"/>
-          </a:ln>
-        </p:spPr>
-        <p:txBody>
-          <a:bodyPr/>
-          <a:lstStyle/>
-          <a:p>
-            <a:endParaRPr lang="en-US"/>
-          </a:p>
-        </p:txBody>
-      </p:sp>
-      <p:sp>
-        <p:nvSpPr>
-          <p:cNvPr id="322" name="Text 320"/>
-          <p:cNvSpPr/>
-          <p:nvPr/>
-        </p:nvSpPr>
-        <p:spPr>
-          <a:xfrm>
-            <a:off x="10616184" y="7011619"/>
-            <a:ext cx="4050792" cy="237744"/>
-          </a:xfrm>
-          <a:prstGeom prst="rect">
-            <a:avLst/>
-          </a:prstGeom>
-          <a:noFill/>
-          <a:ln>
-            <a:noFill/>
-          </a:ln>
-        </p:spPr>
-        <p:txBody>
-          <a:bodyPr wrap="square" lIns="0" tIns="0" rIns="0" bIns="0" rtlCol="0" anchor="ctr"/>
-          <a:lstStyle/>
-          <a:p>
-            <a:pPr marL="0" indent="0">
-              <a:buNone/>
-            </a:pPr>
-            <a:r>
-              <a:rPr lang="en-US" sz="740" dirty="0">
-                <a:solidFill>
-                  <a:srgbClr val="1F2937"/>
-                </a:solidFill>
-                <a:latin typeface="Arial" pitchFamily="34" charset="0"/>
-                <a:ea typeface="Arial" pitchFamily="34" charset="-122"/>
-                <a:cs typeface="Arial" pitchFamily="34" charset="-120"/>
-              </a:rPr>
-              <a:t>NEW SEC. CABLE ONLY (DUCT) — outer blue / inner green</a:t>
-            </a:r>
-            <a:endParaRPr lang="en-US" sz="740" dirty="0"/>
-          </a:p>
-        </p:txBody>
-      </p:sp>
-      <p:sp>
-        <p:nvSpPr>
-          <p:cNvPr id="323" name="Shape 321"/>
-          <p:cNvSpPr/>
-          <p:nvPr/>
-        </p:nvSpPr>
-        <p:spPr>
-          <a:xfrm>
-            <a:off x="10305288" y="7299655"/>
-            <a:ext cx="192024" cy="192024"/>
-          </a:xfrm>
-          <a:prstGeom prst="ellipse">
-            <a:avLst/>
-          </a:prstGeom>
-          <a:ln w="28575">
-            <a:solidFill>
-              <a:srgbClr val="BB00BB"/>
-            </a:solidFill>
-            <a:prstDash val="solid"/>
-          </a:ln>
-        </p:spPr>
-        <p:txBody>
-          <a:bodyPr/>
-          <a:lstStyle/>
-          <a:p>
-            <a:endParaRPr lang="en-US"/>
-          </a:p>
-        </p:txBody>
-      </p:sp>
-      <p:sp>
-        <p:nvSpPr>
-          <p:cNvPr id="324" name="Shape 322"/>
-          <p:cNvSpPr/>
-          <p:nvPr/>
-        </p:nvSpPr>
-        <p:spPr>
-          <a:xfrm>
-            <a:off x="10351008" y="7345375"/>
-            <a:ext cx="100584" cy="100584"/>
-          </a:xfrm>
-          <a:prstGeom prst="ellipse">
-            <a:avLst/>
-          </a:prstGeom>
-          <a:solidFill>
-            <a:srgbClr val="FFFFFF"/>
-          </a:solidFill>
-          <a:ln w="6350">
-            <a:solidFill>
-              <a:srgbClr val="FFFFFF"/>
-            </a:solidFill>
-            <a:prstDash val="solid"/>
-          </a:ln>
-        </p:spPr>
-        <p:txBody>
-          <a:bodyPr/>
-          <a:lstStyle/>
-          <a:p>
-            <a:endParaRPr lang="en-US"/>
-          </a:p>
-        </p:txBody>
-      </p:sp>
-      <p:sp>
-        <p:nvSpPr>
-          <p:cNvPr id="325" name="Text 323"/>
-          <p:cNvSpPr/>
-          <p:nvPr/>
-        </p:nvSpPr>
-        <p:spPr>
-          <a:xfrm>
-            <a:off x="10616184" y="7285939"/>
-            <a:ext cx="4050792" cy="237744"/>
-          </a:xfrm>
-          <a:prstGeom prst="rect">
-            <a:avLst/>
-          </a:prstGeom>
-          <a:noFill/>
-          <a:ln>
-            <a:noFill/>
-          </a:ln>
-        </p:spPr>
-        <p:txBody>
-          <a:bodyPr wrap="square" lIns="0" tIns="0" rIns="0" bIns="0" rtlCol="0" anchor="ctr"/>
-          <a:lstStyle/>
-          <a:p>
-            <a:pPr marL="0" indent="0">
-              <a:buNone/>
-            </a:pPr>
-            <a:r>
-              <a:rPr lang="en-US" sz="740" dirty="0">
-                <a:solidFill>
-                  <a:srgbClr val="1F2937"/>
-                </a:solidFill>
-                <a:latin typeface="Arial" pitchFamily="34" charset="0"/>
-                <a:ea typeface="Arial" pitchFamily="34" charset="-122"/>
-                <a:cs typeface="Arial" pitchFamily="34" charset="-120"/>
-              </a:rPr>
-              <a:t>RRM — REMOVE / PROTECT / RE-FIX (magenta / white)</a:t>
-            </a:r>
-            <a:endParaRPr lang="en-US" sz="740" dirty="0"/>
-          </a:p>
-        </p:txBody>
-      </p:sp>
-      <p:sp>
-        <p:nvSpPr>
-          <p:cNvPr id="326" name="Shape 324"/>
-          <p:cNvSpPr/>
-          <p:nvPr/>
-        </p:nvSpPr>
-        <p:spPr>
-          <a:xfrm>
-            <a:off x="10351008" y="7624267"/>
-            <a:ext cx="91440" cy="91440"/>
-          </a:xfrm>
-          <a:prstGeom prst="ellipse">
-            <a:avLst/>
-          </a:prstGeom>
-          <a:solidFill>
-            <a:srgbClr val="12A5B8"/>
-          </a:solidFill>
-          <a:ln w="6350">
-            <a:solidFill>
-              <a:srgbClr val="12A5B8"/>
-            </a:solidFill>
-            <a:prstDash val="solid"/>
-          </a:ln>
-        </p:spPr>
-        <p:txBody>
-          <a:bodyPr/>
-          <a:lstStyle/>
-          <a:p>
-            <a:endParaRPr lang="en-US"/>
-          </a:p>
-        </p:txBody>
-      </p:sp>
-      <p:sp>
-        <p:nvSpPr>
-          <p:cNvPr id="327" name="Text 325"/>
-          <p:cNvSpPr/>
-          <p:nvPr/>
-        </p:nvSpPr>
-        <p:spPr>
-          <a:xfrm>
-            <a:off x="10616184" y="7560259"/>
-            <a:ext cx="4050792" cy="237744"/>
-          </a:xfrm>
-          <a:prstGeom prst="rect">
-            <a:avLst/>
-          </a:prstGeom>
-          <a:noFill/>
-          <a:ln>
-            <a:noFill/>
-          </a:ln>
-        </p:spPr>
-        <p:txBody>
-          <a:bodyPr wrap="square" lIns="0" tIns="0" rIns="0" bIns="0" rtlCol="0" anchor="ctr"/>
-          <a:lstStyle/>
-          <a:p>
-            <a:pPr marL="0" indent="0">
-              <a:buNone/>
-            </a:pPr>
-            <a:r>
-              <a:rPr lang="en-US" sz="740" dirty="0">
-                <a:solidFill>
-                  <a:srgbClr val="1F2937"/>
-                </a:solidFill>
-                <a:latin typeface="Arial" pitchFamily="34" charset="0"/>
-                <a:ea typeface="Arial" pitchFamily="34" charset="-122"/>
-                <a:cs typeface="Arial" pitchFamily="34" charset="-120"/>
-              </a:rPr>
-              <a:t>EXISTING AGL ASSET (AS-BUILT)</a:t>
-            </a:r>
-            <a:endParaRPr lang="en-US" sz="740" dirty="0"/>
-          </a:p>
-        </p:txBody>
-      </p:sp>
-      <p:sp>
-        <p:nvSpPr>
-          <p:cNvPr id="328" name="Shape 326"/>
-          <p:cNvSpPr/>
-          <p:nvPr/>
-        </p:nvSpPr>
-        <p:spPr>
-          <a:xfrm>
-            <a:off x="10268712" y="7944307"/>
-            <a:ext cx="274320" cy="914"/>
-          </a:xfrm>
-          <a:prstGeom prst="line">
-            <a:avLst/>
-          </a:prstGeom>
-          <a:noFill/>
-          <a:ln w="19050">
-            <a:solidFill>
-              <a:srgbClr val="BB00BB"/>
-            </a:solidFill>
-            <a:prstDash val="dash"/>
-          </a:ln>
-        </p:spPr>
-        <p:txBody>
-          <a:bodyPr/>
-          <a:lstStyle/>
-          <a:p>
-            <a:endParaRPr lang="en-US"/>
-          </a:p>
-        </p:txBody>
-      </p:sp>
-      <p:sp>
-        <p:nvSpPr>
-          <p:cNvPr id="329" name="Text 327"/>
-          <p:cNvSpPr/>
-          <p:nvPr/>
-        </p:nvSpPr>
-        <p:spPr>
-          <a:xfrm>
-            <a:off x="10616184" y="7834579"/>
-            <a:ext cx="4050792" cy="237744"/>
-          </a:xfrm>
-          <a:prstGeom prst="rect">
-            <a:avLst/>
-          </a:prstGeom>
-          <a:noFill/>
-          <a:ln>
-            <a:noFill/>
-          </a:ln>
-        </p:spPr>
-        <p:txBody>
-          <a:bodyPr wrap="square" lIns="0" tIns="0" rIns="0" bIns="0" rtlCol="0" anchor="ctr"/>
-          <a:lstStyle/>
-          <a:p>
-            <a:pPr marL="0" indent="0">
-              <a:buNone/>
-            </a:pPr>
-            <a:r>
-              <a:rPr lang="en-US" sz="740" dirty="0">
-                <a:solidFill>
-                  <a:srgbClr val="1F2937"/>
-                </a:solidFill>
-                <a:latin typeface="Arial" pitchFamily="34" charset="0"/>
-                <a:ea typeface="Arial" pitchFamily="34" charset="-122"/>
-                <a:cs typeface="Arial" pitchFamily="34" charset="-120"/>
-              </a:rPr>
-              <a:t>SECONDARY DUCT RUN CROSSING CUT (INDICATIVE)</a:t>
-            </a:r>
-            <a:endParaRPr lang="en-US" sz="740" dirty="0"/>
-          </a:p>
-        </p:txBody>
-      </p:sp>
-      <p:sp>
-        <p:nvSpPr>
-          <p:cNvPr id="330" name="Shape 328"/>
-          <p:cNvSpPr/>
-          <p:nvPr/>
-        </p:nvSpPr>
-        <p:spPr>
-          <a:xfrm>
-            <a:off x="10268712" y="8218627"/>
-            <a:ext cx="274320" cy="914"/>
-          </a:xfrm>
-          <a:prstGeom prst="line">
-            <a:avLst/>
-          </a:prstGeom>
-          <a:noFill/>
-          <a:ln w="28575">
-            <a:solidFill>
-              <a:srgbClr val="CC0000"/>
-            </a:solidFill>
-            <a:prstDash val="solid"/>
-          </a:ln>
-        </p:spPr>
-        <p:txBody>
-          <a:bodyPr/>
-          <a:lstStyle/>
-          <a:p>
-            <a:endParaRPr lang="en-US"/>
-          </a:p>
-        </p:txBody>
-      </p:sp>
-      <p:sp>
-        <p:nvSpPr>
-          <p:cNvPr id="331" name="Text 329"/>
-          <p:cNvSpPr/>
-          <p:nvPr/>
-        </p:nvSpPr>
-        <p:spPr>
-          <a:xfrm>
-            <a:off x="10616184" y="8108899"/>
-            <a:ext cx="4050792" cy="237744"/>
-          </a:xfrm>
-          <a:prstGeom prst="rect">
-            <a:avLst/>
-          </a:prstGeom>
-          <a:noFill/>
-          <a:ln>
-            <a:noFill/>
-          </a:ln>
-        </p:spPr>
-        <p:txBody>
-          <a:bodyPr wrap="square" lIns="0" tIns="0" rIns="0" bIns="0" rtlCol="0" anchor="ctr"/>
-          <a:lstStyle/>
-          <a:p>
-            <a:pPr marL="0" indent="0">
-              <a:buNone/>
-            </a:pPr>
-            <a:r>
-              <a:rPr lang="en-US" sz="740" dirty="0">
-                <a:solidFill>
-                  <a:srgbClr val="1F2937"/>
-                </a:solidFill>
-                <a:latin typeface="Arial" pitchFamily="34" charset="0"/>
-                <a:ea typeface="Arial" pitchFamily="34" charset="-122"/>
-                <a:cs typeface="Arial" pitchFamily="34" charset="-120"/>
-              </a:rPr>
-              <a:t>AGL WORKS DEMARCATION (GOVERNING)</a:t>
-            </a:r>
-            <a:endParaRPr lang="en-US" sz="740" dirty="0"/>
-          </a:p>
-        </p:txBody>
-      </p:sp>
-      <p:sp>
-        <p:nvSpPr>
-          <p:cNvPr id="332" name="Shape 330"/>
-          <p:cNvSpPr/>
-          <p:nvPr/>
-        </p:nvSpPr>
-        <p:spPr>
-          <a:xfrm>
-            <a:off x="10268712" y="8492947"/>
-            <a:ext cx="274320" cy="914"/>
-          </a:xfrm>
-          <a:prstGeom prst="line">
-            <a:avLst/>
-          </a:prstGeom>
-          <a:noFill/>
-          <a:ln w="19050">
-            <a:solidFill>
-              <a:srgbClr val="C7A400"/>
-            </a:solidFill>
-            <a:prstDash val="dashDot"/>
-          </a:ln>
-        </p:spPr>
-        <p:txBody>
-          <a:bodyPr/>
-          <a:lstStyle/>
-          <a:p>
-            <a:endParaRPr lang="en-US"/>
-          </a:p>
-        </p:txBody>
-      </p:sp>
-      <p:sp>
-        <p:nvSpPr>
-          <p:cNvPr id="333" name="Text 331"/>
-          <p:cNvSpPr/>
-          <p:nvPr/>
-        </p:nvSpPr>
-        <p:spPr>
-          <a:xfrm>
-            <a:off x="10616184" y="8383219"/>
-            <a:ext cx="4050792" cy="237744"/>
-          </a:xfrm>
-          <a:prstGeom prst="rect">
-            <a:avLst/>
-          </a:prstGeom>
-          <a:noFill/>
-          <a:ln>
-            <a:noFill/>
-          </a:ln>
-        </p:spPr>
-        <p:txBody>
-          <a:bodyPr wrap="square" lIns="0" tIns="0" rIns="0" bIns="0" rtlCol="0" anchor="ctr"/>
-          <a:lstStyle/>
-          <a:p>
-            <a:pPr marL="0" indent="0">
-              <a:buNone/>
-            </a:pPr>
-            <a:r>
-              <a:rPr lang="en-US" sz="740" dirty="0">
-                <a:solidFill>
-                  <a:srgbClr val="1F2937"/>
-                </a:solidFill>
-                <a:latin typeface="Arial" pitchFamily="34" charset="0"/>
-                <a:ea typeface="Arial" pitchFamily="34" charset="-122"/>
-                <a:cs typeface="Arial" pitchFamily="34" charset="-120"/>
-              </a:rPr>
-              <a:t>TAXIWAY CENTERLINE (AS-BUILT, THROUGH TCC FITTINGS)</a:t>
-            </a:r>
-            <a:endParaRPr lang="en-US" sz="740" dirty="0"/>
-          </a:p>
-        </p:txBody>
-      </p:sp>
-      <p:sp>
-        <p:nvSpPr>
-          <p:cNvPr id="334" name="Shape 332"/>
-          <p:cNvSpPr/>
-          <p:nvPr/>
-        </p:nvSpPr>
-        <p:spPr>
-          <a:xfrm>
-            <a:off x="10268712" y="8767267"/>
-            <a:ext cx="274320" cy="914"/>
-          </a:xfrm>
-          <a:prstGeom prst="line">
-            <a:avLst/>
-          </a:prstGeom>
-          <a:noFill/>
-          <a:ln w="28575">
-            <a:solidFill>
-              <a:srgbClr val="8B0000"/>
-            </a:solidFill>
-            <a:prstDash val="solid"/>
-          </a:ln>
-        </p:spPr>
-        <p:txBody>
-          <a:bodyPr/>
-          <a:lstStyle/>
-          <a:p>
-            <a:endParaRPr lang="en-US"/>
-          </a:p>
-        </p:txBody>
-      </p:sp>
-      <p:sp>
-        <p:nvSpPr>
-          <p:cNvPr id="335" name="Text 333"/>
-          <p:cNvSpPr/>
-          <p:nvPr/>
-        </p:nvSpPr>
-        <p:spPr>
-          <a:xfrm>
-            <a:off x="10616184" y="8657539"/>
-            <a:ext cx="4050792" cy="237744"/>
-          </a:xfrm>
-          <a:prstGeom prst="rect">
-            <a:avLst/>
-          </a:prstGeom>
-          <a:noFill/>
-          <a:ln>
-            <a:noFill/>
-          </a:ln>
-        </p:spPr>
-        <p:txBody>
-          <a:bodyPr wrap="square" lIns="0" tIns="0" rIns="0" bIns="0" rtlCol="0" anchor="ctr"/>
-          <a:lstStyle/>
-          <a:p>
-            <a:pPr marL="0" indent="0">
-              <a:buNone/>
-            </a:pPr>
-            <a:r>
-              <a:rPr lang="en-US" sz="740" dirty="0">
-                <a:solidFill>
-                  <a:srgbClr val="1F2937"/>
-                </a:solidFill>
-                <a:latin typeface="Arial" pitchFamily="34" charset="0"/>
-                <a:ea typeface="Arial" pitchFamily="34" charset="-122"/>
-                <a:cs typeface="Arial" pitchFamily="34" charset="-120"/>
-              </a:rPr>
-              <a:t>STOP BAR (AS-BUILT, THROUGH SBC FITTINGS)</a:t>
-            </a:r>
-            <a:endParaRPr lang="en-US" sz="740" dirty="0"/>
-          </a:p>
-        </p:txBody>
-      </p:sp>
-      <p:sp>
-        <p:nvSpPr>
-          <p:cNvPr id="336" name="Shape 334"/>
-          <p:cNvSpPr/>
-          <p:nvPr/>
-        </p:nvSpPr>
-        <p:spPr>
-          <a:xfrm>
-            <a:off x="10268712" y="9041587"/>
-            <a:ext cx="274320" cy="914"/>
-          </a:xfrm>
-          <a:prstGeom prst="line">
-            <a:avLst/>
-          </a:prstGeom>
-          <a:noFill/>
-          <a:ln w="12700">
-            <a:solidFill>
-              <a:srgbClr val="7A8288"/>
-            </a:solidFill>
-            <a:prstDash val="solid"/>
-          </a:ln>
-        </p:spPr>
-        <p:txBody>
-          <a:bodyPr/>
-          <a:lstStyle/>
-          <a:p>
-            <a:endParaRPr lang="en-US"/>
-          </a:p>
-        </p:txBody>
-      </p:sp>
-      <p:sp>
-        <p:nvSpPr>
-          <p:cNvPr id="337" name="Text 335"/>
-          <p:cNvSpPr/>
-          <p:nvPr/>
-        </p:nvSpPr>
-        <p:spPr>
-          <a:xfrm>
-            <a:off x="10616184" y="8931859"/>
-            <a:ext cx="4050792" cy="237744"/>
-          </a:xfrm>
-          <a:prstGeom prst="rect">
-            <a:avLst/>
-          </a:prstGeom>
-          <a:noFill/>
-          <a:ln>
-            <a:noFill/>
-          </a:ln>
-        </p:spPr>
-        <p:txBody>
-          <a:bodyPr wrap="square" lIns="0" tIns="0" rIns="0" bIns="0" rtlCol="0" anchor="ctr"/>
-          <a:lstStyle/>
-          <a:p>
-            <a:pPr marL="0" indent="0">
-              <a:buNone/>
-            </a:pPr>
-            <a:r>
-              <a:rPr lang="en-US" sz="740" dirty="0">
-                <a:solidFill>
-                  <a:srgbClr val="1F2937"/>
-                </a:solidFill>
-                <a:latin typeface="Arial" pitchFamily="34" charset="0"/>
-                <a:ea typeface="Arial" pitchFamily="34" charset="-122"/>
-                <a:cs typeface="Arial" pitchFamily="34" charset="-120"/>
-              </a:rPr>
-              <a:t>TWY EDGE / PAVEMENT BOUNDARY (INDICATIVE 23 m — CONFIRM ON SITE)</a:t>
-            </a:r>
-            <a:endParaRPr lang="en-US" sz="740" dirty="0"/>
           </a:p>
         </p:txBody>
       </p:sp>
@@ -28088,76 +28477,6 @@
           </a:p>
         </p:txBody>
       </p:sp>
-      <p:sp>
-        <p:nvSpPr>
-          <p:cNvPr id="344" name="DUMMY PLATE MARKER"/>
-          <p:cNvSpPr/>
-          <p:nvPr/>
-        </p:nvSpPr>
-        <p:spPr>
-          <a:xfrm>
-            <a:off x="10305288" y="9219895"/>
-            <a:ext cx="192024" cy="192024"/>
-          </a:xfrm>
-          <a:prstGeom prst="rect">
-            <a:avLst/>
-          </a:prstGeom>
-          <a:noFill/>
-          <a:ln w="15875">
-            <a:solidFill>
-              <a:srgbClr val="000000"/>
-            </a:solidFill>
-          </a:ln>
-        </p:spPr>
-        <p:txBody>
-          <a:bodyPr/>
-          <a:lstStyle/>
-          <a:p>
-            <a:endParaRPr lang="en-US"/>
-          </a:p>
-        </p:txBody>
-      </p:sp>
-      <p:sp>
-        <p:nvSpPr>
-          <p:cNvPr id="345" name="Text 335"/>
-          <p:cNvSpPr/>
-          <p:nvPr/>
-        </p:nvSpPr>
-        <p:spPr>
-          <a:xfrm>
-            <a:off x="10616184" y="9206179"/>
-            <a:ext cx="4050792" cy="237744"/>
-          </a:xfrm>
-          <a:prstGeom prst="rect">
-            <a:avLst/>
-          </a:prstGeom>
-          <a:noFill/>
-          <a:ln>
-            <a:noFill/>
-          </a:ln>
-        </p:spPr>
-        <p:txBody>
-          <a:bodyPr wrap="square" lIns="0" tIns="0" rIns="0" bIns="0" rtlCol="0" anchor="ctr"/>
-          <a:lstStyle/>
-          <a:p>
-            <a:pPr marL="0" indent="0">
-              <a:buNone/>
-            </a:pPr>
-            <a:r>
-              <a:rPr lang="en-US" sz="740" dirty="0">
-                <a:solidFill>
-                  <a:srgbClr val="1F2937"/>
-                </a:solidFill>
-                <a:latin typeface="Arial" pitchFamily="34" charset="0"/>
-                <a:ea typeface="Arial" pitchFamily="34" charset="-122"/>
-                <a:cs typeface="Arial" pitchFamily="34" charset="-120"/>
-              </a:rPr>
-              <a:t>FITTING LIFTED, OPENING PROTECTED DURING MILLING — black square</a:t>
-            </a:r>
-            <a:endParaRPr lang="en-US" sz="740" dirty="0"/>
-          </a:p>
-        </p:txBody>
-      </p:sp>
       <p:pic>
         <p:nvPicPr>
           <p:cNvPr id="346" name="Picture 345" descr="image.jpg"/>
@@ -28185,6 +28504,1507 @@
           </a:ln>
         </p:spPr>
       </p:pic>
+      <p:sp>
+        <p:nvSpPr>
+          <p:cNvPr id="347" name="Legend 347"/>
+          <p:cNvSpPr/>
+          <p:nvPr/>
+        </p:nvSpPr>
+        <p:spPr>
+          <a:xfrm>
+            <a:off x="10305288" y="6645859"/>
+            <a:ext cx="2103119" cy="237744"/>
+          </a:xfrm>
+          <a:prstGeom prst="rect">
+            <a:avLst/>
+          </a:prstGeom>
+          <a:noFill/>
+          <a:ln>
+            <a:noFill/>
+          </a:ln>
+        </p:spPr>
+        <p:txBody>
+          <a:bodyPr wrap="square" lIns="0" tIns="0" rIns="0" bIns="0" rtlCol="0" anchor="ctr"/>
+          <a:lstStyle/>
+          <a:p>
+            <a:pPr marL="0" indent="0">
+              <a:buNone/>
+            </a:pPr>
+            <a:r>
+              <a:rPr sz="660" b="1">
+                <a:solidFill>
+                  <a:srgbClr val="1E2761"/>
+                </a:solidFill>
+                <a:latin typeface="Arial"/>
+              </a:rPr>
+              <a:t>WORKS ACTIONS</a:t>
+            </a:r>
+            <a:endParaRPr lang="en-US" sz="740" dirty="0"/>
+          </a:p>
+        </p:txBody>
+      </p:sp>
+      <p:sp>
+        <p:nvSpPr>
+          <p:cNvPr id="348" name="Legend 348"/>
+          <p:cNvSpPr/>
+          <p:nvPr/>
+        </p:nvSpPr>
+        <p:spPr>
+          <a:xfrm>
+            <a:off x="10305288" y="6817309"/>
+            <a:ext cx="192024" cy="192024"/>
+          </a:xfrm>
+          <a:prstGeom prst="ellipse">
+            <a:avLst/>
+          </a:prstGeom>
+          <a:noFill/>
+          <a:ln w="19050">
+            <a:solidFill>
+              <a:srgbClr val="F9AB00"/>
+            </a:solidFill>
+            <a:prstDash val="solid"/>
+          </a:ln>
+        </p:spPr>
+        <p:txBody>
+          <a:bodyPr/>
+          <a:lstStyle/>
+          <a:p>
+            <a:endParaRPr lang="en-US"/>
+          </a:p>
+        </p:txBody>
+      </p:sp>
+      <p:sp>
+        <p:nvSpPr>
+          <p:cNvPr id="349" name="Legend 349"/>
+          <p:cNvSpPr/>
+          <p:nvPr/>
+        </p:nvSpPr>
+        <p:spPr>
+          <a:xfrm>
+            <a:off x="10351008" y="6863029"/>
+            <a:ext cx="100584" cy="100584"/>
+          </a:xfrm>
+          <a:prstGeom prst="ellipse">
+            <a:avLst/>
+          </a:prstGeom>
+          <a:solidFill>
+            <a:srgbClr val="E8710A"/>
+          </a:solidFill>
+          <a:ln w="6350">
+            <a:solidFill>
+              <a:srgbClr val="E8710A"/>
+            </a:solidFill>
+            <a:prstDash val="solid"/>
+          </a:ln>
+        </p:spPr>
+        <p:txBody>
+          <a:bodyPr/>
+          <a:lstStyle/>
+          <a:p>
+            <a:endParaRPr lang="en-US"/>
+          </a:p>
+        </p:txBody>
+      </p:sp>
+      <p:sp>
+        <p:nvSpPr>
+          <p:cNvPr id="350" name="Legend 350"/>
+          <p:cNvSpPr/>
+          <p:nvPr/>
+        </p:nvSpPr>
+        <p:spPr>
+          <a:xfrm>
+            <a:off x="10533888" y="6824167"/>
+            <a:ext cx="1874519" cy="118872"/>
+          </a:xfrm>
+          <a:prstGeom prst="rect">
+            <a:avLst/>
+          </a:prstGeom>
+          <a:noFill/>
+          <a:ln>
+            <a:noFill/>
+          </a:ln>
+        </p:spPr>
+        <p:txBody>
+          <a:bodyPr wrap="square" lIns="0" tIns="0" rIns="0" bIns="0" rtlCol="0" anchor="ctr"/>
+          <a:lstStyle/>
+          <a:p>
+            <a:pPr marL="0" indent="0">
+              <a:buNone/>
+            </a:pPr>
+            <a:r>
+              <a:rPr sz="640">
+                <a:solidFill>
+                  <a:srgbClr val="1F2937"/>
+                </a:solidFill>
+                <a:latin typeface="Arial"/>
+              </a:rPr>
+              <a:t>BASE RETAINED + DUMMY PLATE (SAWCUT)</a:t>
+            </a:r>
+            <a:endParaRPr lang="en-US" sz="740" dirty="0"/>
+          </a:p>
+        </p:txBody>
+      </p:sp>
+      <p:sp>
+        <p:nvSpPr>
+          <p:cNvPr id="351" name="Legend 351"/>
+          <p:cNvSpPr/>
+          <p:nvPr/>
+        </p:nvSpPr>
+        <p:spPr>
+          <a:xfrm>
+            <a:off x="10305288" y="6995617"/>
+            <a:ext cx="192024" cy="192024"/>
+          </a:xfrm>
+          <a:prstGeom prst="ellipse">
+            <a:avLst/>
+          </a:prstGeom>
+          <a:noFill/>
+          <a:ln w="19050">
+            <a:solidFill>
+              <a:srgbClr val="0055CC"/>
+            </a:solidFill>
+            <a:prstDash val="solid"/>
+          </a:ln>
+        </p:spPr>
+        <p:txBody>
+          <a:bodyPr/>
+          <a:lstStyle/>
+          <a:p>
+            <a:endParaRPr lang="en-US"/>
+          </a:p>
+        </p:txBody>
+      </p:sp>
+      <p:sp>
+        <p:nvSpPr>
+          <p:cNvPr id="352" name="Legend 352"/>
+          <p:cNvSpPr/>
+          <p:nvPr/>
+        </p:nvSpPr>
+        <p:spPr>
+          <a:xfrm>
+            <a:off x="10351008" y="7041337"/>
+            <a:ext cx="100584" cy="100584"/>
+          </a:xfrm>
+          <a:prstGeom prst="ellipse">
+            <a:avLst/>
+          </a:prstGeom>
+          <a:solidFill>
+            <a:srgbClr val="1E8E3E"/>
+          </a:solidFill>
+          <a:ln w="6350">
+            <a:solidFill>
+              <a:srgbClr val="1E8E3E"/>
+            </a:solidFill>
+            <a:prstDash val="solid"/>
+          </a:ln>
+        </p:spPr>
+        <p:txBody>
+          <a:bodyPr/>
+          <a:lstStyle/>
+          <a:p>
+            <a:endParaRPr lang="en-US"/>
+          </a:p>
+        </p:txBody>
+      </p:sp>
+      <p:sp>
+        <p:nvSpPr>
+          <p:cNvPr id="353" name="Legend 353"/>
+          <p:cNvSpPr/>
+          <p:nvPr/>
+        </p:nvSpPr>
+        <p:spPr>
+          <a:xfrm>
+            <a:off x="10533888" y="7002475"/>
+            <a:ext cx="1874519" cy="118872"/>
+          </a:xfrm>
+          <a:prstGeom prst="rect">
+            <a:avLst/>
+          </a:prstGeom>
+          <a:noFill/>
+          <a:ln>
+            <a:noFill/>
+          </a:ln>
+        </p:spPr>
+        <p:txBody>
+          <a:bodyPr wrap="square" lIns="0" tIns="0" rIns="0" bIns="0" rtlCol="0" anchor="ctr"/>
+          <a:lstStyle/>
+          <a:p>
+            <a:pPr marL="0" indent="0">
+              <a:buNone/>
+            </a:pPr>
+            <a:r>
+              <a:rPr sz="640">
+                <a:solidFill>
+                  <a:srgbClr val="1F2937"/>
+                </a:solidFill>
+                <a:latin typeface="Arial"/>
+              </a:rPr>
+              <a:t>NEW SEC. CABLE ONLY (DUCT)</a:t>
+            </a:r>
+            <a:endParaRPr lang="en-US" sz="740" dirty="0"/>
+          </a:p>
+        </p:txBody>
+      </p:sp>
+      <p:sp>
+        <p:nvSpPr>
+          <p:cNvPr id="354" name="Legend 354"/>
+          <p:cNvSpPr/>
+          <p:nvPr/>
+        </p:nvSpPr>
+        <p:spPr>
+          <a:xfrm>
+            <a:off x="10305288" y="7173925"/>
+            <a:ext cx="192024" cy="192024"/>
+          </a:xfrm>
+          <a:prstGeom prst="ellipse">
+            <a:avLst/>
+          </a:prstGeom>
+          <a:noFill/>
+          <a:ln w="19050">
+            <a:solidFill>
+              <a:srgbClr val="BB00BB"/>
+            </a:solidFill>
+            <a:prstDash val="solid"/>
+          </a:ln>
+        </p:spPr>
+        <p:txBody>
+          <a:bodyPr/>
+          <a:lstStyle/>
+          <a:p>
+            <a:endParaRPr lang="en-US"/>
+          </a:p>
+        </p:txBody>
+      </p:sp>
+      <p:sp>
+        <p:nvSpPr>
+          <p:cNvPr id="355" name="Legend 355"/>
+          <p:cNvSpPr/>
+          <p:nvPr/>
+        </p:nvSpPr>
+        <p:spPr>
+          <a:xfrm>
+            <a:off x="10351008" y="7219645"/>
+            <a:ext cx="100584" cy="100584"/>
+          </a:xfrm>
+          <a:prstGeom prst="ellipse">
+            <a:avLst/>
+          </a:prstGeom>
+          <a:solidFill>
+            <a:srgbClr val="FFFFFF"/>
+          </a:solidFill>
+          <a:ln w="6350">
+            <a:solidFill>
+              <a:srgbClr val="FFFFFF"/>
+            </a:solidFill>
+            <a:prstDash val="solid"/>
+          </a:ln>
+        </p:spPr>
+        <p:txBody>
+          <a:bodyPr/>
+          <a:lstStyle/>
+          <a:p>
+            <a:endParaRPr lang="en-US"/>
+          </a:p>
+        </p:txBody>
+      </p:sp>
+      <p:sp>
+        <p:nvSpPr>
+          <p:cNvPr id="356" name="Legend 356"/>
+          <p:cNvSpPr/>
+          <p:nvPr/>
+        </p:nvSpPr>
+        <p:spPr>
+          <a:xfrm>
+            <a:off x="10533888" y="7180783"/>
+            <a:ext cx="1874519" cy="118872"/>
+          </a:xfrm>
+          <a:prstGeom prst="rect">
+            <a:avLst/>
+          </a:prstGeom>
+          <a:noFill/>
+          <a:ln>
+            <a:noFill/>
+          </a:ln>
+        </p:spPr>
+        <p:txBody>
+          <a:bodyPr wrap="square" lIns="0" tIns="0" rIns="0" bIns="0" rtlCol="0" anchor="ctr"/>
+          <a:lstStyle/>
+          <a:p>
+            <a:pPr marL="0" indent="0">
+              <a:buNone/>
+            </a:pPr>
+            <a:r>
+              <a:rPr sz="640">
+                <a:solidFill>
+                  <a:srgbClr val="1F2937"/>
+                </a:solidFill>
+                <a:latin typeface="Arial"/>
+              </a:rPr>
+              <a:t>RRM — REMOVE / PROTECT / RE-FIX</a:t>
+            </a:r>
+            <a:endParaRPr lang="en-US" sz="740" dirty="0"/>
+          </a:p>
+        </p:txBody>
+      </p:sp>
+      <p:sp>
+        <p:nvSpPr>
+          <p:cNvPr id="357" name="Legend 357"/>
+          <p:cNvSpPr/>
+          <p:nvPr/>
+        </p:nvSpPr>
+        <p:spPr>
+          <a:xfrm>
+            <a:off x="10323576" y="7370521"/>
+            <a:ext cx="155448" cy="155448"/>
+          </a:xfrm>
+          <a:prstGeom prst="rect">
+            <a:avLst/>
+          </a:prstGeom>
+          <a:noFill/>
+          <a:ln w="19050">
+            <a:solidFill>
+              <a:srgbClr val="000000"/>
+            </a:solidFill>
+          </a:ln>
+        </p:spPr>
+        <p:txBody>
+          <a:bodyPr/>
+          <a:lstStyle/>
+          <a:p>
+            <a:endParaRPr lang="en-US"/>
+          </a:p>
+        </p:txBody>
+      </p:sp>
+      <p:sp>
+        <p:nvSpPr>
+          <p:cNvPr id="358" name="Legend 358"/>
+          <p:cNvSpPr/>
+          <p:nvPr/>
+        </p:nvSpPr>
+        <p:spPr>
+          <a:xfrm>
+            <a:off x="10533888" y="7359091"/>
+            <a:ext cx="1874519" cy="118872"/>
+          </a:xfrm>
+          <a:prstGeom prst="rect">
+            <a:avLst/>
+          </a:prstGeom>
+          <a:noFill/>
+          <a:ln>
+            <a:noFill/>
+          </a:ln>
+        </p:spPr>
+        <p:txBody>
+          <a:bodyPr wrap="square" lIns="0" tIns="0" rIns="0" bIns="0" rtlCol="0" anchor="ctr"/>
+          <a:lstStyle/>
+          <a:p>
+            <a:pPr marL="0" indent="0">
+              <a:buNone/>
+            </a:pPr>
+            <a:r>
+              <a:rPr sz="640">
+                <a:solidFill>
+                  <a:srgbClr val="1F2937"/>
+                </a:solidFill>
+                <a:latin typeface="Arial"/>
+              </a:rPr>
+              <a:t>FITTING LIFTED + OPENING PROTECTED</a:t>
+            </a:r>
+            <a:endParaRPr lang="en-US" sz="740" dirty="0"/>
+          </a:p>
+        </p:txBody>
+      </p:sp>
+      <p:sp>
+        <p:nvSpPr>
+          <p:cNvPr id="359" name="Legend 359"/>
+          <p:cNvSpPr/>
+          <p:nvPr/>
+        </p:nvSpPr>
+        <p:spPr>
+          <a:xfrm>
+            <a:off x="10305288" y="7537399"/>
+            <a:ext cx="2103119" cy="237744"/>
+          </a:xfrm>
+          <a:prstGeom prst="rect">
+            <a:avLst/>
+          </a:prstGeom>
+          <a:noFill/>
+          <a:ln>
+            <a:noFill/>
+          </a:ln>
+        </p:spPr>
+        <p:txBody>
+          <a:bodyPr wrap="square" lIns="0" tIns="0" rIns="0" bIns="0" rtlCol="0" anchor="ctr"/>
+          <a:lstStyle/>
+          <a:p>
+            <a:pPr marL="0" indent="0">
+              <a:buNone/>
+            </a:pPr>
+            <a:r>
+              <a:rPr sz="660" b="1">
+                <a:solidFill>
+                  <a:srgbClr val="1E2761"/>
+                </a:solidFill>
+                <a:latin typeface="Arial"/>
+              </a:rPr>
+              <a:t>EXISTING ASSETS (AS-BUILT)</a:t>
+            </a:r>
+            <a:endParaRPr lang="en-US" sz="740" dirty="0"/>
+          </a:p>
+        </p:txBody>
+      </p:sp>
+      <p:sp>
+        <p:nvSpPr>
+          <p:cNvPr id="360" name="Legend 360"/>
+          <p:cNvSpPr/>
+          <p:nvPr/>
+        </p:nvSpPr>
+        <p:spPr>
+          <a:xfrm>
+            <a:off x="10355580" y="7759141"/>
+            <a:ext cx="91440" cy="91440"/>
+          </a:xfrm>
+          <a:prstGeom prst="ellipse">
+            <a:avLst/>
+          </a:prstGeom>
+          <a:solidFill>
+            <a:srgbClr val="12A5B8"/>
+          </a:solidFill>
+          <a:ln w="6350">
+            <a:solidFill>
+              <a:srgbClr val="12A5B8"/>
+            </a:solidFill>
+            <a:prstDash val="solid"/>
+          </a:ln>
+        </p:spPr>
+        <p:txBody>
+          <a:bodyPr/>
+          <a:lstStyle/>
+          <a:p>
+            <a:endParaRPr lang="en-US"/>
+          </a:p>
+        </p:txBody>
+      </p:sp>
+      <p:sp>
+        <p:nvSpPr>
+          <p:cNvPr id="361" name="Legend 361"/>
+          <p:cNvSpPr/>
+          <p:nvPr/>
+        </p:nvSpPr>
+        <p:spPr>
+          <a:xfrm>
+            <a:off x="10533888" y="7715707"/>
+            <a:ext cx="1874519" cy="118872"/>
+          </a:xfrm>
+          <a:prstGeom prst="rect">
+            <a:avLst/>
+          </a:prstGeom>
+          <a:noFill/>
+          <a:ln>
+            <a:noFill/>
+          </a:ln>
+        </p:spPr>
+        <p:txBody>
+          <a:bodyPr wrap="square" lIns="0" tIns="0" rIns="0" bIns="0" rtlCol="0" anchor="ctr"/>
+          <a:lstStyle/>
+          <a:p>
+            <a:pPr marL="0" indent="0">
+              <a:buNone/>
+            </a:pPr>
+            <a:r>
+              <a:rPr sz="640">
+                <a:solidFill>
+                  <a:srgbClr val="1F2937"/>
+                </a:solidFill>
+                <a:latin typeface="Arial"/>
+              </a:rPr>
+              <a:t>EXISTING AGL ASSET — see asset key</a:t>
+            </a:r>
+            <a:endParaRPr lang="en-US" sz="740" dirty="0"/>
+          </a:p>
+        </p:txBody>
+      </p:sp>
+      <p:sp>
+        <p:nvSpPr>
+          <p:cNvPr id="362" name="Legend 362"/>
+          <p:cNvSpPr/>
+          <p:nvPr/>
+        </p:nvSpPr>
+        <p:spPr>
+          <a:xfrm>
+            <a:off x="10323576" y="7905445"/>
+            <a:ext cx="155448" cy="155448"/>
+          </a:xfrm>
+          <a:prstGeom prst="rect">
+            <a:avLst/>
+          </a:prstGeom>
+          <a:noFill/>
+          <a:ln w="19050">
+            <a:solidFill>
+              <a:srgbClr val="BB00BB"/>
+            </a:solidFill>
+          </a:ln>
+        </p:spPr>
+        <p:txBody>
+          <a:bodyPr/>
+          <a:lstStyle/>
+          <a:p>
+            <a:endParaRPr lang="en-US"/>
+          </a:p>
+        </p:txBody>
+      </p:sp>
+      <p:sp>
+        <p:nvSpPr>
+          <p:cNvPr id="363" name="Legend 363"/>
+          <p:cNvSpPr/>
+          <p:nvPr/>
+        </p:nvSpPr>
+        <p:spPr>
+          <a:xfrm>
+            <a:off x="10533888" y="7894015"/>
+            <a:ext cx="1874519" cy="118872"/>
+          </a:xfrm>
+          <a:prstGeom prst="rect">
+            <a:avLst/>
+          </a:prstGeom>
+          <a:noFill/>
+          <a:ln>
+            <a:noFill/>
+          </a:ln>
+        </p:spPr>
+        <p:txBody>
+          <a:bodyPr wrap="square" lIns="0" tIns="0" rIns="0" bIns="0" rtlCol="0" anchor="ctr"/>
+          <a:lstStyle/>
+          <a:p>
+            <a:pPr marL="0" indent="0">
+              <a:buNone/>
+            </a:pPr>
+            <a:r>
+              <a:rPr sz="640">
+                <a:solidFill>
+                  <a:srgbClr val="1F2937"/>
+                </a:solidFill>
+                <a:latin typeface="Arial"/>
+              </a:rPr>
+              <a:t>AGL FEED MANHOLE / HANDHOLE</a:t>
+            </a:r>
+            <a:endParaRPr lang="en-US" sz="740" dirty="0"/>
+          </a:p>
+        </p:txBody>
+      </p:sp>
+      <p:sp>
+        <p:nvSpPr>
+          <p:cNvPr id="364" name="Legend 364"/>
+          <p:cNvSpPr/>
+          <p:nvPr/>
+        </p:nvSpPr>
+        <p:spPr>
+          <a:xfrm>
+            <a:off x="10305288" y="8072323"/>
+            <a:ext cx="2103119" cy="237744"/>
+          </a:xfrm>
+          <a:prstGeom prst="rect">
+            <a:avLst/>
+          </a:prstGeom>
+          <a:noFill/>
+          <a:ln>
+            <a:noFill/>
+          </a:ln>
+        </p:spPr>
+        <p:txBody>
+          <a:bodyPr wrap="square" lIns="0" tIns="0" rIns="0" bIns="0" rtlCol="0" anchor="ctr"/>
+          <a:lstStyle/>
+          <a:p>
+            <a:pPr marL="0" indent="0">
+              <a:buNone/>
+            </a:pPr>
+            <a:r>
+              <a:rPr sz="660" b="1">
+                <a:solidFill>
+                  <a:srgbClr val="1E2761"/>
+                </a:solidFill>
+                <a:latin typeface="Arial"/>
+              </a:rPr>
+              <a:t>AREAS &amp; LINEWORK</a:t>
+            </a:r>
+            <a:endParaRPr lang="en-US" sz="740" dirty="0"/>
+          </a:p>
+        </p:txBody>
+      </p:sp>
+      <p:sp>
+        <p:nvSpPr>
+          <p:cNvPr id="365" name="Legend 365"/>
+          <p:cNvSpPr/>
+          <p:nvPr/>
+        </p:nvSpPr>
+        <p:spPr>
+          <a:xfrm>
+            <a:off x="10305288" y="8280349"/>
+            <a:ext cx="201168" cy="118872"/>
+          </a:xfrm>
+          <a:prstGeom prst="rect">
+            <a:avLst/>
+          </a:prstGeom>
+          <a:solidFill>
+            <a:srgbClr val="BFBFBF"/>
+          </a:solidFill>
+          <a:ln w="6350">
+            <a:solidFill>
+              <a:srgbClr val="7A8288"/>
+            </a:solidFill>
+          </a:ln>
+        </p:spPr>
+        <p:txBody>
+          <a:bodyPr/>
+          <a:lstStyle/>
+          <a:p>
+            <a:endParaRPr lang="en-US"/>
+          </a:p>
+        </p:txBody>
+      </p:sp>
+      <p:sp>
+        <p:nvSpPr>
+          <p:cNvPr id="366" name="Legend 366"/>
+          <p:cNvSpPr/>
+          <p:nvPr/>
+        </p:nvSpPr>
+        <p:spPr>
+          <a:xfrm>
+            <a:off x="10533888" y="8250631"/>
+            <a:ext cx="1874519" cy="118872"/>
+          </a:xfrm>
+          <a:prstGeom prst="rect">
+            <a:avLst/>
+          </a:prstGeom>
+          <a:noFill/>
+          <a:ln>
+            <a:noFill/>
+          </a:ln>
+        </p:spPr>
+        <p:txBody>
+          <a:bodyPr wrap="square" lIns="0" tIns="0" rIns="0" bIns="0" rtlCol="0" anchor="ctr"/>
+          <a:lstStyle/>
+          <a:p>
+            <a:pPr marL="0" indent="0">
+              <a:buNone/>
+            </a:pPr>
+            <a:r>
+              <a:rPr sz="640">
+                <a:solidFill>
+                  <a:srgbClr val="1F2937"/>
+                </a:solidFill>
+                <a:latin typeface="Arial"/>
+              </a:rPr>
+              <a:t>MILLING / CUT AREA</a:t>
+            </a:r>
+            <a:endParaRPr lang="en-US" sz="740" dirty="0"/>
+          </a:p>
+        </p:txBody>
+      </p:sp>
+      <p:sp>
+        <p:nvSpPr>
+          <p:cNvPr id="367" name="Legend 367"/>
+          <p:cNvSpPr/>
+          <p:nvPr/>
+        </p:nvSpPr>
+        <p:spPr>
+          <a:xfrm>
+            <a:off x="10287000" y="8518093"/>
+            <a:ext cx="237744" cy="914"/>
+          </a:xfrm>
+          <a:prstGeom prst="line">
+            <a:avLst/>
+          </a:prstGeom>
+          <a:noFill/>
+          <a:ln w="19050">
+            <a:solidFill>
+              <a:srgbClr val="CC0000"/>
+            </a:solidFill>
+            <a:prstDash val="solid"/>
+          </a:ln>
+        </p:spPr>
+        <p:txBody>
+          <a:bodyPr/>
+          <a:lstStyle/>
+          <a:p>
+            <a:endParaRPr lang="en-US"/>
+          </a:p>
+        </p:txBody>
+      </p:sp>
+      <p:sp>
+        <p:nvSpPr>
+          <p:cNvPr id="368" name="Legend 368"/>
+          <p:cNvSpPr/>
+          <p:nvPr/>
+        </p:nvSpPr>
+        <p:spPr>
+          <a:xfrm>
+            <a:off x="10533888" y="8428939"/>
+            <a:ext cx="1874519" cy="118872"/>
+          </a:xfrm>
+          <a:prstGeom prst="rect">
+            <a:avLst/>
+          </a:prstGeom>
+          <a:noFill/>
+          <a:ln>
+            <a:noFill/>
+          </a:ln>
+        </p:spPr>
+        <p:txBody>
+          <a:bodyPr wrap="square" lIns="0" tIns="0" rIns="0" bIns="0" rtlCol="0" anchor="ctr"/>
+          <a:lstStyle/>
+          <a:p>
+            <a:pPr marL="0" indent="0">
+              <a:buNone/>
+            </a:pPr>
+            <a:r>
+              <a:rPr sz="640">
+                <a:solidFill>
+                  <a:srgbClr val="1F2937"/>
+                </a:solidFill>
+                <a:latin typeface="Arial"/>
+              </a:rPr>
+              <a:t>AGL WORKS DEMARCATION (GOVERNING)</a:t>
+            </a:r>
+            <a:endParaRPr lang="en-US" sz="740" dirty="0"/>
+          </a:p>
+        </p:txBody>
+      </p:sp>
+      <p:sp>
+        <p:nvSpPr>
+          <p:cNvPr id="369" name="Legend 369"/>
+          <p:cNvSpPr/>
+          <p:nvPr/>
+        </p:nvSpPr>
+        <p:spPr>
+          <a:xfrm>
+            <a:off x="10287000" y="8696401"/>
+            <a:ext cx="237744" cy="914"/>
+          </a:xfrm>
+          <a:prstGeom prst="line">
+            <a:avLst/>
+          </a:prstGeom>
+          <a:noFill/>
+          <a:ln w="19050">
+            <a:solidFill>
+              <a:srgbClr val="BB00BB"/>
+            </a:solidFill>
+            <a:prstDash val="dash"/>
+          </a:ln>
+        </p:spPr>
+        <p:txBody>
+          <a:bodyPr/>
+          <a:lstStyle/>
+          <a:p>
+            <a:endParaRPr lang="en-US"/>
+          </a:p>
+        </p:txBody>
+      </p:sp>
+      <p:sp>
+        <p:nvSpPr>
+          <p:cNvPr id="370" name="Legend 370"/>
+          <p:cNvSpPr/>
+          <p:nvPr/>
+        </p:nvSpPr>
+        <p:spPr>
+          <a:xfrm>
+            <a:off x="10533888" y="8607247"/>
+            <a:ext cx="1874519" cy="118872"/>
+          </a:xfrm>
+          <a:prstGeom prst="rect">
+            <a:avLst/>
+          </a:prstGeom>
+          <a:noFill/>
+          <a:ln>
+            <a:noFill/>
+          </a:ln>
+        </p:spPr>
+        <p:txBody>
+          <a:bodyPr wrap="square" lIns="0" tIns="0" rIns="0" bIns="0" rtlCol="0" anchor="ctr"/>
+          <a:lstStyle/>
+          <a:p>
+            <a:pPr marL="0" indent="0">
+              <a:buNone/>
+            </a:pPr>
+            <a:r>
+              <a:rPr sz="640">
+                <a:solidFill>
+                  <a:srgbClr val="1F2937"/>
+                </a:solidFill>
+                <a:latin typeface="Arial"/>
+              </a:rPr>
+              <a:t>SECONDARY DUCT CROSSING CUT (INDIC.)</a:t>
+            </a:r>
+            <a:endParaRPr lang="en-US" sz="740" dirty="0"/>
+          </a:p>
+        </p:txBody>
+      </p:sp>
+      <p:sp>
+        <p:nvSpPr>
+          <p:cNvPr id="371" name="Legend 371"/>
+          <p:cNvSpPr/>
+          <p:nvPr/>
+        </p:nvSpPr>
+        <p:spPr>
+          <a:xfrm>
+            <a:off x="10287000" y="8874709"/>
+            <a:ext cx="237744" cy="914"/>
+          </a:xfrm>
+          <a:prstGeom prst="line">
+            <a:avLst/>
+          </a:prstGeom>
+          <a:noFill/>
+          <a:ln w="19050">
+            <a:solidFill>
+              <a:srgbClr val="C9CDD2"/>
+            </a:solidFill>
+            <a:prstDash val="dash"/>
+          </a:ln>
+        </p:spPr>
+        <p:txBody>
+          <a:bodyPr/>
+          <a:lstStyle/>
+          <a:p>
+            <a:endParaRPr lang="en-US"/>
+          </a:p>
+        </p:txBody>
+      </p:sp>
+      <p:sp>
+        <p:nvSpPr>
+          <p:cNvPr id="372" name="Legend 372"/>
+          <p:cNvSpPr/>
+          <p:nvPr/>
+        </p:nvSpPr>
+        <p:spPr>
+          <a:xfrm>
+            <a:off x="10533888" y="8785555"/>
+            <a:ext cx="1874519" cy="118872"/>
+          </a:xfrm>
+          <a:prstGeom prst="rect">
+            <a:avLst/>
+          </a:prstGeom>
+          <a:noFill/>
+          <a:ln>
+            <a:noFill/>
+          </a:ln>
+        </p:spPr>
+        <p:txBody>
+          <a:bodyPr wrap="square" lIns="0" tIns="0" rIns="0" bIns="0" rtlCol="0" anchor="ctr"/>
+          <a:lstStyle/>
+          <a:p>
+            <a:pPr marL="0" indent="0">
+              <a:buNone/>
+            </a:pPr>
+            <a:r>
+              <a:rPr sz="640">
+                <a:solidFill>
+                  <a:srgbClr val="1F2937"/>
+                </a:solidFill>
+                <a:latin typeface="Arial"/>
+              </a:rPr>
+              <a:t>INDICATIVE DUCT — LIGHT TO MH / HH</a:t>
+            </a:r>
+            <a:endParaRPr lang="en-US" sz="740" dirty="0"/>
+          </a:p>
+        </p:txBody>
+      </p:sp>
+      <p:sp>
+        <p:nvSpPr>
+          <p:cNvPr id="373" name="Legend 373"/>
+          <p:cNvSpPr/>
+          <p:nvPr/>
+        </p:nvSpPr>
+        <p:spPr>
+          <a:xfrm>
+            <a:off x="10287000" y="9053017"/>
+            <a:ext cx="237744" cy="914"/>
+          </a:xfrm>
+          <a:prstGeom prst="line">
+            <a:avLst/>
+          </a:prstGeom>
+          <a:noFill/>
+          <a:ln w="19050">
+            <a:solidFill>
+              <a:srgbClr val="C7A400"/>
+            </a:solidFill>
+            <a:prstDash val="dashDot"/>
+          </a:ln>
+        </p:spPr>
+        <p:txBody>
+          <a:bodyPr/>
+          <a:lstStyle/>
+          <a:p>
+            <a:endParaRPr lang="en-US"/>
+          </a:p>
+        </p:txBody>
+      </p:sp>
+      <p:sp>
+        <p:nvSpPr>
+          <p:cNvPr id="374" name="Legend 374"/>
+          <p:cNvSpPr/>
+          <p:nvPr/>
+        </p:nvSpPr>
+        <p:spPr>
+          <a:xfrm>
+            <a:off x="10533888" y="8963863"/>
+            <a:ext cx="1874519" cy="118872"/>
+          </a:xfrm>
+          <a:prstGeom prst="rect">
+            <a:avLst/>
+          </a:prstGeom>
+          <a:noFill/>
+          <a:ln>
+            <a:noFill/>
+          </a:ln>
+        </p:spPr>
+        <p:txBody>
+          <a:bodyPr wrap="square" lIns="0" tIns="0" rIns="0" bIns="0" rtlCol="0" anchor="ctr"/>
+          <a:lstStyle/>
+          <a:p>
+            <a:pPr marL="0" indent="0">
+              <a:buNone/>
+            </a:pPr>
+            <a:r>
+              <a:rPr sz="640">
+                <a:solidFill>
+                  <a:srgbClr val="1F2937"/>
+                </a:solidFill>
+                <a:latin typeface="Arial"/>
+              </a:rPr>
+              <a:t>TAXIWAY CENTRELINE (THROUGH TCC)</a:t>
+            </a:r>
+            <a:endParaRPr lang="en-US" sz="740" dirty="0"/>
+          </a:p>
+        </p:txBody>
+      </p:sp>
+      <p:sp>
+        <p:nvSpPr>
+          <p:cNvPr id="375" name="Legend 375"/>
+          <p:cNvSpPr/>
+          <p:nvPr/>
+        </p:nvSpPr>
+        <p:spPr>
+          <a:xfrm>
+            <a:off x="10287000" y="9231325"/>
+            <a:ext cx="237744" cy="914"/>
+          </a:xfrm>
+          <a:prstGeom prst="line">
+            <a:avLst/>
+          </a:prstGeom>
+          <a:noFill/>
+          <a:ln w="19050">
+            <a:solidFill>
+              <a:srgbClr val="8B0000"/>
+            </a:solidFill>
+            <a:prstDash val="solid"/>
+          </a:ln>
+        </p:spPr>
+        <p:txBody>
+          <a:bodyPr/>
+          <a:lstStyle/>
+          <a:p>
+            <a:endParaRPr lang="en-US"/>
+          </a:p>
+        </p:txBody>
+      </p:sp>
+      <p:sp>
+        <p:nvSpPr>
+          <p:cNvPr id="376" name="Legend 376"/>
+          <p:cNvSpPr/>
+          <p:nvPr/>
+        </p:nvSpPr>
+        <p:spPr>
+          <a:xfrm>
+            <a:off x="10533888" y="9142171"/>
+            <a:ext cx="1874519" cy="118872"/>
+          </a:xfrm>
+          <a:prstGeom prst="rect">
+            <a:avLst/>
+          </a:prstGeom>
+          <a:noFill/>
+          <a:ln>
+            <a:noFill/>
+          </a:ln>
+        </p:spPr>
+        <p:txBody>
+          <a:bodyPr wrap="square" lIns="0" tIns="0" rIns="0" bIns="0" rtlCol="0" anchor="ctr"/>
+          <a:lstStyle/>
+          <a:p>
+            <a:pPr marL="0" indent="0">
+              <a:buNone/>
+            </a:pPr>
+            <a:r>
+              <a:rPr sz="640">
+                <a:solidFill>
+                  <a:srgbClr val="1F2937"/>
+                </a:solidFill>
+                <a:latin typeface="Arial"/>
+              </a:rPr>
+              <a:t>STOP BAR (THROUGH SBC)</a:t>
+            </a:r>
+            <a:endParaRPr lang="en-US" sz="740" dirty="0"/>
+          </a:p>
+        </p:txBody>
+      </p:sp>
+      <p:sp>
+        <p:nvSpPr>
+          <p:cNvPr id="377" name="Legend 377"/>
+          <p:cNvSpPr/>
+          <p:nvPr/>
+        </p:nvSpPr>
+        <p:spPr>
+          <a:xfrm>
+            <a:off x="10287000" y="9409633"/>
+            <a:ext cx="237744" cy="914"/>
+          </a:xfrm>
+          <a:prstGeom prst="line">
+            <a:avLst/>
+          </a:prstGeom>
+          <a:noFill/>
+          <a:ln w="19050">
+            <a:solidFill>
+              <a:srgbClr val="7A8288"/>
+            </a:solidFill>
+            <a:prstDash val="solid"/>
+          </a:ln>
+        </p:spPr>
+        <p:txBody>
+          <a:bodyPr/>
+          <a:lstStyle/>
+          <a:p>
+            <a:endParaRPr lang="en-US"/>
+          </a:p>
+        </p:txBody>
+      </p:sp>
+      <p:sp>
+        <p:nvSpPr>
+          <p:cNvPr id="378" name="Legend 378"/>
+          <p:cNvSpPr/>
+          <p:nvPr/>
+        </p:nvSpPr>
+        <p:spPr>
+          <a:xfrm>
+            <a:off x="10533888" y="9320479"/>
+            <a:ext cx="1874519" cy="118872"/>
+          </a:xfrm>
+          <a:prstGeom prst="rect">
+            <a:avLst/>
+          </a:prstGeom>
+          <a:noFill/>
+          <a:ln>
+            <a:noFill/>
+          </a:ln>
+        </p:spPr>
+        <p:txBody>
+          <a:bodyPr wrap="square" lIns="0" tIns="0" rIns="0" bIns="0" rtlCol="0" anchor="ctr"/>
+          <a:lstStyle/>
+          <a:p>
+            <a:pPr marL="0" indent="0">
+              <a:buNone/>
+            </a:pPr>
+            <a:r>
+              <a:rPr sz="640">
+                <a:solidFill>
+                  <a:srgbClr val="1F2937"/>
+                </a:solidFill>
+                <a:latin typeface="Arial"/>
+              </a:rPr>
+              <a:t>TWY EDGE / PAVEMENT (INDIC. 23 m)</a:t>
+            </a:r>
+            <a:endParaRPr lang="en-US" sz="740" dirty="0"/>
+          </a:p>
+        </p:txBody>
+      </p:sp>
+      <p:sp>
+        <p:nvSpPr>
+          <p:cNvPr id="379" name="Legend 379"/>
+          <p:cNvSpPr/>
+          <p:nvPr/>
+        </p:nvSpPr>
+        <p:spPr>
+          <a:xfrm>
+            <a:off x="12454128" y="6645859"/>
+            <a:ext cx="2313431" cy="237744"/>
+          </a:xfrm>
+          <a:prstGeom prst="rect">
+            <a:avLst/>
+          </a:prstGeom>
+          <a:noFill/>
+          <a:ln>
+            <a:noFill/>
+          </a:ln>
+        </p:spPr>
+        <p:txBody>
+          <a:bodyPr wrap="square" lIns="0" tIns="0" rIns="0" bIns="0" rtlCol="0" anchor="ctr"/>
+          <a:lstStyle/>
+          <a:p>
+            <a:pPr marL="0" indent="0">
+              <a:buNone/>
+            </a:pPr>
+            <a:r>
+              <a:rPr sz="660" b="1">
+                <a:solidFill>
+                  <a:srgbClr val="1E2761"/>
+                </a:solidFill>
+                <a:latin typeface="Arial"/>
+              </a:rPr>
+              <a:t>ASSET KEY (AS-BUILT LABEL PREFIX)</a:t>
+            </a:r>
+            <a:endParaRPr lang="en-US" sz="740" dirty="0"/>
+          </a:p>
+        </p:txBody>
+      </p:sp>
+      <p:sp>
+        <p:nvSpPr>
+          <p:cNvPr id="380" name="Legend 380"/>
+          <p:cNvSpPr/>
+          <p:nvPr/>
+        </p:nvSpPr>
+        <p:spPr>
+          <a:xfrm>
+            <a:off x="12682728" y="6824167"/>
+            <a:ext cx="2084831" cy="118872"/>
+          </a:xfrm>
+          <a:prstGeom prst="rect">
+            <a:avLst/>
+          </a:prstGeom>
+          <a:noFill/>
+          <a:ln>
+            <a:noFill/>
+          </a:ln>
+        </p:spPr>
+        <p:txBody>
+          <a:bodyPr wrap="square" lIns="0" tIns="0" rIns="0" bIns="0" rtlCol="0" anchor="ctr"/>
+          <a:lstStyle/>
+          <a:p>
+            <a:pPr marL="0" indent="0">
+              <a:buNone/>
+            </a:pPr>
+            <a:r>
+              <a:rPr sz="600">
+                <a:solidFill>
+                  <a:srgbClr val="1F2937"/>
+                </a:solidFill>
+                <a:latin typeface="Arial"/>
+              </a:rPr>
+              <a:t>EL  —  Existing light base (EBASE)  ×4</a:t>
+            </a:r>
+            <a:endParaRPr lang="en-US" sz="740" dirty="0"/>
+          </a:p>
+        </p:txBody>
+      </p:sp>
+      <p:sp>
+        <p:nvSpPr>
+          <p:cNvPr id="381" name="Legend 381"/>
+          <p:cNvSpPr/>
+          <p:nvPr/>
+        </p:nvSpPr>
+        <p:spPr>
+          <a:xfrm>
+            <a:off x="12682728" y="7002475"/>
+            <a:ext cx="2084831" cy="118872"/>
+          </a:xfrm>
+          <a:prstGeom prst="rect">
+            <a:avLst/>
+          </a:prstGeom>
+          <a:noFill/>
+          <a:ln>
+            <a:noFill/>
+          </a:ln>
+        </p:spPr>
+        <p:txBody>
+          <a:bodyPr wrap="square" lIns="0" tIns="0" rIns="0" bIns="0" rtlCol="0" anchor="ctr"/>
+          <a:lstStyle/>
+          <a:p>
+            <a:pPr marL="0" indent="0">
+              <a:buNone/>
+            </a:pPr>
+            <a:r>
+              <a:rPr sz="600">
+                <a:solidFill>
+                  <a:srgbClr val="1F2937"/>
+                </a:solidFill>
+                <a:latin typeface="Arial"/>
+              </a:rPr>
+              <a:t>SBC102  —  Stop bar light  ×8</a:t>
+            </a:r>
+            <a:endParaRPr lang="en-US" sz="740" dirty="0"/>
+          </a:p>
+        </p:txBody>
+      </p:sp>
+      <p:sp>
+        <p:nvSpPr>
+          <p:cNvPr id="382" name="Legend 382"/>
+          <p:cNvSpPr/>
+          <p:nvPr/>
+        </p:nvSpPr>
+        <p:spPr>
+          <a:xfrm>
+            <a:off x="12682728" y="7180783"/>
+            <a:ext cx="2084831" cy="118872"/>
+          </a:xfrm>
+          <a:prstGeom prst="rect">
+            <a:avLst/>
+          </a:prstGeom>
+          <a:noFill/>
+          <a:ln>
+            <a:noFill/>
+          </a:ln>
+        </p:spPr>
+        <p:txBody>
+          <a:bodyPr wrap="square" lIns="0" tIns="0" rIns="0" bIns="0" rtlCol="0" anchor="ctr"/>
+          <a:lstStyle/>
+          <a:p>
+            <a:pPr marL="0" indent="0">
+              <a:buNone/>
+            </a:pPr>
+            <a:r>
+              <a:rPr sz="600">
+                <a:solidFill>
+                  <a:srgbClr val="1F2937"/>
+                </a:solidFill>
+                <a:latin typeface="Arial"/>
+              </a:rPr>
+              <a:t>SGC102  —  Sign foundation  ×2</a:t>
+            </a:r>
+            <a:endParaRPr lang="en-US" sz="740" dirty="0"/>
+          </a:p>
+        </p:txBody>
+      </p:sp>
+      <p:sp>
+        <p:nvSpPr>
+          <p:cNvPr id="383" name="Legend 383"/>
+          <p:cNvSpPr/>
+          <p:nvPr/>
+        </p:nvSpPr>
+        <p:spPr>
+          <a:xfrm>
+            <a:off x="12682728" y="7359091"/>
+            <a:ext cx="2084831" cy="118872"/>
+          </a:xfrm>
+          <a:prstGeom prst="rect">
+            <a:avLst/>
+          </a:prstGeom>
+          <a:noFill/>
+          <a:ln>
+            <a:noFill/>
+          </a:ln>
+        </p:spPr>
+        <p:txBody>
+          <a:bodyPr wrap="square" lIns="0" tIns="0" rIns="0" bIns="0" rtlCol="0" anchor="ctr"/>
+          <a:lstStyle/>
+          <a:p>
+            <a:pPr marL="0" indent="0">
+              <a:buNone/>
+            </a:pPr>
+            <a:r>
+              <a:rPr sz="600">
+                <a:solidFill>
+                  <a:srgbClr val="1F2937"/>
+                </a:solidFill>
+                <a:latin typeface="Arial"/>
+              </a:rPr>
+              <a:t>TCC102  —  Taxiway centreline light  ×2</a:t>
+            </a:r>
+            <a:endParaRPr lang="en-US" sz="740" dirty="0"/>
+          </a:p>
+        </p:txBody>
+      </p:sp>
+      <p:sp>
+        <p:nvSpPr>
+          <p:cNvPr id="384" name="Legend 384"/>
+          <p:cNvSpPr/>
+          <p:nvPr/>
+        </p:nvSpPr>
+        <p:spPr>
+          <a:xfrm>
+            <a:off x="12682728" y="7537399"/>
+            <a:ext cx="2084831" cy="118872"/>
+          </a:xfrm>
+          <a:prstGeom prst="rect">
+            <a:avLst/>
+          </a:prstGeom>
+          <a:noFill/>
+          <a:ln>
+            <a:noFill/>
+          </a:ln>
+        </p:spPr>
+        <p:txBody>
+          <a:bodyPr wrap="square" lIns="0" tIns="0" rIns="0" bIns="0" rtlCol="0" anchor="ctr"/>
+          <a:lstStyle/>
+          <a:p>
+            <a:pPr marL="0" indent="0">
+              <a:buNone/>
+            </a:pPr>
+            <a:r>
+              <a:rPr sz="600">
+                <a:solidFill>
+                  <a:srgbClr val="1F2937"/>
+                </a:solidFill>
+                <a:latin typeface="Arial"/>
+              </a:rPr>
+              <a:t>TCCECH  —  Taxiway centreline light  ×21</a:t>
+            </a:r>
+            <a:endParaRPr lang="en-US" sz="740" dirty="0"/>
+          </a:p>
+        </p:txBody>
+      </p:sp>
+      <p:sp>
+        <p:nvSpPr>
+          <p:cNvPr id="385" name="Legend 385"/>
+          <p:cNvSpPr/>
+          <p:nvPr/>
+        </p:nvSpPr>
+        <p:spPr>
+          <a:xfrm>
+            <a:off x="12682728" y="7715707"/>
+            <a:ext cx="2084831" cy="118872"/>
+          </a:xfrm>
+          <a:prstGeom prst="rect">
+            <a:avLst/>
+          </a:prstGeom>
+          <a:noFill/>
+          <a:ln>
+            <a:noFill/>
+          </a:ln>
+        </p:spPr>
+        <p:txBody>
+          <a:bodyPr wrap="square" lIns="0" tIns="0" rIns="0" bIns="0" rtlCol="0" anchor="ctr"/>
+          <a:lstStyle/>
+          <a:p>
+            <a:pPr marL="0" indent="0">
+              <a:buNone/>
+            </a:pPr>
+            <a:r>
+              <a:rPr sz="600">
+                <a:solidFill>
+                  <a:srgbClr val="1F2937"/>
+                </a:solidFill>
+                <a:latin typeface="Arial"/>
+              </a:rPr>
+              <a:t>HH  —  Handhole  ×7</a:t>
+            </a:r>
+            <a:endParaRPr lang="en-US" sz="740" dirty="0"/>
+          </a:p>
+        </p:txBody>
+      </p:sp>
+      <p:sp>
+        <p:nvSpPr>
+          <p:cNvPr id="386" name="Legend 386"/>
+          <p:cNvSpPr/>
+          <p:nvPr/>
+        </p:nvSpPr>
+        <p:spPr>
+          <a:xfrm>
+            <a:off x="12682728" y="7894015"/>
+            <a:ext cx="2084831" cy="118872"/>
+          </a:xfrm>
+          <a:prstGeom prst="rect">
+            <a:avLst/>
+          </a:prstGeom>
+          <a:noFill/>
+          <a:ln>
+            <a:noFill/>
+          </a:ln>
+        </p:spPr>
+        <p:txBody>
+          <a:bodyPr wrap="square" lIns="0" tIns="0" rIns="0" bIns="0" rtlCol="0" anchor="ctr"/>
+          <a:lstStyle/>
+          <a:p>
+            <a:pPr marL="0" indent="0">
+              <a:buNone/>
+            </a:pPr>
+            <a:r>
+              <a:rPr sz="600">
+                <a:solidFill>
+                  <a:srgbClr val="1F2937"/>
+                </a:solidFill>
+                <a:latin typeface="Arial"/>
+              </a:rPr>
+              <a:t>MH  —  Manhole  ×2</a:t>
+            </a:r>
+            <a:endParaRPr lang="en-US" sz="740" dirty="0"/>
+          </a:p>
+        </p:txBody>
+      </p:sp>
+      <p:sp>
+        <p:nvSpPr>
+          <p:cNvPr id="387" name="Legend 387"/>
+          <p:cNvSpPr/>
+          <p:nvPr/>
+        </p:nvSpPr>
+        <p:spPr>
+          <a:xfrm>
+            <a:off x="12682728" y="8072323"/>
+            <a:ext cx="2084831" cy="118872"/>
+          </a:xfrm>
+          <a:prstGeom prst="rect">
+            <a:avLst/>
+          </a:prstGeom>
+          <a:noFill/>
+          <a:ln>
+            <a:noFill/>
+          </a:ln>
+        </p:spPr>
+        <p:txBody>
+          <a:bodyPr wrap="square" lIns="0" tIns="0" rIns="0" bIns="0" rtlCol="0" anchor="ctr"/>
+          <a:lstStyle/>
+          <a:p>
+            <a:pPr marL="0" indent="0">
+              <a:buNone/>
+            </a:pPr>
+            <a:r>
+              <a:rPr sz="600">
+                <a:solidFill>
+                  <a:srgbClr val="1F2937"/>
+                </a:solidFill>
+                <a:latin typeface="Arial"/>
+              </a:rPr>
+              <a:t>P4  —  Civil pit (manhole / transformer HH)  ×4</a:t>
+            </a:r>
+            <a:endParaRPr lang="en-US" sz="740" dirty="0"/>
+          </a:p>
+        </p:txBody>
+      </p:sp>
+      <p:sp>
+        <p:nvSpPr>
+          <p:cNvPr id="388" name="Legend 388"/>
+          <p:cNvSpPr/>
+          <p:nvPr/>
+        </p:nvSpPr>
+        <p:spPr>
+          <a:xfrm>
+            <a:off x="12682728" y="8250631"/>
+            <a:ext cx="2084831" cy="118872"/>
+          </a:xfrm>
+          <a:prstGeom prst="rect">
+            <a:avLst/>
+          </a:prstGeom>
+          <a:noFill/>
+          <a:ln>
+            <a:noFill/>
+          </a:ln>
+        </p:spPr>
+        <p:txBody>
+          <a:bodyPr wrap="square" lIns="0" tIns="0" rIns="0" bIns="0" rtlCol="0" anchor="ctr"/>
+          <a:lstStyle/>
+          <a:p>
+            <a:pPr marL="0" indent="0">
+              <a:buNone/>
+            </a:pPr>
+            <a:r>
+              <a:rPr sz="600">
+                <a:solidFill>
+                  <a:srgbClr val="1F2937"/>
+                </a:solidFill>
+                <a:latin typeface="Arial"/>
+              </a:rPr>
+              <a:t>RRM  —  Runway guard light / RRM  ×9</a:t>
+            </a:r>
+            <a:endParaRPr lang="en-US" sz="740" dirty="0"/>
+          </a:p>
+        </p:txBody>
+      </p:sp>
     </p:spTree>
     <p:extLst>
       <p:ext uri="{BB962C8B-B14F-4D97-AF65-F5344CB8AC3E}">

--- a/skills/zia-mta-basemap/examples/twy-e-asbuilt-ducts/fieldsheet/TWY_E_AGL_Shop_Drawing_ZIA_P07.pptx
+++ b/skills/zia-mta-basemap/examples/twy-e-asbuilt-ducts/fieldsheet/TWY_E_AGL_Shop_Drawing_ZIA_P07.pptx
@@ -25093,7 +25093,7 @@
         </p:nvSpPr>
         <p:spPr>
           <a:xfrm>
-            <a:off x="2027061" y="3841476"/>
+            <a:off x="2027061" y="3910056"/>
             <a:ext cx="1051560" cy="146304"/>
           </a:xfrm>
           <a:prstGeom prst="rect">
@@ -25175,7 +25175,7 @@
         </p:nvSpPr>
         <p:spPr>
           <a:xfrm>
-            <a:off x="1351632" y="3511239"/>
+            <a:off x="1351632" y="3579819"/>
             <a:ext cx="1051560" cy="146304"/>
           </a:xfrm>
           <a:prstGeom prst="rect">
@@ -25339,7 +25339,7 @@
         </p:nvSpPr>
         <p:spPr>
           <a:xfrm>
-            <a:off x="2892702" y="4239266"/>
+            <a:off x="2892702" y="4307846"/>
             <a:ext cx="1051560" cy="146304"/>
           </a:xfrm>
           <a:prstGeom prst="rect">
@@ -25421,7 +25421,7 @@
         </p:nvSpPr>
         <p:spPr>
           <a:xfrm>
-            <a:off x="2330096" y="3863458"/>
+            <a:off x="2330096" y="4000618"/>
             <a:ext cx="1051560" cy="146304"/>
           </a:xfrm>
           <a:prstGeom prst="rect">
@@ -25585,7 +25585,7 @@
         </p:nvSpPr>
         <p:spPr>
           <a:xfrm>
-            <a:off x="2918098" y="4331712"/>
+            <a:off x="2918098" y="4400292"/>
             <a:ext cx="1051560" cy="146304"/>
           </a:xfrm>
           <a:prstGeom prst="rect">
@@ -43913,7 +43913,7 @@
                 </a:solidFill>
                 <a:latin typeface="Arial"/>
               </a:rPr>
-              <a:t>8</a:t>
+              <a:t>4</a:t>
             </a:r>
           </a:p>
         </p:txBody>
@@ -43965,7 +43965,7 @@
                 </a:solidFill>
                 <a:latin typeface="Arial"/>
               </a:rPr>
-              <a:t>4 (LOC-03) + 4 TCC103 unconfirmed</a:t>
+              <a:t>LOC-03 only  ·  4 TCC103 not counted</a:t>
             </a:r>
           </a:p>
         </p:txBody>
